--- a/presentation/Aking_Bukid_Capstone_v2.pptx
+++ b/presentation/Aking_Bukid_Capstone_v2.pptx
@@ -5,18 +5,19 @@
     <p:sldMasterId id="2147483648" r:id="rId1"/>
   </p:sldMasterIdLst>
   <p:sldIdLst>
-    <p:sldId id="256" r:id="rId7"/>
-    <p:sldId id="257" r:id="rId8"/>
-    <p:sldId id="258" r:id="rId9"/>
-    <p:sldId id="259" r:id="rId10"/>
-    <p:sldId id="260" r:id="rId11"/>
-    <p:sldId id="261" r:id="rId12"/>
-    <p:sldId id="262" r:id="rId13"/>
-    <p:sldId id="263" r:id="rId14"/>
-    <p:sldId id="264" r:id="rId15"/>
-    <p:sldId id="265" r:id="rId16"/>
+    <p:sldId id="256" r:id="rId2"/>
+    <p:sldId id="257" r:id="rId3"/>
+    <p:sldId id="258" r:id="rId4"/>
+    <p:sldId id="259" r:id="rId5"/>
+    <p:sldId id="260" r:id="rId6"/>
+    <p:sldId id="261" r:id="rId7"/>
+    <p:sldId id="262" r:id="rId8"/>
+    <p:sldId id="263" r:id="rId9"/>
+    <p:sldId id="264" r:id="rId10"/>
+    <p:sldId id="265" r:id="rId11"/>
+    <p:sldId id="267" r:id="rId12"/>
   </p:sldIdLst>
-  <p:sldSz cx="12191695" cy="6858000" type="screen4x3"/>
+  <p:sldSz cx="12192000" cy="6858000"/>
   <p:notesSz cx="6858000" cy="9144000"/>
   <p:defaultTextStyle>
     <a:defPPr>
@@ -113,6 +114,22 @@
       </a:defRPr>
     </a:lvl9pPr>
   </p:defaultTextStyle>
+  <p:extLst>
+    <p:ext uri="{EFAFB233-063F-42B5-8137-9DF3F51BA10A}">
+      <p15:sldGuideLst xmlns:p15="http://schemas.microsoft.com/office/powerpoint/2012/main">
+        <p15:guide id="1" orient="horz" pos="2160">
+          <p15:clr>
+            <a:srgbClr val="A4A3A4"/>
+          </p15:clr>
+        </p15:guide>
+        <p15:guide id="2" pos="2880">
+          <p15:clr>
+            <a:srgbClr val="A4A3A4"/>
+          </p15:clr>
+        </p15:guide>
+      </p15:sldGuideLst>
+    </p:ext>
+  </p:extLst>
 </p:presentation>
 </file>
 
@@ -154,10 +171,9 @@
           <a:lstStyle/>
           <a:p>
             <a:r>
-              <a:rPr lang="en-US" smtClean="0"/>
+              <a:rPr lang="en-US"/>
               <a:t>Click to edit Master title style</a:t>
             </a:r>
-            <a:endParaRPr lang="en-US"/>
           </a:p>
         </p:txBody>
       </p:sp>
@@ -273,10 +289,9 @@
           </a:lstStyle>
           <a:p>
             <a:r>
-              <a:rPr lang="en-US" smtClean="0"/>
+              <a:rPr lang="en-US"/>
               <a:t>Click to edit Master subtitle style</a:t>
             </a:r>
-            <a:endParaRPr lang="en-US"/>
           </a:p>
         </p:txBody>
       </p:sp>
@@ -297,7 +312,7 @@
           <a:p>
             <a:fld id="{5BCAD085-E8A6-8845-BD4E-CB4CCA059FC4}" type="datetimeFigureOut">
               <a:rPr lang="en-US" smtClean="0"/>
-              <a:t>1/27/13</a:t>
+              <a:t>6/24/2026</a:t>
             </a:fld>
             <a:endParaRPr lang="en-US"/>
           </a:p>
@@ -391,10 +406,9 @@
           <a:lstStyle/>
           <a:p>
             <a:r>
-              <a:rPr lang="en-US" smtClean="0"/>
+              <a:rPr lang="en-US"/>
               <a:t>Click to edit Master title style</a:t>
             </a:r>
-            <a:endParaRPr lang="en-US"/>
           </a:p>
         </p:txBody>
       </p:sp>
@@ -415,38 +429,37 @@
           <a:p>
             <a:pPr lvl="0"/>
             <a:r>
-              <a:rPr lang="en-US" smtClean="0"/>
+              <a:rPr lang="en-US"/>
               <a:t>Click to edit Master text styles</a:t>
             </a:r>
           </a:p>
           <a:p>
             <a:pPr lvl="1"/>
             <a:r>
-              <a:rPr lang="en-US" smtClean="0"/>
+              <a:rPr lang="en-US"/>
               <a:t>Second level</a:t>
             </a:r>
           </a:p>
           <a:p>
             <a:pPr lvl="2"/>
             <a:r>
-              <a:rPr lang="en-US" smtClean="0"/>
+              <a:rPr lang="en-US"/>
               <a:t>Third level</a:t>
             </a:r>
           </a:p>
           <a:p>
             <a:pPr lvl="3"/>
             <a:r>
-              <a:rPr lang="en-US" smtClean="0"/>
+              <a:rPr lang="en-US"/>
               <a:t>Fourth level</a:t>
             </a:r>
           </a:p>
           <a:p>
             <a:pPr lvl="4"/>
             <a:r>
-              <a:rPr lang="en-US" smtClean="0"/>
+              <a:rPr lang="en-US"/>
               <a:t>Fifth level</a:t>
             </a:r>
-            <a:endParaRPr lang="en-US"/>
           </a:p>
         </p:txBody>
       </p:sp>
@@ -467,7 +480,7 @@
           <a:p>
             <a:fld id="{5BCAD085-E8A6-8845-BD4E-CB4CCA059FC4}" type="datetimeFigureOut">
               <a:rPr lang="en-US" smtClean="0"/>
-              <a:t>1/27/13</a:t>
+              <a:t>6/24/2026</a:t>
             </a:fld>
             <a:endParaRPr lang="en-US"/>
           </a:p>
@@ -566,10 +579,9 @@
           <a:lstStyle/>
           <a:p>
             <a:r>
-              <a:rPr lang="en-US" smtClean="0"/>
+              <a:rPr lang="en-US"/>
               <a:t>Click to edit Master title style</a:t>
             </a:r>
-            <a:endParaRPr lang="en-US"/>
           </a:p>
         </p:txBody>
       </p:sp>
@@ -595,38 +607,37 @@
           <a:p>
             <a:pPr lvl="0"/>
             <a:r>
-              <a:rPr lang="en-US" smtClean="0"/>
+              <a:rPr lang="en-US"/>
               <a:t>Click to edit Master text styles</a:t>
             </a:r>
           </a:p>
           <a:p>
             <a:pPr lvl="1"/>
             <a:r>
-              <a:rPr lang="en-US" smtClean="0"/>
+              <a:rPr lang="en-US"/>
               <a:t>Second level</a:t>
             </a:r>
           </a:p>
           <a:p>
             <a:pPr lvl="2"/>
             <a:r>
-              <a:rPr lang="en-US" smtClean="0"/>
+              <a:rPr lang="en-US"/>
               <a:t>Third level</a:t>
             </a:r>
           </a:p>
           <a:p>
             <a:pPr lvl="3"/>
             <a:r>
-              <a:rPr lang="en-US" smtClean="0"/>
+              <a:rPr lang="en-US"/>
               <a:t>Fourth level</a:t>
             </a:r>
           </a:p>
           <a:p>
             <a:pPr lvl="4"/>
             <a:r>
-              <a:rPr lang="en-US" smtClean="0"/>
+              <a:rPr lang="en-US"/>
               <a:t>Fifth level</a:t>
             </a:r>
-            <a:endParaRPr lang="en-US"/>
           </a:p>
         </p:txBody>
       </p:sp>
@@ -647,7 +658,7 @@
           <a:p>
             <a:fld id="{5BCAD085-E8A6-8845-BD4E-CB4CCA059FC4}" type="datetimeFigureOut">
               <a:rPr lang="en-US" smtClean="0"/>
-              <a:t>1/27/13</a:t>
+              <a:t>6/24/2026</a:t>
             </a:fld>
             <a:endParaRPr lang="en-US"/>
           </a:p>
@@ -741,10 +752,9 @@
           <a:lstStyle/>
           <a:p>
             <a:r>
-              <a:rPr lang="en-US" smtClean="0"/>
+              <a:rPr lang="en-US"/>
               <a:t>Click to edit Master title style</a:t>
             </a:r>
-            <a:endParaRPr lang="en-US"/>
           </a:p>
         </p:txBody>
       </p:sp>
@@ -765,38 +775,37 @@
           <a:p>
             <a:pPr lvl="0"/>
             <a:r>
-              <a:rPr lang="en-US" smtClean="0"/>
+              <a:rPr lang="en-US"/>
               <a:t>Click to edit Master text styles</a:t>
             </a:r>
           </a:p>
           <a:p>
             <a:pPr lvl="1"/>
             <a:r>
-              <a:rPr lang="en-US" smtClean="0"/>
+              <a:rPr lang="en-US"/>
               <a:t>Second level</a:t>
             </a:r>
           </a:p>
           <a:p>
             <a:pPr lvl="2"/>
             <a:r>
-              <a:rPr lang="en-US" smtClean="0"/>
+              <a:rPr lang="en-US"/>
               <a:t>Third level</a:t>
             </a:r>
           </a:p>
           <a:p>
             <a:pPr lvl="3"/>
             <a:r>
-              <a:rPr lang="en-US" smtClean="0"/>
+              <a:rPr lang="en-US"/>
               <a:t>Fourth level</a:t>
             </a:r>
           </a:p>
           <a:p>
             <a:pPr lvl="4"/>
             <a:r>
-              <a:rPr lang="en-US" smtClean="0"/>
+              <a:rPr lang="en-US"/>
               <a:t>Fifth level</a:t>
             </a:r>
-            <a:endParaRPr lang="en-US"/>
           </a:p>
         </p:txBody>
       </p:sp>
@@ -817,7 +826,7 @@
           <a:p>
             <a:fld id="{5BCAD085-E8A6-8845-BD4E-CB4CCA059FC4}" type="datetimeFigureOut">
               <a:rPr lang="en-US" smtClean="0"/>
-              <a:t>1/27/13</a:t>
+              <a:t>6/24/2026</a:t>
             </a:fld>
             <a:endParaRPr lang="en-US"/>
           </a:p>
@@ -920,10 +929,9 @@
           </a:lstStyle>
           <a:p>
             <a:r>
-              <a:rPr lang="en-US" smtClean="0"/>
+              <a:rPr lang="en-US"/>
               <a:t>Click to edit Master title style</a:t>
             </a:r>
-            <a:endParaRPr lang="en-US"/>
           </a:p>
         </p:txBody>
       </p:sp>
@@ -1040,7 +1048,7 @@
           <a:p>
             <a:pPr lvl="0"/>
             <a:r>
-              <a:rPr lang="en-US" smtClean="0"/>
+              <a:rPr lang="en-US"/>
               <a:t>Click to edit Master text styles</a:t>
             </a:r>
           </a:p>
@@ -1063,7 +1071,7 @@
           <a:p>
             <a:fld id="{5BCAD085-E8A6-8845-BD4E-CB4CCA059FC4}" type="datetimeFigureOut">
               <a:rPr lang="en-US" smtClean="0"/>
-              <a:t>1/27/13</a:t>
+              <a:t>6/24/2026</a:t>
             </a:fld>
             <a:endParaRPr lang="en-US"/>
           </a:p>
@@ -1157,10 +1165,9 @@
           <a:lstStyle/>
           <a:p>
             <a:r>
-              <a:rPr lang="en-US" smtClean="0"/>
+              <a:rPr lang="en-US"/>
               <a:t>Click to edit Master title style</a:t>
             </a:r>
-            <a:endParaRPr lang="en-US"/>
           </a:p>
         </p:txBody>
       </p:sp>
@@ -1214,38 +1221,37 @@
           <a:p>
             <a:pPr lvl="0"/>
             <a:r>
-              <a:rPr lang="en-US" smtClean="0"/>
+              <a:rPr lang="en-US"/>
               <a:t>Click to edit Master text styles</a:t>
             </a:r>
           </a:p>
           <a:p>
             <a:pPr lvl="1"/>
             <a:r>
-              <a:rPr lang="en-US" smtClean="0"/>
+              <a:rPr lang="en-US"/>
               <a:t>Second level</a:t>
             </a:r>
           </a:p>
           <a:p>
             <a:pPr lvl="2"/>
             <a:r>
-              <a:rPr lang="en-US" smtClean="0"/>
+              <a:rPr lang="en-US"/>
               <a:t>Third level</a:t>
             </a:r>
           </a:p>
           <a:p>
             <a:pPr lvl="3"/>
             <a:r>
-              <a:rPr lang="en-US" smtClean="0"/>
+              <a:rPr lang="en-US"/>
               <a:t>Fourth level</a:t>
             </a:r>
           </a:p>
           <a:p>
             <a:pPr lvl="4"/>
             <a:r>
-              <a:rPr lang="en-US" smtClean="0"/>
+              <a:rPr lang="en-US"/>
               <a:t>Fifth level</a:t>
             </a:r>
-            <a:endParaRPr lang="en-US"/>
           </a:p>
         </p:txBody>
       </p:sp>
@@ -1299,38 +1305,37 @@
           <a:p>
             <a:pPr lvl="0"/>
             <a:r>
-              <a:rPr lang="en-US" smtClean="0"/>
+              <a:rPr lang="en-US"/>
               <a:t>Click to edit Master text styles</a:t>
             </a:r>
           </a:p>
           <a:p>
             <a:pPr lvl="1"/>
             <a:r>
-              <a:rPr lang="en-US" smtClean="0"/>
+              <a:rPr lang="en-US"/>
               <a:t>Second level</a:t>
             </a:r>
           </a:p>
           <a:p>
             <a:pPr lvl="2"/>
             <a:r>
-              <a:rPr lang="en-US" smtClean="0"/>
+              <a:rPr lang="en-US"/>
               <a:t>Third level</a:t>
             </a:r>
           </a:p>
           <a:p>
             <a:pPr lvl="3"/>
             <a:r>
-              <a:rPr lang="en-US" smtClean="0"/>
+              <a:rPr lang="en-US"/>
               <a:t>Fourth level</a:t>
             </a:r>
           </a:p>
           <a:p>
             <a:pPr lvl="4"/>
             <a:r>
-              <a:rPr lang="en-US" smtClean="0"/>
+              <a:rPr lang="en-US"/>
               <a:t>Fifth level</a:t>
             </a:r>
-            <a:endParaRPr lang="en-US"/>
           </a:p>
         </p:txBody>
       </p:sp>
@@ -1351,7 +1356,7 @@
           <a:p>
             <a:fld id="{5BCAD085-E8A6-8845-BD4E-CB4CCA059FC4}" type="datetimeFigureOut">
               <a:rPr lang="en-US" smtClean="0"/>
-              <a:t>1/27/13</a:t>
+              <a:t>6/24/2026</a:t>
             </a:fld>
             <a:endParaRPr lang="en-US"/>
           </a:p>
@@ -1449,10 +1454,9 @@
           </a:lstStyle>
           <a:p>
             <a:r>
-              <a:rPr lang="en-US" smtClean="0"/>
+              <a:rPr lang="en-US"/>
               <a:t>Click to edit Master title style</a:t>
             </a:r>
-            <a:endParaRPr lang="en-US"/>
           </a:p>
         </p:txBody>
       </p:sp>
@@ -1515,7 +1519,7 @@
           <a:p>
             <a:pPr lvl="0"/>
             <a:r>
-              <a:rPr lang="en-US" smtClean="0"/>
+              <a:rPr lang="en-US"/>
               <a:t>Click to edit Master text styles</a:t>
             </a:r>
           </a:p>
@@ -1571,38 +1575,37 @@
           <a:p>
             <a:pPr lvl="0"/>
             <a:r>
-              <a:rPr lang="en-US" smtClean="0"/>
+              <a:rPr lang="en-US"/>
               <a:t>Click to edit Master text styles</a:t>
             </a:r>
           </a:p>
           <a:p>
             <a:pPr lvl="1"/>
             <a:r>
-              <a:rPr lang="en-US" smtClean="0"/>
+              <a:rPr lang="en-US"/>
               <a:t>Second level</a:t>
             </a:r>
           </a:p>
           <a:p>
             <a:pPr lvl="2"/>
             <a:r>
-              <a:rPr lang="en-US" smtClean="0"/>
+              <a:rPr lang="en-US"/>
               <a:t>Third level</a:t>
             </a:r>
           </a:p>
           <a:p>
             <a:pPr lvl="3"/>
             <a:r>
-              <a:rPr lang="en-US" smtClean="0"/>
+              <a:rPr lang="en-US"/>
               <a:t>Fourth level</a:t>
             </a:r>
           </a:p>
           <a:p>
             <a:pPr lvl="4"/>
             <a:r>
-              <a:rPr lang="en-US" smtClean="0"/>
+              <a:rPr lang="en-US"/>
               <a:t>Fifth level</a:t>
             </a:r>
-            <a:endParaRPr lang="en-US"/>
           </a:p>
         </p:txBody>
       </p:sp>
@@ -1665,7 +1668,7 @@
           <a:p>
             <a:pPr lvl="0"/>
             <a:r>
-              <a:rPr lang="en-US" smtClean="0"/>
+              <a:rPr lang="en-US"/>
               <a:t>Click to edit Master text styles</a:t>
             </a:r>
           </a:p>
@@ -1721,38 +1724,37 @@
           <a:p>
             <a:pPr lvl="0"/>
             <a:r>
-              <a:rPr lang="en-US" smtClean="0"/>
+              <a:rPr lang="en-US"/>
               <a:t>Click to edit Master text styles</a:t>
             </a:r>
           </a:p>
           <a:p>
             <a:pPr lvl="1"/>
             <a:r>
-              <a:rPr lang="en-US" smtClean="0"/>
+              <a:rPr lang="en-US"/>
               <a:t>Second level</a:t>
             </a:r>
           </a:p>
           <a:p>
             <a:pPr lvl="2"/>
             <a:r>
-              <a:rPr lang="en-US" smtClean="0"/>
+              <a:rPr lang="en-US"/>
               <a:t>Third level</a:t>
             </a:r>
           </a:p>
           <a:p>
             <a:pPr lvl="3"/>
             <a:r>
-              <a:rPr lang="en-US" smtClean="0"/>
+              <a:rPr lang="en-US"/>
               <a:t>Fourth level</a:t>
             </a:r>
           </a:p>
           <a:p>
             <a:pPr lvl="4"/>
             <a:r>
-              <a:rPr lang="en-US" smtClean="0"/>
+              <a:rPr lang="en-US"/>
               <a:t>Fifth level</a:t>
             </a:r>
-            <a:endParaRPr lang="en-US"/>
           </a:p>
         </p:txBody>
       </p:sp>
@@ -1773,7 +1775,7 @@
           <a:p>
             <a:fld id="{5BCAD085-E8A6-8845-BD4E-CB4CCA059FC4}" type="datetimeFigureOut">
               <a:rPr lang="en-US" smtClean="0"/>
-              <a:t>1/27/13</a:t>
+              <a:t>6/24/2026</a:t>
             </a:fld>
             <a:endParaRPr lang="en-US"/>
           </a:p>
@@ -1867,10 +1869,9 @@
           <a:lstStyle/>
           <a:p>
             <a:r>
-              <a:rPr lang="en-US" smtClean="0"/>
+              <a:rPr lang="en-US"/>
               <a:t>Click to edit Master title style</a:t>
             </a:r>
-            <a:endParaRPr lang="en-US"/>
           </a:p>
         </p:txBody>
       </p:sp>
@@ -1891,7 +1892,7 @@
           <a:p>
             <a:fld id="{5BCAD085-E8A6-8845-BD4E-CB4CCA059FC4}" type="datetimeFigureOut">
               <a:rPr lang="en-US" smtClean="0"/>
-              <a:t>1/27/13</a:t>
+              <a:t>6/24/2026</a:t>
             </a:fld>
             <a:endParaRPr lang="en-US"/>
           </a:p>
@@ -1986,7 +1987,7 @@
           <a:p>
             <a:fld id="{5BCAD085-E8A6-8845-BD4E-CB4CCA059FC4}" type="datetimeFigureOut">
               <a:rPr lang="en-US" smtClean="0"/>
-              <a:t>1/27/13</a:t>
+              <a:t>6/24/2026</a:t>
             </a:fld>
             <a:endParaRPr lang="en-US"/>
           </a:p>
@@ -2089,10 +2090,9 @@
           </a:lstStyle>
           <a:p>
             <a:r>
-              <a:rPr lang="en-US" smtClean="0"/>
+              <a:rPr lang="en-US"/>
               <a:t>Click to edit Master title style</a:t>
             </a:r>
-            <a:endParaRPr lang="en-US"/>
           </a:p>
         </p:txBody>
       </p:sp>
@@ -2146,38 +2146,37 @@
           <a:p>
             <a:pPr lvl="0"/>
             <a:r>
-              <a:rPr lang="en-US" smtClean="0"/>
+              <a:rPr lang="en-US"/>
               <a:t>Click to edit Master text styles</a:t>
             </a:r>
           </a:p>
           <a:p>
             <a:pPr lvl="1"/>
             <a:r>
-              <a:rPr lang="en-US" smtClean="0"/>
+              <a:rPr lang="en-US"/>
               <a:t>Second level</a:t>
             </a:r>
           </a:p>
           <a:p>
             <a:pPr lvl="2"/>
             <a:r>
-              <a:rPr lang="en-US" smtClean="0"/>
+              <a:rPr lang="en-US"/>
               <a:t>Third level</a:t>
             </a:r>
           </a:p>
           <a:p>
             <a:pPr lvl="3"/>
             <a:r>
-              <a:rPr lang="en-US" smtClean="0"/>
+              <a:rPr lang="en-US"/>
               <a:t>Fourth level</a:t>
             </a:r>
           </a:p>
           <a:p>
             <a:pPr lvl="4"/>
             <a:r>
-              <a:rPr lang="en-US" smtClean="0"/>
+              <a:rPr lang="en-US"/>
               <a:t>Fifth level</a:t>
             </a:r>
-            <a:endParaRPr lang="en-US"/>
           </a:p>
         </p:txBody>
       </p:sp>
@@ -2240,7 +2239,7 @@
           <a:p>
             <a:pPr lvl="0"/>
             <a:r>
-              <a:rPr lang="en-US" smtClean="0"/>
+              <a:rPr lang="en-US"/>
               <a:t>Click to edit Master text styles</a:t>
             </a:r>
           </a:p>
@@ -2263,7 +2262,7 @@
           <a:p>
             <a:fld id="{5BCAD085-E8A6-8845-BD4E-CB4CCA059FC4}" type="datetimeFigureOut">
               <a:rPr lang="en-US" smtClean="0"/>
-              <a:t>1/27/13</a:t>
+              <a:t>6/24/2026</a:t>
             </a:fld>
             <a:endParaRPr lang="en-US"/>
           </a:p>
@@ -2366,10 +2365,9 @@
           </a:lstStyle>
           <a:p>
             <a:r>
-              <a:rPr lang="en-US" smtClean="0"/>
+              <a:rPr lang="en-US"/>
               <a:t>Click to edit Master title style</a:t>
             </a:r>
-            <a:endParaRPr lang="en-US"/>
           </a:p>
         </p:txBody>
       </p:sp>
@@ -2493,7 +2491,7 @@
           <a:p>
             <a:pPr lvl="0"/>
             <a:r>
-              <a:rPr lang="en-US" smtClean="0"/>
+              <a:rPr lang="en-US"/>
               <a:t>Click to edit Master text styles</a:t>
             </a:r>
           </a:p>
@@ -2516,7 +2514,7 @@
           <a:p>
             <a:fld id="{5BCAD085-E8A6-8845-BD4E-CB4CCA059FC4}" type="datetimeFigureOut">
               <a:rPr lang="en-US" smtClean="0"/>
-              <a:t>1/27/13</a:t>
+              <a:t>6/24/2026</a:t>
             </a:fld>
             <a:endParaRPr lang="en-US"/>
           </a:p>
@@ -2625,10 +2623,9 @@
           <a:lstStyle/>
           <a:p>
             <a:r>
-              <a:rPr lang="en-US" smtClean="0"/>
+              <a:rPr lang="en-US"/>
               <a:t>Click to edit Master title style</a:t>
             </a:r>
-            <a:endParaRPr lang="en-US"/>
           </a:p>
         </p:txBody>
       </p:sp>
@@ -2659,38 +2656,37 @@
           <a:p>
             <a:pPr lvl="0"/>
             <a:r>
-              <a:rPr lang="en-US" smtClean="0"/>
+              <a:rPr lang="en-US"/>
               <a:t>Click to edit Master text styles</a:t>
             </a:r>
           </a:p>
           <a:p>
             <a:pPr lvl="1"/>
             <a:r>
-              <a:rPr lang="en-US" smtClean="0"/>
+              <a:rPr lang="en-US"/>
               <a:t>Second level</a:t>
             </a:r>
           </a:p>
           <a:p>
             <a:pPr lvl="2"/>
             <a:r>
-              <a:rPr lang="en-US" smtClean="0"/>
+              <a:rPr lang="en-US"/>
               <a:t>Third level</a:t>
             </a:r>
           </a:p>
           <a:p>
             <a:pPr lvl="3"/>
             <a:r>
-              <a:rPr lang="en-US" smtClean="0"/>
+              <a:rPr lang="en-US"/>
               <a:t>Fourth level</a:t>
             </a:r>
           </a:p>
           <a:p>
             <a:pPr lvl="4"/>
             <a:r>
-              <a:rPr lang="en-US" smtClean="0"/>
+              <a:rPr lang="en-US"/>
               <a:t>Fifth level</a:t>
             </a:r>
-            <a:endParaRPr lang="en-US"/>
           </a:p>
         </p:txBody>
       </p:sp>
@@ -2729,7 +2725,7 @@
           <a:p>
             <a:fld id="{5BCAD085-E8A6-8845-BD4E-CB4CCA059FC4}" type="datetimeFigureOut">
               <a:rPr lang="en-US" smtClean="0"/>
-              <a:t>1/27/13</a:t>
+              <a:t>6/24/2026</a:t>
             </a:fld>
             <a:endParaRPr lang="en-US"/>
           </a:p>
@@ -3088,7 +3084,7 @@
 </file>
 
 <file path=ppt/slides/slide1.xml><?xml version="1.0" encoding="utf-8"?>
-<p:sld xmlns:a="http://schemas.openxmlformats.org/drawingml/2006/main" xmlns:p="http://schemas.openxmlformats.org/presentationml/2006/main" xmlns:r="http://schemas.openxmlformats.org/officeDocument/2006/relationships">
+<p:sld xmlns:a="http://schemas.openxmlformats.org/drawingml/2006/main" xmlns:r="http://schemas.openxmlformats.org/officeDocument/2006/relationships" xmlns:p="http://schemas.openxmlformats.org/presentationml/2006/main">
   <p:cSld>
     <p:bg>
       <p:bgPr>
@@ -3104,7 +3100,14 @@
         <p:cNvGrpSpPr/>
         <p:nvPr/>
       </p:nvGrpSpPr>
-      <p:grpSpPr/>
+      <p:grpSpPr>
+        <a:xfrm>
+          <a:off x="0" y="0"/>
+          <a:ext cx="0" cy="0"/>
+          <a:chOff x="0" y="0"/>
+          <a:chExt cx="0" cy="0"/>
+        </a:xfrm>
+      </p:grpSpPr>
       <p:sp>
         <p:nvSpPr>
           <p:cNvPr id="2" name="Rectangle 1"/>
@@ -3145,6 +3148,7 @@
           <a:lstStyle/>
           <a:p>
             <a:pPr algn="ctr"/>
+            <a:endParaRPr/>
           </a:p>
         </p:txBody>
       </p:sp>
@@ -3188,6 +3192,7 @@
           <a:lstStyle/>
           <a:p>
             <a:pPr algn="ctr"/>
+            <a:endParaRPr dirty="0"/>
           </a:p>
         </p:txBody>
       </p:sp>
@@ -3231,6 +3236,7 @@
           <a:lstStyle/>
           <a:p>
             <a:pPr algn="ctr"/>
+            <a:endParaRPr/>
           </a:p>
         </p:txBody>
       </p:sp>
@@ -3274,6 +3280,7 @@
           <a:lstStyle/>
           <a:p>
             <a:pPr algn="ctr"/>
+            <a:endParaRPr/>
           </a:p>
         </p:txBody>
       </p:sp>
@@ -3391,7 +3398,7 @@
         <p:spPr>
           <a:xfrm>
             <a:off x="365760" y="3858768"/>
-            <a:ext cx="7772400" cy="365760"/>
+            <a:ext cx="7772400" cy="292388"/>
           </a:xfrm>
           <a:prstGeom prst="rect">
             <a:avLst/>
@@ -3406,13 +3413,49 @@
           <a:p>
             <a:pPr algn="l"/>
             <a:r>
-              <a:rPr sz="1300" b="0" i="1">
+              <a:rPr sz="1300" b="0" i="1" dirty="0">
                 <a:solidFill>
                   <a:srgbClr val="C8E6C9"/>
                 </a:solidFill>
                 <a:latin typeface="Calibri"/>
               </a:rPr>
-              <a:t>"Mas Matalinong Pagsasaka, Kahit Wala Pang Internet"</a:t>
+              <a:t>"Mas </a:t>
+            </a:r>
+            <a:r>
+              <a:rPr sz="1300" b="0" i="1" dirty="0" err="1">
+                <a:solidFill>
+                  <a:srgbClr val="C8E6C9"/>
+                </a:solidFill>
+                <a:latin typeface="Calibri"/>
+              </a:rPr>
+              <a:t>Matalinong</a:t>
+            </a:r>
+            <a:r>
+              <a:rPr sz="1300" b="0" i="1" dirty="0">
+                <a:solidFill>
+                  <a:srgbClr val="C8E6C9"/>
+                </a:solidFill>
+                <a:latin typeface="Calibri"/>
+              </a:rPr>
+              <a:t> </a:t>
+            </a:r>
+            <a:r>
+              <a:rPr sz="1300" b="0" i="1" dirty="0" err="1">
+                <a:solidFill>
+                  <a:srgbClr val="C8E6C9"/>
+                </a:solidFill>
+                <a:latin typeface="Calibri"/>
+              </a:rPr>
+              <a:t>Pagsasaka</a:t>
+            </a:r>
+            <a:r>
+              <a:rPr sz="1300" b="0" i="1" dirty="0">
+                <a:solidFill>
+                  <a:srgbClr val="C8E6C9"/>
+                </a:solidFill>
+                <a:latin typeface="Calibri"/>
+              </a:rPr>
+              <a:t>,"</a:t>
             </a:r>
           </a:p>
         </p:txBody>
@@ -3457,6 +3500,7 @@
           <a:lstStyle/>
           <a:p>
             <a:pPr algn="ctr"/>
+            <a:endParaRPr/>
           </a:p>
         </p:txBody>
       </p:sp>
@@ -3535,6 +3579,7 @@
           <a:lstStyle/>
           <a:p>
             <a:pPr algn="ctr"/>
+            <a:endParaRPr/>
           </a:p>
         </p:txBody>
       </p:sp>
@@ -3613,6 +3658,7 @@
           <a:lstStyle/>
           <a:p>
             <a:pPr algn="ctr"/>
+            <a:endParaRPr/>
           </a:p>
         </p:txBody>
       </p:sp>
@@ -3691,6 +3737,7 @@
           <a:lstStyle/>
           <a:p>
             <a:pPr algn="ctr"/>
+            <a:endParaRPr/>
           </a:p>
         </p:txBody>
       </p:sp>
@@ -3769,6 +3816,7 @@
           <a:lstStyle/>
           <a:p>
             <a:pPr algn="ctr"/>
+            <a:endParaRPr/>
           </a:p>
         </p:txBody>
       </p:sp>
@@ -3844,13 +3892,13 @@
       </p:sp>
       <p:sp>
         <p:nvSpPr>
-          <p:cNvPr id="21" name="Rectangle 20"/>
+          <p:cNvPr id="27" name="Rectangle 26"/>
           <p:cNvSpPr/>
           <p:nvPr/>
         </p:nvSpPr>
         <p:spPr>
           <a:xfrm>
-            <a:off x="8732520" y="1280160"/>
+            <a:off x="8732520" y="1354394"/>
             <a:ext cx="1508760" cy="1417320"/>
           </a:xfrm>
           <a:prstGeom prst="rect">
@@ -3882,18 +3930,19 @@
           <a:lstStyle/>
           <a:p>
             <a:pPr algn="ctr"/>
-          </a:p>
-        </p:txBody>
-      </p:sp>
-      <p:sp>
-        <p:nvSpPr>
-          <p:cNvPr id="22" name="TextBox 21"/>
-          <p:cNvSpPr txBox="1"/>
-          <p:nvPr/>
-        </p:nvSpPr>
-        <p:spPr>
-          <a:xfrm>
-            <a:off x="8732520" y="1536192"/>
+            <a:endParaRPr/>
+          </a:p>
+        </p:txBody>
+      </p:sp>
+      <p:sp>
+        <p:nvSpPr>
+          <p:cNvPr id="28" name="TextBox 27"/>
+          <p:cNvSpPr txBox="1"/>
+          <p:nvPr/>
+        </p:nvSpPr>
+        <p:spPr>
+          <a:xfrm>
+            <a:off x="8732520" y="1610426"/>
             <a:ext cx="1508760" cy="685800"/>
           </a:xfrm>
           <a:prstGeom prst="rect">
@@ -3915,20 +3964,20 @@
                 </a:solidFill>
                 <a:latin typeface="Calibri"/>
               </a:rPr>
-              <a:t>30</a:t>
-            </a:r>
-          </a:p>
-        </p:txBody>
-      </p:sp>
-      <p:sp>
-        <p:nvSpPr>
-          <p:cNvPr id="23" name="TextBox 22"/>
-          <p:cNvSpPr txBox="1"/>
-          <p:nvPr/>
-        </p:nvSpPr>
-        <p:spPr>
-          <a:xfrm>
-            <a:off x="8732520" y="2240280"/>
+              <a:t>18</a:t>
+            </a:r>
+          </a:p>
+        </p:txBody>
+      </p:sp>
+      <p:sp>
+        <p:nvSpPr>
+          <p:cNvPr id="29" name="TextBox 28"/>
+          <p:cNvSpPr txBox="1"/>
+          <p:nvPr/>
+        </p:nvSpPr>
+        <p:spPr>
+          <a:xfrm>
+            <a:off x="8732520" y="2314514"/>
             <a:ext cx="1508760" cy="320040"/>
           </a:xfrm>
           <a:prstGeom prst="rect">
@@ -3950,20 +3999,20 @@
                 </a:solidFill>
                 <a:latin typeface="Calibri"/>
               </a:rPr>
-              <a:t>Farmers</a:t>
-            </a:r>
-          </a:p>
-        </p:txBody>
-      </p:sp>
-      <p:sp>
-        <p:nvSpPr>
-          <p:cNvPr id="24" name="Rectangle 23"/>
+              <a:t>PH Crops</a:t>
+            </a:r>
+          </a:p>
+        </p:txBody>
+      </p:sp>
+      <p:sp>
+        <p:nvSpPr>
+          <p:cNvPr id="30" name="Rectangle 29"/>
           <p:cNvSpPr/>
           <p:nvPr/>
         </p:nvSpPr>
         <p:spPr>
           <a:xfrm>
-            <a:off x="10424160" y="1280160"/>
+            <a:off x="10424160" y="2926080"/>
             <a:ext cx="1508760" cy="1417320"/>
           </a:xfrm>
           <a:prstGeom prst="rect">
@@ -3995,18 +4044,19 @@
           <a:lstStyle/>
           <a:p>
             <a:pPr algn="ctr"/>
-          </a:p>
-        </p:txBody>
-      </p:sp>
-      <p:sp>
-        <p:nvSpPr>
-          <p:cNvPr id="25" name="TextBox 24"/>
-          <p:cNvSpPr txBox="1"/>
-          <p:nvPr/>
-        </p:nvSpPr>
-        <p:spPr>
-          <a:xfrm>
-            <a:off x="10424160" y="1536192"/>
+            <a:endParaRPr/>
+          </a:p>
+        </p:txBody>
+      </p:sp>
+      <p:sp>
+        <p:nvSpPr>
+          <p:cNvPr id="31" name="TextBox 30"/>
+          <p:cNvSpPr txBox="1"/>
+          <p:nvPr/>
+        </p:nvSpPr>
+        <p:spPr>
+          <a:xfrm>
+            <a:off x="10424160" y="3182112"/>
             <a:ext cx="1508760" cy="685800"/>
           </a:xfrm>
           <a:prstGeom prst="rect">
@@ -4028,20 +4078,20 @@
                 </a:solidFill>
                 <a:latin typeface="Calibri"/>
               </a:rPr>
-              <a:t>45 ha</a:t>
-            </a:r>
-          </a:p>
-        </p:txBody>
-      </p:sp>
-      <p:sp>
-        <p:nvSpPr>
-          <p:cNvPr id="26" name="TextBox 25"/>
-          <p:cNvSpPr txBox="1"/>
-          <p:nvPr/>
-        </p:nvSpPr>
-        <p:spPr>
-          <a:xfrm>
-            <a:off x="10424160" y="2240280"/>
+              <a:t>₱0</a:t>
+            </a:r>
+          </a:p>
+        </p:txBody>
+      </p:sp>
+      <p:sp>
+        <p:nvSpPr>
+          <p:cNvPr id="32" name="TextBox 31"/>
+          <p:cNvSpPr txBox="1"/>
+          <p:nvPr/>
+        </p:nvSpPr>
+        <p:spPr>
+          <a:xfrm>
+            <a:off x="10424160" y="3886200"/>
             <a:ext cx="1508760" cy="320040"/>
           </a:xfrm>
           <a:prstGeom prst="rect">
@@ -4063,21 +4113,21 @@
                 </a:solidFill>
                 <a:latin typeface="Calibri"/>
               </a:rPr>
-              <a:t>Area</a:t>
-            </a:r>
-          </a:p>
-        </p:txBody>
-      </p:sp>
-      <p:sp>
-        <p:nvSpPr>
-          <p:cNvPr id="27" name="Rectangle 26"/>
+              <a:t>Cloud AI Cost</a:t>
+            </a:r>
+          </a:p>
+        </p:txBody>
+      </p:sp>
+      <p:sp>
+        <p:nvSpPr>
+          <p:cNvPr id="33" name="Rectangle 32"/>
           <p:cNvSpPr/>
           <p:nvPr/>
         </p:nvSpPr>
         <p:spPr>
           <a:xfrm>
-            <a:off x="8732520" y="2926080"/>
-            <a:ext cx="1508760" cy="1417320"/>
+            <a:off x="8503920" y="4544568"/>
+            <a:ext cx="3482036" cy="1371600"/>
           </a:xfrm>
           <a:prstGeom prst="rect">
             <a:avLst/>
@@ -4108,54 +4158,20 @@
           <a:lstStyle/>
           <a:p>
             <a:pPr algn="ctr"/>
-          </a:p>
-        </p:txBody>
-      </p:sp>
-      <p:sp>
-        <p:nvSpPr>
-          <p:cNvPr id="28" name="TextBox 27"/>
-          <p:cNvSpPr txBox="1"/>
-          <p:nvPr/>
-        </p:nvSpPr>
-        <p:spPr>
-          <a:xfrm>
-            <a:off x="8732520" y="3182112"/>
-            <a:ext cx="1508760" cy="685800"/>
-          </a:xfrm>
-          <a:prstGeom prst="rect">
-            <a:avLst/>
-          </a:prstGeom>
-          <a:noFill/>
-        </p:spPr>
-        <p:txBody>
-          <a:bodyPr wrap="square">
-            <a:spAutoFit/>
-          </a:bodyPr>
-          <a:lstStyle/>
-          <a:p>
-            <a:pPr algn="ctr"/>
-            <a:r>
-              <a:rPr sz="2600" b="1" i="0">
-                <a:solidFill>
-                  <a:srgbClr val="FED255"/>
-                </a:solidFill>
-                <a:latin typeface="Calibri"/>
-              </a:rPr>
-              <a:t>18</a:t>
-            </a:r>
-          </a:p>
-        </p:txBody>
-      </p:sp>
-      <p:sp>
-        <p:nvSpPr>
-          <p:cNvPr id="29" name="TextBox 28"/>
-          <p:cNvSpPr txBox="1"/>
-          <p:nvPr/>
-        </p:nvSpPr>
-        <p:spPr>
-          <a:xfrm>
-            <a:off x="8732520" y="3886200"/>
-            <a:ext cx="1508760" cy="320040"/>
+            <a:endParaRPr/>
+          </a:p>
+        </p:txBody>
+      </p:sp>
+      <p:sp>
+        <p:nvSpPr>
+          <p:cNvPr id="34" name="TextBox 33"/>
+          <p:cNvSpPr txBox="1"/>
+          <p:nvPr/>
+        </p:nvSpPr>
+        <p:spPr>
+          <a:xfrm>
+            <a:off x="8556956" y="4617720"/>
+            <a:ext cx="3291840" cy="320040"/>
           </a:xfrm>
           <a:prstGeom prst="rect">
             <a:avLst/>
@@ -4176,176 +4192,20 @@
                 </a:solidFill>
                 <a:latin typeface="Calibri"/>
               </a:rPr>
-              <a:t>PH Crops</a:t>
-            </a:r>
-          </a:p>
-        </p:txBody>
-      </p:sp>
-      <p:sp>
-        <p:nvSpPr>
-          <p:cNvPr id="30" name="Rectangle 29"/>
-          <p:cNvSpPr/>
-          <p:nvPr/>
-        </p:nvSpPr>
-        <p:spPr>
-          <a:xfrm>
-            <a:off x="10424160" y="2926080"/>
-            <a:ext cx="1508760" cy="1417320"/>
-          </a:xfrm>
-          <a:prstGeom prst="rect">
-            <a:avLst/>
-          </a:prstGeom>
-          <a:solidFill>
-            <a:srgbClr val="0D631B"/>
-          </a:solidFill>
-          <a:ln>
-            <a:noFill/>
-          </a:ln>
-        </p:spPr>
-        <p:style>
-          <a:lnRef idx="1">
-            <a:schemeClr val="accent1"/>
-          </a:lnRef>
-          <a:fillRef idx="3">
-            <a:schemeClr val="accent1"/>
-          </a:fillRef>
-          <a:effectRef idx="2">
-            <a:schemeClr val="accent1"/>
-          </a:effectRef>
-          <a:fontRef idx="minor">
-            <a:schemeClr val="lt1"/>
-          </a:fontRef>
-        </p:style>
-        <p:txBody>
-          <a:bodyPr rtlCol="0" anchor="ctr"/>
-          <a:lstStyle/>
-          <a:p>
-            <a:pPr algn="ctr"/>
-          </a:p>
-        </p:txBody>
-      </p:sp>
-      <p:sp>
-        <p:nvSpPr>
-          <p:cNvPr id="31" name="TextBox 30"/>
-          <p:cNvSpPr txBox="1"/>
-          <p:nvPr/>
-        </p:nvSpPr>
-        <p:spPr>
-          <a:xfrm>
-            <a:off x="10424160" y="3182112"/>
-            <a:ext cx="1508760" cy="685800"/>
-          </a:xfrm>
-          <a:prstGeom prst="rect">
-            <a:avLst/>
-          </a:prstGeom>
-          <a:noFill/>
-        </p:spPr>
-        <p:txBody>
-          <a:bodyPr wrap="square">
-            <a:spAutoFit/>
-          </a:bodyPr>
-          <a:lstStyle/>
-          <a:p>
-            <a:pPr algn="ctr"/>
-            <a:r>
-              <a:rPr sz="2600" b="1" i="0">
-                <a:solidFill>
-                  <a:srgbClr val="FED255"/>
-                </a:solidFill>
-                <a:latin typeface="Calibri"/>
-              </a:rPr>
-              <a:t>₱0</a:t>
-            </a:r>
-          </a:p>
-        </p:txBody>
-      </p:sp>
-      <p:sp>
-        <p:nvSpPr>
-          <p:cNvPr id="32" name="TextBox 31"/>
-          <p:cNvSpPr txBox="1"/>
-          <p:nvPr/>
-        </p:nvSpPr>
-        <p:spPr>
-          <a:xfrm>
-            <a:off x="10424160" y="3886200"/>
-            <a:ext cx="1508760" cy="320040"/>
-          </a:xfrm>
-          <a:prstGeom prst="rect">
-            <a:avLst/>
-          </a:prstGeom>
-          <a:noFill/>
-        </p:spPr>
-        <p:txBody>
-          <a:bodyPr wrap="square">
-            <a:spAutoFit/>
-          </a:bodyPr>
-          <a:lstStyle/>
-          <a:p>
-            <a:pPr algn="ctr"/>
-            <a:r>
-              <a:rPr sz="1100" b="0" i="0">
-                <a:solidFill>
-                  <a:srgbClr val="A3F69C"/>
-                </a:solidFill>
-                <a:latin typeface="Calibri"/>
-              </a:rPr>
-              <a:t>Cloud AI Cost</a:t>
-            </a:r>
-          </a:p>
-        </p:txBody>
-      </p:sp>
-      <p:sp>
-        <p:nvSpPr>
-          <p:cNvPr id="33" name="Rectangle 32"/>
-          <p:cNvSpPr/>
-          <p:nvPr/>
-        </p:nvSpPr>
-        <p:spPr>
-          <a:xfrm>
-            <a:off x="8412480" y="4572000"/>
-            <a:ext cx="3566160" cy="1371600"/>
-          </a:xfrm>
-          <a:prstGeom prst="rect">
-            <a:avLst/>
-          </a:prstGeom>
-          <a:solidFill>
-            <a:srgbClr val="0D631B"/>
-          </a:solidFill>
-          <a:ln>
-            <a:noFill/>
-          </a:ln>
-        </p:spPr>
-        <p:style>
-          <a:lnRef idx="1">
-            <a:schemeClr val="accent1"/>
-          </a:lnRef>
-          <a:fillRef idx="3">
-            <a:schemeClr val="accent1"/>
-          </a:fillRef>
-          <a:effectRef idx="2">
-            <a:schemeClr val="accent1"/>
-          </a:effectRef>
-          <a:fontRef idx="minor">
-            <a:schemeClr val="lt1"/>
-          </a:fontRef>
-        </p:style>
-        <p:txBody>
-          <a:bodyPr rtlCol="0" anchor="ctr"/>
-          <a:lstStyle/>
-          <a:p>
-            <a:pPr algn="ctr"/>
-          </a:p>
-        </p:txBody>
-      </p:sp>
-      <p:sp>
-        <p:nvSpPr>
-          <p:cNvPr id="34" name="TextBox 33"/>
-          <p:cNvSpPr txBox="1"/>
-          <p:nvPr/>
-        </p:nvSpPr>
-        <p:spPr>
-          <a:xfrm>
-            <a:off x="8549640" y="4645152"/>
+              <a:t>Department of Information and</a:t>
+            </a:r>
+          </a:p>
+        </p:txBody>
+      </p:sp>
+      <p:sp>
+        <p:nvSpPr>
+          <p:cNvPr id="35" name="TextBox 34"/>
+          <p:cNvSpPr txBox="1"/>
+          <p:nvPr/>
+        </p:nvSpPr>
+        <p:spPr>
+          <a:xfrm>
+            <a:off x="8556956" y="4928616"/>
             <a:ext cx="3291840" cy="320040"/>
           </a:xfrm>
           <a:prstGeom prst="rect">
@@ -4361,41 +4221,6 @@
           <a:p>
             <a:pPr algn="ctr"/>
             <a:r>
-              <a:rPr sz="1100" b="0" i="0">
-                <a:solidFill>
-                  <a:srgbClr val="A3F69C"/>
-                </a:solidFill>
-                <a:latin typeface="Calibri"/>
-              </a:rPr>
-              <a:t>Department of Information and</a:t>
-            </a:r>
-          </a:p>
-        </p:txBody>
-      </p:sp>
-      <p:sp>
-        <p:nvSpPr>
-          <p:cNvPr id="35" name="TextBox 34"/>
-          <p:cNvSpPr txBox="1"/>
-          <p:nvPr/>
-        </p:nvSpPr>
-        <p:spPr>
-          <a:xfrm>
-            <a:off x="8549640" y="4956048"/>
-            <a:ext cx="3291840" cy="320040"/>
-          </a:xfrm>
-          <a:prstGeom prst="rect">
-            <a:avLst/>
-          </a:prstGeom>
-          <a:noFill/>
-        </p:spPr>
-        <p:txBody>
-          <a:bodyPr wrap="square">
-            <a:spAutoFit/>
-          </a:bodyPr>
-          <a:lstStyle/>
-          <a:p>
-            <a:pPr algn="ctr"/>
-            <a:r>
               <a:rPr sz="1100" b="1" i="0">
                 <a:solidFill>
                   <a:srgbClr val="FFFFFF"/>
@@ -4415,7 +4240,7 @@
         </p:nvSpPr>
         <p:spPr>
           <a:xfrm>
-            <a:off x="8549640" y="5285232"/>
+            <a:off x="8556956" y="5257800"/>
             <a:ext cx="3291840" cy="320040"/>
           </a:xfrm>
           <a:prstGeom prst="rect">
@@ -4451,7 +4276,7 @@
 </file>
 
 <file path=ppt/slides/slide10.xml><?xml version="1.0" encoding="utf-8"?>
-<p:sld xmlns:a="http://schemas.openxmlformats.org/drawingml/2006/main" xmlns:p="http://schemas.openxmlformats.org/presentationml/2006/main" xmlns:r="http://schemas.openxmlformats.org/officeDocument/2006/relationships">
+<p:sld xmlns:a="http://schemas.openxmlformats.org/drawingml/2006/main" xmlns:r="http://schemas.openxmlformats.org/officeDocument/2006/relationships" xmlns:p="http://schemas.openxmlformats.org/presentationml/2006/main">
   <p:cSld>
     <p:bg>
       <p:bgPr>
@@ -4467,7 +4292,14 @@
         <p:cNvGrpSpPr/>
         <p:nvPr/>
       </p:nvGrpSpPr>
-      <p:grpSpPr/>
+      <p:grpSpPr>
+        <a:xfrm>
+          <a:off x="0" y="0"/>
+          <a:ext cx="0" cy="0"/>
+          <a:chOff x="0" y="0"/>
+          <a:chExt cx="0" cy="0"/>
+        </a:xfrm>
+      </p:grpSpPr>
       <p:sp>
         <p:nvSpPr>
           <p:cNvPr id="2" name="Rectangle 1"/>
@@ -4508,6 +4340,7 @@
           <a:lstStyle/>
           <a:p>
             <a:pPr algn="ctr"/>
+            <a:endParaRPr/>
           </a:p>
         </p:txBody>
       </p:sp>
@@ -4621,6 +4454,7 @@
           <a:lstStyle/>
           <a:p>
             <a:pPr algn="ctr"/>
+            <a:endParaRPr/>
           </a:p>
         </p:txBody>
       </p:sp>
@@ -4701,6 +4535,7 @@
           <a:lstStyle/>
           <a:p>
             <a:pPr algn="ctr"/>
+            <a:endParaRPr/>
           </a:p>
         </p:txBody>
       </p:sp>
@@ -4779,6 +4614,7 @@
           <a:lstStyle/>
           <a:p>
             <a:pPr algn="ctr"/>
+            <a:endParaRPr/>
           </a:p>
         </p:txBody>
       </p:sp>
@@ -4892,6 +4728,7 @@
           <a:lstStyle/>
           <a:p>
             <a:pPr algn="ctr"/>
+            <a:endParaRPr/>
           </a:p>
         </p:txBody>
       </p:sp>
@@ -5040,6 +4877,7 @@
           <a:lstStyle/>
           <a:p>
             <a:pPr algn="ctr"/>
+            <a:endParaRPr/>
           </a:p>
         </p:txBody>
       </p:sp>
@@ -5188,6 +5026,7 @@
           <a:lstStyle/>
           <a:p>
             <a:pPr algn="ctr"/>
+            <a:endParaRPr/>
           </a:p>
         </p:txBody>
       </p:sp>
@@ -5336,6 +5175,7 @@
           <a:lstStyle/>
           <a:p>
             <a:pPr algn="ctr"/>
+            <a:endParaRPr/>
           </a:p>
         </p:txBody>
       </p:sp>
@@ -5484,6 +5324,7 @@
           <a:lstStyle/>
           <a:p>
             <a:pPr algn="ctr"/>
+            <a:endParaRPr/>
           </a:p>
         </p:txBody>
       </p:sp>
@@ -5634,6 +5475,7 @@
           <a:lstStyle/>
           <a:p>
             <a:pPr algn="ctr"/>
+            <a:endParaRPr/>
           </a:p>
         </p:txBody>
       </p:sp>
@@ -5712,6 +5554,7 @@
           <a:lstStyle/>
           <a:p>
             <a:pPr algn="ctr"/>
+            <a:endParaRPr/>
           </a:p>
         </p:txBody>
       </p:sp>
@@ -5965,6 +5808,7 @@
           <a:lstStyle/>
           <a:p>
             <a:pPr algn="ctr"/>
+            <a:endParaRPr/>
           </a:p>
         </p:txBody>
       </p:sp>
@@ -6218,6 +6062,7 @@
           <a:lstStyle/>
           <a:p>
             <a:pPr algn="ctr"/>
+            <a:endParaRPr/>
           </a:p>
         </p:txBody>
       </p:sp>
@@ -6471,6 +6316,7 @@
           <a:lstStyle/>
           <a:p>
             <a:pPr algn="ctr"/>
+            <a:endParaRPr/>
           </a:p>
         </p:txBody>
       </p:sp>
@@ -6724,6 +6570,7 @@
           <a:lstStyle/>
           <a:p>
             <a:pPr algn="ctr"/>
+            <a:endParaRPr/>
           </a:p>
         </p:txBody>
       </p:sp>
@@ -6977,6 +6824,7 @@
           <a:lstStyle/>
           <a:p>
             <a:pPr algn="ctr"/>
+            <a:endParaRPr/>
           </a:p>
         </p:txBody>
       </p:sp>
@@ -7230,6 +7078,7 @@
           <a:lstStyle/>
           <a:p>
             <a:pPr algn="ctr"/>
+            <a:endParaRPr/>
           </a:p>
         </p:txBody>
       </p:sp>
@@ -7483,6 +7332,7 @@
           <a:lstStyle/>
           <a:p>
             <a:pPr algn="ctr"/>
+            <a:endParaRPr/>
           </a:p>
         </p:txBody>
       </p:sp>
@@ -7561,6 +7411,7 @@
           <a:lstStyle/>
           <a:p>
             <a:pPr algn="ctr"/>
+            <a:endParaRPr/>
           </a:p>
         </p:txBody>
       </p:sp>
@@ -7674,6 +7525,7 @@
           <a:lstStyle/>
           <a:p>
             <a:pPr algn="ctr"/>
+            <a:endParaRPr/>
           </a:p>
         </p:txBody>
       </p:sp>
@@ -7787,6 +7639,7 @@
           <a:lstStyle/>
           <a:p>
             <a:pPr algn="ctr"/>
+            <a:endParaRPr/>
           </a:p>
         </p:txBody>
       </p:sp>
@@ -7900,6 +7753,7 @@
           <a:lstStyle/>
           <a:p>
             <a:pPr algn="ctr"/>
+            <a:endParaRPr/>
           </a:p>
         </p:txBody>
       </p:sp>
@@ -8013,6 +7867,7 @@
           <a:lstStyle/>
           <a:p>
             <a:pPr algn="ctr"/>
+            <a:endParaRPr/>
           </a:p>
         </p:txBody>
       </p:sp>
@@ -8082,6 +7937,376 @@
                 <a:latin typeface="Calibri"/>
               </a:rPr>
               <a:t>Real soil data: N · P · K · pH · Temp · Humidity · Rain</a:t>
+            </a:r>
+          </a:p>
+        </p:txBody>
+      </p:sp>
+    </p:spTree>
+  </p:cSld>
+  <p:clrMapOvr>
+    <a:masterClrMapping/>
+  </p:clrMapOvr>
+</p:sld>
+</file>
+
+<file path=ppt/slides/slide11.xml><?xml version="1.0" encoding="utf-8"?>
+<p:sld xmlns:a="http://schemas.openxmlformats.org/drawingml/2006/main" xmlns:r="http://schemas.openxmlformats.org/officeDocument/2006/relationships" xmlns:p="http://schemas.openxmlformats.org/presentationml/2006/main">
+  <p:cSld>
+    <p:spTree>
+      <p:nvGrpSpPr>
+        <p:cNvPr id="1" name=""/>
+        <p:cNvGrpSpPr/>
+        <p:nvPr/>
+      </p:nvGrpSpPr>
+      <p:grpSpPr>
+        <a:xfrm>
+          <a:off x="0" y="0"/>
+          <a:ext cx="0" cy="0"/>
+          <a:chOff x="0" y="0"/>
+          <a:chExt cx="0" cy="0"/>
+        </a:xfrm>
+      </p:grpSpPr>
+      <p:sp>
+        <p:nvSpPr>
+          <p:cNvPr id="2" name="Rectangle 1"/>
+          <p:cNvSpPr/>
+          <p:nvPr/>
+        </p:nvSpPr>
+        <p:spPr>
+          <a:xfrm>
+            <a:off x="0" y="0"/>
+            <a:ext cx="12191695" cy="914400"/>
+          </a:xfrm>
+          <a:prstGeom prst="rect">
+            <a:avLst/>
+          </a:prstGeom>
+          <a:solidFill>
+            <a:srgbClr val="0D631B"/>
+          </a:solidFill>
+          <a:ln>
+            <a:noFill/>
+          </a:ln>
+          <a:effectLst/>
+        </p:spPr>
+        <p:style>
+          <a:lnRef idx="1">
+            <a:schemeClr val="accent1"/>
+          </a:lnRef>
+          <a:fillRef idx="3">
+            <a:schemeClr val="accent1"/>
+          </a:fillRef>
+          <a:effectRef idx="2">
+            <a:schemeClr val="accent1"/>
+          </a:effectRef>
+          <a:fontRef idx="minor">
+            <a:schemeClr val="lt1"/>
+          </a:fontRef>
+        </p:style>
+        <p:txBody>
+          <a:bodyPr rtlCol="0" anchor="ctr"/>
+          <a:lstStyle/>
+          <a:p>
+            <a:pPr algn="ctr"/>
+            <a:endParaRPr/>
+          </a:p>
+        </p:txBody>
+      </p:sp>
+      <p:sp>
+        <p:nvSpPr>
+          <p:cNvPr id="3" name="TextBox 2"/>
+          <p:cNvSpPr txBox="1"/>
+          <p:nvPr/>
+        </p:nvSpPr>
+        <p:spPr>
+          <a:xfrm>
+            <a:off x="365760" y="91440"/>
+            <a:ext cx="10515600" cy="502920"/>
+          </a:xfrm>
+          <a:prstGeom prst="rect">
+            <a:avLst/>
+          </a:prstGeom>
+          <a:noFill/>
+        </p:spPr>
+        <p:txBody>
+          <a:bodyPr wrap="square">
+            <a:spAutoFit/>
+          </a:bodyPr>
+          <a:lstStyle/>
+          <a:p>
+            <a:pPr algn="l"/>
+            <a:r>
+              <a:rPr sz="2400" b="1">
+                <a:solidFill>
+                  <a:srgbClr val="FFFFFF"/>
+                </a:solidFill>
+                <a:latin typeface="Calibri"/>
+              </a:rPr>
+              <a:t>Q&amp;A</a:t>
+            </a:r>
+          </a:p>
+        </p:txBody>
+      </p:sp>
+      <p:sp>
+        <p:nvSpPr>
+          <p:cNvPr id="4" name="TextBox 3"/>
+          <p:cNvSpPr txBox="1"/>
+          <p:nvPr/>
+        </p:nvSpPr>
+        <p:spPr>
+          <a:xfrm>
+            <a:off x="365760" y="612648"/>
+            <a:ext cx="10515600" cy="256032"/>
+          </a:xfrm>
+          <a:prstGeom prst="rect">
+            <a:avLst/>
+          </a:prstGeom>
+          <a:noFill/>
+        </p:spPr>
+        <p:txBody>
+          <a:bodyPr wrap="square">
+            <a:spAutoFit/>
+          </a:bodyPr>
+          <a:lstStyle/>
+          <a:p>
+            <a:pPr algn="l"/>
+            <a:r>
+              <a:rPr sz="1100" b="0">
+                <a:solidFill>
+                  <a:srgbClr val="A3F69C"/>
+                </a:solidFill>
+                <a:latin typeface="Calibri"/>
+              </a:rPr>
+              <a:t>Open floor for questions · DICT Capstone Project 2026</a:t>
+            </a:r>
+          </a:p>
+        </p:txBody>
+      </p:sp>
+      <p:sp>
+        <p:nvSpPr>
+          <p:cNvPr id="5" name="Rectangle 4"/>
+          <p:cNvSpPr/>
+          <p:nvPr/>
+        </p:nvSpPr>
+        <p:spPr>
+          <a:xfrm>
+            <a:off x="11430000" y="274320"/>
+            <a:ext cx="548640" cy="365760"/>
+          </a:xfrm>
+          <a:prstGeom prst="rect">
+            <a:avLst/>
+          </a:prstGeom>
+          <a:solidFill>
+            <a:srgbClr val="FED255"/>
+          </a:solidFill>
+          <a:ln>
+            <a:noFill/>
+          </a:ln>
+          <a:effectLst/>
+        </p:spPr>
+        <p:style>
+          <a:lnRef idx="1">
+            <a:schemeClr val="accent1"/>
+          </a:lnRef>
+          <a:fillRef idx="3">
+            <a:schemeClr val="accent1"/>
+          </a:fillRef>
+          <a:effectRef idx="2">
+            <a:schemeClr val="accent1"/>
+          </a:effectRef>
+          <a:fontRef idx="minor">
+            <a:schemeClr val="lt1"/>
+          </a:fontRef>
+        </p:style>
+        <p:txBody>
+          <a:bodyPr rtlCol="0" anchor="ctr"/>
+          <a:lstStyle/>
+          <a:p>
+            <a:pPr algn="ctr"/>
+            <a:endParaRPr/>
+          </a:p>
+        </p:txBody>
+      </p:sp>
+      <p:sp>
+        <p:nvSpPr>
+          <p:cNvPr id="6" name="TextBox 5"/>
+          <p:cNvSpPr txBox="1"/>
+          <p:nvPr/>
+        </p:nvSpPr>
+        <p:spPr>
+          <a:xfrm>
+            <a:off x="11430000" y="301752"/>
+            <a:ext cx="548640" cy="320040"/>
+          </a:xfrm>
+          <a:prstGeom prst="rect">
+            <a:avLst/>
+          </a:prstGeom>
+          <a:noFill/>
+        </p:spPr>
+        <p:txBody>
+          <a:bodyPr wrap="square">
+            <a:spAutoFit/>
+          </a:bodyPr>
+          <a:lstStyle/>
+          <a:p>
+            <a:pPr algn="ctr"/>
+            <a:r>
+              <a:rPr sz="1300" b="1">
+                <a:solidFill>
+                  <a:srgbClr val="755B00"/>
+                </a:solidFill>
+                <a:latin typeface="Calibri"/>
+              </a:rPr>
+              <a:t>10</a:t>
+            </a:r>
+          </a:p>
+        </p:txBody>
+      </p:sp>
+      <p:sp>
+        <p:nvSpPr>
+          <p:cNvPr id="7" name="Rectangle 6"/>
+          <p:cNvSpPr/>
+          <p:nvPr/>
+        </p:nvSpPr>
+        <p:spPr>
+          <a:xfrm>
+            <a:off x="1828800" y="1600200"/>
+            <a:ext cx="8534095" cy="3200400"/>
+          </a:xfrm>
+          <a:prstGeom prst="rect">
+            <a:avLst/>
+          </a:prstGeom>
+          <a:solidFill>
+            <a:srgbClr val="FFFFFF"/>
+          </a:solidFill>
+          <a:ln>
+            <a:noFill/>
+          </a:ln>
+          <a:effectLst/>
+        </p:spPr>
+        <p:style>
+          <a:lnRef idx="1">
+            <a:schemeClr val="accent1"/>
+          </a:lnRef>
+          <a:fillRef idx="3">
+            <a:schemeClr val="accent1"/>
+          </a:fillRef>
+          <a:effectRef idx="2">
+            <a:schemeClr val="accent1"/>
+          </a:effectRef>
+          <a:fontRef idx="minor">
+            <a:schemeClr val="lt1"/>
+          </a:fontRef>
+        </p:style>
+        <p:txBody>
+          <a:bodyPr rtlCol="0" anchor="ctr"/>
+          <a:lstStyle/>
+          <a:p>
+            <a:pPr algn="ctr"/>
+            <a:endParaRPr/>
+          </a:p>
+        </p:txBody>
+      </p:sp>
+      <p:sp>
+        <p:nvSpPr>
+          <p:cNvPr id="8" name="TextBox 7"/>
+          <p:cNvSpPr txBox="1"/>
+          <p:nvPr/>
+        </p:nvSpPr>
+        <p:spPr>
+          <a:xfrm>
+            <a:off x="1828800" y="1828800"/>
+            <a:ext cx="8534095" cy="800000"/>
+          </a:xfrm>
+          <a:prstGeom prst="rect">
+            <a:avLst/>
+          </a:prstGeom>
+          <a:noFill/>
+        </p:spPr>
+        <p:txBody>
+          <a:bodyPr wrap="square">
+            <a:spAutoFit/>
+          </a:bodyPr>
+          <a:lstStyle/>
+          <a:p>
+            <a:pPr algn="ctr"/>
+            <a:r>
+              <a:rPr sz="5400" b="0">
+                <a:solidFill>
+                  <a:srgbClr val="0D631B"/>
+                </a:solidFill>
+                <a:latin typeface="Calibri"/>
+              </a:rPr>
+              <a:t>🙋</a:t>
+            </a:r>
+          </a:p>
+        </p:txBody>
+      </p:sp>
+      <p:sp>
+        <p:nvSpPr>
+          <p:cNvPr id="9" name="TextBox 8"/>
+          <p:cNvSpPr txBox="1"/>
+          <p:nvPr/>
+        </p:nvSpPr>
+        <p:spPr>
+          <a:xfrm>
+            <a:off x="1828800" y="2700000"/>
+            <a:ext cx="8534095" cy="700000"/>
+          </a:xfrm>
+          <a:prstGeom prst="rect">
+            <a:avLst/>
+          </a:prstGeom>
+          <a:noFill/>
+        </p:spPr>
+        <p:txBody>
+          <a:bodyPr wrap="square">
+            <a:spAutoFit/>
+          </a:bodyPr>
+          <a:lstStyle/>
+          <a:p>
+            <a:pPr algn="ctr"/>
+            <a:r>
+              <a:rPr sz="3600" b="1">
+                <a:solidFill>
+                  <a:srgbClr val="0D631B"/>
+                </a:solidFill>
+                <a:latin typeface="Calibri"/>
+              </a:rPr>
+              <a:t>Questions &amp; Answers</a:t>
+            </a:r>
+          </a:p>
+        </p:txBody>
+      </p:sp>
+      <p:sp>
+        <p:nvSpPr>
+          <p:cNvPr id="10" name="TextBox 9"/>
+          <p:cNvSpPr txBox="1"/>
+          <p:nvPr/>
+        </p:nvSpPr>
+        <p:spPr>
+          <a:xfrm>
+            <a:off x="1828800" y="3450000"/>
+            <a:ext cx="8534095" cy="500000"/>
+          </a:xfrm>
+          <a:prstGeom prst="rect">
+            <a:avLst/>
+          </a:prstGeom>
+          <a:noFill/>
+        </p:spPr>
+        <p:txBody>
+          <a:bodyPr wrap="square">
+            <a:spAutoFit/>
+          </a:bodyPr>
+          <a:lstStyle/>
+          <a:p>
+            <a:pPr algn="ctr"/>
+            <a:r>
+              <a:rPr sz="1400" b="0">
+                <a:solidFill>
+                  <a:srgbClr val="333333"/>
+                </a:solidFill>
+                <a:latin typeface="Calibri"/>
+              </a:rPr>
+              <a:t>Maraming salamat po! Tanong tungkol sa sistema, datos, gastos, o susunod na hakbang?</a:t>
             </a:r>
           </a:p>
         </p:txBody>
@@ -8095,7 +8320,7 @@
 </file>
 
 <file path=ppt/slides/slide2.xml><?xml version="1.0" encoding="utf-8"?>
-<p:sld xmlns:a="http://schemas.openxmlformats.org/drawingml/2006/main" xmlns:p="http://schemas.openxmlformats.org/presentationml/2006/main" xmlns:r="http://schemas.openxmlformats.org/officeDocument/2006/relationships">
+<p:sld xmlns:a="http://schemas.openxmlformats.org/drawingml/2006/main" xmlns:r="http://schemas.openxmlformats.org/officeDocument/2006/relationships" xmlns:p="http://schemas.openxmlformats.org/presentationml/2006/main">
   <p:cSld>
     <p:bg>
       <p:bgPr>
@@ -8111,7 +8336,14 @@
         <p:cNvGrpSpPr/>
         <p:nvPr/>
       </p:nvGrpSpPr>
-      <p:grpSpPr/>
+      <p:grpSpPr>
+        <a:xfrm>
+          <a:off x="0" y="0"/>
+          <a:ext cx="0" cy="0"/>
+          <a:chOff x="0" y="0"/>
+          <a:chExt cx="0" cy="0"/>
+        </a:xfrm>
+      </p:grpSpPr>
       <p:sp>
         <p:nvSpPr>
           <p:cNvPr id="2" name="Rectangle 1"/>
@@ -8152,6 +8384,7 @@
           <a:lstStyle/>
           <a:p>
             <a:pPr algn="ctr"/>
+            <a:endParaRPr/>
           </a:p>
         </p:txBody>
       </p:sp>
@@ -8265,6 +8498,7 @@
           <a:lstStyle/>
           <a:p>
             <a:pPr algn="ctr"/>
+            <a:endParaRPr/>
           </a:p>
         </p:txBody>
       </p:sp>
@@ -8345,6 +8579,7 @@
           <a:lstStyle/>
           <a:p>
             <a:pPr algn="ctr"/>
+            <a:endParaRPr/>
           </a:p>
         </p:txBody>
       </p:sp>
@@ -8423,6 +8658,7 @@
           <a:lstStyle/>
           <a:p>
             <a:pPr algn="ctr"/>
+            <a:endParaRPr/>
           </a:p>
         </p:txBody>
       </p:sp>
@@ -8556,6 +8792,7 @@
           <a:lstStyle/>
           <a:p>
             <a:pPr algn="ctr"/>
+            <a:endParaRPr/>
           </a:p>
         </p:txBody>
       </p:sp>
@@ -8689,6 +8926,7 @@
           <a:lstStyle/>
           <a:p>
             <a:pPr algn="ctr"/>
+            <a:endParaRPr/>
           </a:p>
         </p:txBody>
       </p:sp>
@@ -8822,6 +9060,7 @@
           <a:lstStyle/>
           <a:p>
             <a:pPr algn="ctr"/>
+            <a:endParaRPr/>
           </a:p>
         </p:txBody>
       </p:sp>
@@ -8955,6 +9194,7 @@
           <a:lstStyle/>
           <a:p>
             <a:pPr algn="ctr"/>
+            <a:endParaRPr/>
           </a:p>
         </p:txBody>
       </p:sp>
@@ -9035,6 +9275,7 @@
           <a:lstStyle/>
           <a:p>
             <a:pPr algn="ctr"/>
+            <a:endParaRPr/>
           </a:p>
         </p:txBody>
       </p:sp>
@@ -9113,6 +9354,7 @@
           <a:lstStyle/>
           <a:p>
             <a:pPr algn="ctr"/>
+            <a:endParaRPr/>
           </a:p>
         </p:txBody>
       </p:sp>
@@ -9296,6 +9538,7 @@
           <a:lstStyle/>
           <a:p>
             <a:pPr algn="ctr"/>
+            <a:endParaRPr/>
           </a:p>
         </p:txBody>
       </p:sp>
@@ -9336,13 +9579,13 @@
       </p:sp>
       <p:sp>
         <p:nvSpPr>
-          <p:cNvPr id="32" name="TextBox 31"/>
-          <p:cNvSpPr txBox="1"/>
-          <p:nvPr/>
-        </p:nvSpPr>
-        <p:spPr>
-          <a:xfrm>
-            <a:off x="6327648" y="3227832"/>
+          <p:cNvPr id="33" name="TextBox 32"/>
+          <p:cNvSpPr txBox="1"/>
+          <p:nvPr/>
+        </p:nvSpPr>
+        <p:spPr>
+          <a:xfrm>
+            <a:off x="6309360" y="3325024"/>
             <a:ext cx="5394960" cy="292608"/>
           </a:xfrm>
           <a:prstGeom prst="rect">
@@ -9358,26 +9601,26 @@
           <a:p>
             <a:pPr algn="l"/>
             <a:r>
-              <a:rPr sz="1100" b="0" i="0">
+              <a:rPr sz="1100" b="0" i="0" dirty="0">
                 <a:solidFill>
                   <a:srgbClr val="181D17"/>
                 </a:solidFill>
                 <a:latin typeface="Calibri"/>
               </a:rPr>
-              <a:t>• DICT  —  capstone sponsor &amp; national deployer</a:t>
-            </a:r>
-          </a:p>
-        </p:txBody>
-      </p:sp>
-      <p:sp>
-        <p:nvSpPr>
-          <p:cNvPr id="33" name="TextBox 32"/>
-          <p:cNvSpPr txBox="1"/>
-          <p:nvPr/>
-        </p:nvSpPr>
-        <p:spPr>
-          <a:xfrm>
-            <a:off x="6327648" y="3511296"/>
+              <a:t>• DA Extension Workers  —  reduced field advisory load</a:t>
+            </a:r>
+          </a:p>
+        </p:txBody>
+      </p:sp>
+      <p:sp>
+        <p:nvSpPr>
+          <p:cNvPr id="34" name="TextBox 33"/>
+          <p:cNvSpPr txBox="1"/>
+          <p:nvPr/>
+        </p:nvSpPr>
+        <p:spPr>
+          <a:xfrm>
+            <a:off x="6309360" y="3667629"/>
             <a:ext cx="5394960" cy="292608"/>
           </a:xfrm>
           <a:prstGeom prst="rect">
@@ -9393,42 +9636,7 @@
           <a:p>
             <a:pPr algn="l"/>
             <a:r>
-              <a:rPr sz="1100" b="0" i="0">
-                <a:solidFill>
-                  <a:srgbClr val="181D17"/>
-                </a:solidFill>
-                <a:latin typeface="Calibri"/>
-              </a:rPr>
-              <a:t>• DA Extension Workers  —  reduced field advisory load</a:t>
-            </a:r>
-          </a:p>
-        </p:txBody>
-      </p:sp>
-      <p:sp>
-        <p:nvSpPr>
-          <p:cNvPr id="34" name="TextBox 33"/>
-          <p:cNvSpPr txBox="1"/>
-          <p:nvPr/>
-        </p:nvSpPr>
-        <p:spPr>
-          <a:xfrm>
-            <a:off x="6327648" y="3794760"/>
-            <a:ext cx="5394960" cy="292608"/>
-          </a:xfrm>
-          <a:prstGeom prst="rect">
-            <a:avLst/>
-          </a:prstGeom>
-          <a:noFill/>
-        </p:spPr>
-        <p:txBody>
-          <a:bodyPr wrap="square">
-            <a:spAutoFit/>
-          </a:bodyPr>
-          <a:lstStyle/>
-          <a:p>
-            <a:pPr algn="l"/>
-            <a:r>
-              <a:rPr sz="1100" b="0" i="0">
+              <a:rPr sz="1100" b="0" i="0" dirty="0">
                 <a:solidFill>
                   <a:srgbClr val="181D17"/>
                 </a:solidFill>
@@ -9479,6 +9687,7 @@
           <a:lstStyle/>
           <a:p>
             <a:pPr algn="ctr"/>
+            <a:endParaRPr/>
           </a:p>
         </p:txBody>
       </p:sp>
@@ -9541,7 +9750,7 @@
           <a:p>
             <a:pPr algn="l"/>
             <a:r>
-              <a:rPr sz="1100" b="0" i="0">
+              <a:rPr sz="1100" b="0" i="0" dirty="0">
                 <a:solidFill>
                   <a:srgbClr val="181D17"/>
                 </a:solidFill>
@@ -9662,6 +9871,7 @@
           <a:lstStyle/>
           <a:p>
             <a:pPr algn="ctr"/>
+            <a:endParaRPr/>
           </a:p>
         </p:txBody>
       </p:sp>
@@ -9775,6 +9985,7 @@
           <a:lstStyle/>
           <a:p>
             <a:pPr algn="ctr"/>
+            <a:endParaRPr/>
           </a:p>
         </p:txBody>
       </p:sp>
@@ -9844,119 +10055,6 @@
                 <a:latin typeface="Calibri"/>
               </a:rPr>
               <a:t>Smallholder Farmers</a:t>
-            </a:r>
-          </a:p>
-        </p:txBody>
-      </p:sp>
-      <p:sp>
-        <p:nvSpPr>
-          <p:cNvPr id="46" name="Rectangle 45"/>
-          <p:cNvSpPr/>
-          <p:nvPr/>
-        </p:nvSpPr>
-        <p:spPr>
-          <a:xfrm>
-            <a:off x="9966960" y="5504688"/>
-            <a:ext cx="1691640" cy="594360"/>
-          </a:xfrm>
-          <a:prstGeom prst="rect">
-            <a:avLst/>
-          </a:prstGeom>
-          <a:solidFill>
-            <a:srgbClr val="0D631B"/>
-          </a:solidFill>
-          <a:ln>
-            <a:noFill/>
-          </a:ln>
-        </p:spPr>
-        <p:style>
-          <a:lnRef idx="1">
-            <a:schemeClr val="accent1"/>
-          </a:lnRef>
-          <a:fillRef idx="3">
-            <a:schemeClr val="accent1"/>
-          </a:fillRef>
-          <a:effectRef idx="2">
-            <a:schemeClr val="accent1"/>
-          </a:effectRef>
-          <a:fontRef idx="minor">
-            <a:schemeClr val="lt1"/>
-          </a:fontRef>
-        </p:style>
-        <p:txBody>
-          <a:bodyPr rtlCol="0" anchor="ctr"/>
-          <a:lstStyle/>
-          <a:p>
-            <a:pPr algn="ctr"/>
-          </a:p>
-        </p:txBody>
-      </p:sp>
-      <p:sp>
-        <p:nvSpPr>
-          <p:cNvPr id="47" name="TextBox 46"/>
-          <p:cNvSpPr txBox="1"/>
-          <p:nvPr/>
-        </p:nvSpPr>
-        <p:spPr>
-          <a:xfrm>
-            <a:off x="9966960" y="5550408"/>
-            <a:ext cx="1691640" cy="320040"/>
-          </a:xfrm>
-          <a:prstGeom prst="rect">
-            <a:avLst/>
-          </a:prstGeom>
-          <a:noFill/>
-        </p:spPr>
-        <p:txBody>
-          <a:bodyPr wrap="square">
-            <a:spAutoFit/>
-          </a:bodyPr>
-          <a:lstStyle/>
-          <a:p>
-            <a:pPr algn="ctr"/>
-            <a:r>
-              <a:rPr sz="1800" b="1" i="0">
-                <a:solidFill>
-                  <a:srgbClr val="FED255"/>
-                </a:solidFill>
-                <a:latin typeface="Calibri"/>
-              </a:rPr>
-              <a:t>40%</a:t>
-            </a:r>
-          </a:p>
-        </p:txBody>
-      </p:sp>
-      <p:sp>
-        <p:nvSpPr>
-          <p:cNvPr id="48" name="TextBox 47"/>
-          <p:cNvSpPr txBox="1"/>
-          <p:nvPr/>
-        </p:nvSpPr>
-        <p:spPr>
-          <a:xfrm>
-            <a:off x="9966960" y="5870448"/>
-            <a:ext cx="1691640" cy="201168"/>
-          </a:xfrm>
-          <a:prstGeom prst="rect">
-            <a:avLst/>
-          </a:prstGeom>
-          <a:noFill/>
-        </p:spPr>
-        <p:txBody>
-          <a:bodyPr wrap="square">
-            <a:spAutoFit/>
-          </a:bodyPr>
-          <a:lstStyle/>
-          <a:p>
-            <a:pPr algn="ctr"/>
-            <a:r>
-              <a:rPr sz="800" b="0" i="0">
-                <a:solidFill>
-                  <a:srgbClr val="A3F69C"/>
-                </a:solidFill>
-                <a:latin typeface="Calibri"/>
-              </a:rPr>
-              <a:t>Barangays w/o Internet</a:t>
             </a:r>
           </a:p>
         </p:txBody>
@@ -9970,7 +10068,7 @@
 </file>
 
 <file path=ppt/slides/slide3.xml><?xml version="1.0" encoding="utf-8"?>
-<p:sld xmlns:a="http://schemas.openxmlformats.org/drawingml/2006/main" xmlns:p="http://schemas.openxmlformats.org/presentationml/2006/main" xmlns:r="http://schemas.openxmlformats.org/officeDocument/2006/relationships">
+<p:sld xmlns:a="http://schemas.openxmlformats.org/drawingml/2006/main" xmlns:r="http://schemas.openxmlformats.org/officeDocument/2006/relationships" xmlns:p="http://schemas.openxmlformats.org/presentationml/2006/main">
   <p:cSld>
     <p:bg>
       <p:bgPr>
@@ -9986,7 +10084,14 @@
         <p:cNvGrpSpPr/>
         <p:nvPr/>
       </p:nvGrpSpPr>
-      <p:grpSpPr/>
+      <p:grpSpPr>
+        <a:xfrm>
+          <a:off x="0" y="0"/>
+          <a:ext cx="0" cy="0"/>
+          <a:chOff x="0" y="0"/>
+          <a:chExt cx="0" cy="0"/>
+        </a:xfrm>
+      </p:grpSpPr>
       <p:sp>
         <p:nvSpPr>
           <p:cNvPr id="2" name="Rectangle 1"/>
@@ -10027,6 +10132,7 @@
           <a:lstStyle/>
           <a:p>
             <a:pPr algn="ctr"/>
+            <a:endParaRPr/>
           </a:p>
         </p:txBody>
       </p:sp>
@@ -10140,6 +10246,7 @@
           <a:lstStyle/>
           <a:p>
             <a:pPr algn="ctr"/>
+            <a:endParaRPr/>
           </a:p>
         </p:txBody>
       </p:sp>
@@ -10218,6 +10325,7 @@
           <a:lstStyle/>
           <a:p>
             <a:pPr algn="ctr"/>
+            <a:endParaRPr/>
           </a:p>
         </p:txBody>
       </p:sp>
@@ -10332,6 +10440,7 @@
           <a:lstStyle/>
           <a:p>
             <a:pPr algn="ctr"/>
+            <a:endParaRPr/>
           </a:p>
         </p:txBody>
       </p:sp>
@@ -10411,6 +10520,7 @@
           <a:lstStyle/>
           <a:p>
             <a:pPr algn="ctr"/>
+            <a:endParaRPr/>
           </a:p>
         </p:txBody>
       </p:sp>
@@ -10525,6 +10635,7 @@
           <a:lstStyle/>
           <a:p>
             <a:pPr algn="ctr"/>
+            <a:endParaRPr/>
           </a:p>
         </p:txBody>
       </p:sp>
@@ -10604,6 +10715,7 @@
           <a:lstStyle/>
           <a:p>
             <a:pPr algn="ctr"/>
+            <a:endParaRPr/>
           </a:p>
         </p:txBody>
       </p:sp>
@@ -10718,6 +10830,7 @@
           <a:lstStyle/>
           <a:p>
             <a:pPr algn="ctr"/>
+            <a:endParaRPr/>
           </a:p>
         </p:txBody>
       </p:sp>
@@ -10797,6 +10910,7 @@
           <a:lstStyle/>
           <a:p>
             <a:pPr algn="ctr"/>
+            <a:endParaRPr/>
           </a:p>
         </p:txBody>
       </p:sp>
@@ -10911,6 +11025,7 @@
           <a:lstStyle/>
           <a:p>
             <a:pPr algn="ctr"/>
+            <a:endParaRPr/>
           </a:p>
         </p:txBody>
       </p:sp>
@@ -10990,6 +11105,7 @@
           <a:lstStyle/>
           <a:p>
             <a:pPr algn="ctr"/>
+            <a:endParaRPr/>
           </a:p>
         </p:txBody>
       </p:sp>
@@ -11104,6 +11220,7 @@
           <a:lstStyle/>
           <a:p>
             <a:pPr algn="ctr"/>
+            <a:endParaRPr/>
           </a:p>
         </p:txBody>
       </p:sp>
@@ -11183,6 +11300,7 @@
           <a:lstStyle/>
           <a:p>
             <a:pPr algn="ctr"/>
+            <a:endParaRPr/>
           </a:p>
         </p:txBody>
       </p:sp>
@@ -11262,6 +11380,7 @@
           <a:lstStyle/>
           <a:p>
             <a:pPr algn="ctr"/>
+            <a:endParaRPr/>
           </a:p>
         </p:txBody>
       </p:sp>
@@ -11343,6 +11462,7 @@
           <a:lstStyle/>
           <a:p>
             <a:pPr algn="ctr"/>
+            <a:endParaRPr/>
           </a:p>
         </p:txBody>
       </p:sp>
@@ -11386,6 +11506,7 @@
           <a:lstStyle/>
           <a:p>
             <a:pPr algn="ctr"/>
+            <a:endParaRPr/>
           </a:p>
         </p:txBody>
       </p:sp>
@@ -11502,6 +11623,7 @@
           <a:lstStyle/>
           <a:p>
             <a:pPr algn="ctr"/>
+            <a:endParaRPr/>
           </a:p>
         </p:txBody>
       </p:sp>
@@ -11545,6 +11667,7 @@
           <a:lstStyle/>
           <a:p>
             <a:pPr algn="ctr"/>
+            <a:endParaRPr/>
           </a:p>
         </p:txBody>
       </p:sp>
@@ -11661,6 +11784,7 @@
           <a:lstStyle/>
           <a:p>
             <a:pPr algn="ctr"/>
+            <a:endParaRPr/>
           </a:p>
         </p:txBody>
       </p:sp>
@@ -11704,6 +11828,7 @@
           <a:lstStyle/>
           <a:p>
             <a:pPr algn="ctr"/>
+            <a:endParaRPr/>
           </a:p>
         </p:txBody>
       </p:sp>
@@ -11820,6 +11945,7 @@
           <a:lstStyle/>
           <a:p>
             <a:pPr algn="ctr"/>
+            <a:endParaRPr/>
           </a:p>
         </p:txBody>
       </p:sp>
@@ -11863,6 +11989,7 @@
           <a:lstStyle/>
           <a:p>
             <a:pPr algn="ctr"/>
+            <a:endParaRPr/>
           </a:p>
         </p:txBody>
       </p:sp>
@@ -11946,7 +12073,7 @@
 </file>
 
 <file path=ppt/slides/slide4.xml><?xml version="1.0" encoding="utf-8"?>
-<p:sld xmlns:a="http://schemas.openxmlformats.org/drawingml/2006/main" xmlns:p="http://schemas.openxmlformats.org/presentationml/2006/main" xmlns:r="http://schemas.openxmlformats.org/officeDocument/2006/relationships">
+<p:sld xmlns:a="http://schemas.openxmlformats.org/drawingml/2006/main" xmlns:r="http://schemas.openxmlformats.org/officeDocument/2006/relationships" xmlns:p="http://schemas.openxmlformats.org/presentationml/2006/main">
   <p:cSld>
     <p:bg>
       <p:bgPr>
@@ -11962,7 +12089,14 @@
         <p:cNvGrpSpPr/>
         <p:nvPr/>
       </p:nvGrpSpPr>
-      <p:grpSpPr/>
+      <p:grpSpPr>
+        <a:xfrm>
+          <a:off x="0" y="0"/>
+          <a:ext cx="0" cy="0"/>
+          <a:chOff x="0" y="0"/>
+          <a:chExt cx="0" cy="0"/>
+        </a:xfrm>
+      </p:grpSpPr>
       <p:sp>
         <p:nvSpPr>
           <p:cNvPr id="2" name="Rectangle 1"/>
@@ -12003,6 +12137,7 @@
           <a:lstStyle/>
           <a:p>
             <a:pPr algn="ctr"/>
+            <a:endParaRPr/>
           </a:p>
         </p:txBody>
       </p:sp>
@@ -12116,6 +12251,7 @@
           <a:lstStyle/>
           <a:p>
             <a:pPr algn="ctr"/>
+            <a:endParaRPr/>
           </a:p>
         </p:txBody>
       </p:sp>
@@ -12194,6 +12330,7 @@
           <a:lstStyle/>
           <a:p>
             <a:pPr algn="ctr"/>
+            <a:endParaRPr/>
           </a:p>
         </p:txBody>
       </p:sp>
@@ -12237,6 +12374,7 @@
           <a:lstStyle/>
           <a:p>
             <a:pPr algn="ctr"/>
+            <a:endParaRPr/>
           </a:p>
         </p:txBody>
       </p:sp>
@@ -12422,6 +12560,7 @@
           <a:lstStyle/>
           <a:p>
             <a:pPr algn="ctr"/>
+            <a:endParaRPr/>
           </a:p>
         </p:txBody>
       </p:sp>
@@ -12465,6 +12604,7 @@
           <a:lstStyle/>
           <a:p>
             <a:pPr algn="ctr"/>
+            <a:endParaRPr/>
           </a:p>
         </p:txBody>
       </p:sp>
@@ -12650,6 +12790,7 @@
           <a:lstStyle/>
           <a:p>
             <a:pPr algn="ctr"/>
+            <a:endParaRPr/>
           </a:p>
         </p:txBody>
       </p:sp>
@@ -12693,6 +12834,7 @@
           <a:lstStyle/>
           <a:p>
             <a:pPr algn="ctr"/>
+            <a:endParaRPr/>
           </a:p>
         </p:txBody>
       </p:sp>
@@ -12878,6 +13020,7 @@
           <a:lstStyle/>
           <a:p>
             <a:pPr algn="ctr"/>
+            <a:endParaRPr/>
           </a:p>
         </p:txBody>
       </p:sp>
@@ -12921,6 +13064,7 @@
           <a:lstStyle/>
           <a:p>
             <a:pPr algn="ctr"/>
+            <a:endParaRPr/>
           </a:p>
         </p:txBody>
       </p:sp>
@@ -13106,6 +13250,7 @@
           <a:lstStyle/>
           <a:p>
             <a:pPr algn="ctr"/>
+            <a:endParaRPr/>
           </a:p>
         </p:txBody>
       </p:sp>
@@ -13149,6 +13294,7 @@
           <a:lstStyle/>
           <a:p>
             <a:pPr algn="ctr"/>
+            <a:endParaRPr/>
           </a:p>
         </p:txBody>
       </p:sp>
@@ -13334,6 +13480,7 @@
           <a:lstStyle/>
           <a:p>
             <a:pPr algn="ctr"/>
+            <a:endParaRPr/>
           </a:p>
         </p:txBody>
       </p:sp>
@@ -13377,6 +13524,7 @@
           <a:lstStyle/>
           <a:p>
             <a:pPr algn="ctr"/>
+            <a:endParaRPr/>
           </a:p>
         </p:txBody>
       </p:sp>
@@ -13527,6 +13675,7 @@
           <a:lstStyle/>
           <a:p>
             <a:pPr algn="ctr"/>
+            <a:endParaRPr/>
           </a:p>
         </p:txBody>
       </p:sp>
@@ -13640,6 +13789,7 @@
           <a:lstStyle/>
           <a:p>
             <a:pPr algn="ctr"/>
+            <a:endParaRPr/>
           </a:p>
         </p:txBody>
       </p:sp>
@@ -13755,6 +13905,7 @@
           <a:lstStyle/>
           <a:p>
             <a:pPr algn="ctr"/>
+            <a:endParaRPr/>
           </a:p>
         </p:txBody>
       </p:sp>
@@ -13833,6 +13984,7 @@
           <a:lstStyle/>
           <a:p>
             <a:pPr algn="ctr"/>
+            <a:endParaRPr/>
           </a:p>
         </p:txBody>
       </p:sp>
@@ -13946,6 +14098,7 @@
           <a:lstStyle/>
           <a:p>
             <a:pPr algn="ctr"/>
+            <a:endParaRPr/>
           </a:p>
         </p:txBody>
       </p:sp>
@@ -14059,6 +14212,7 @@
           <a:lstStyle/>
           <a:p>
             <a:pPr algn="ctr"/>
+            <a:endParaRPr/>
           </a:p>
         </p:txBody>
       </p:sp>
@@ -14172,6 +14326,7 @@
           <a:lstStyle/>
           <a:p>
             <a:pPr algn="ctr"/>
+            <a:endParaRPr/>
           </a:p>
         </p:txBody>
       </p:sp>
@@ -14285,6 +14440,7 @@
           <a:lstStyle/>
           <a:p>
             <a:pPr algn="ctr"/>
+            <a:endParaRPr/>
           </a:p>
         </p:txBody>
       </p:sp>
@@ -14398,6 +14554,7 @@
           <a:lstStyle/>
           <a:p>
             <a:pPr algn="ctr"/>
+            <a:endParaRPr/>
           </a:p>
         </p:txBody>
       </p:sp>
@@ -14480,7 +14637,7 @@
 </file>
 
 <file path=ppt/slides/slide5.xml><?xml version="1.0" encoding="utf-8"?>
-<p:sld xmlns:a="http://schemas.openxmlformats.org/drawingml/2006/main" xmlns:p="http://schemas.openxmlformats.org/presentationml/2006/main" xmlns:r="http://schemas.openxmlformats.org/officeDocument/2006/relationships">
+<p:sld xmlns:a="http://schemas.openxmlformats.org/drawingml/2006/main" xmlns:r="http://schemas.openxmlformats.org/officeDocument/2006/relationships" xmlns:p="http://schemas.openxmlformats.org/presentationml/2006/main">
   <p:cSld>
     <p:bg>
       <p:bgPr>
@@ -14496,7 +14653,14 @@
         <p:cNvGrpSpPr/>
         <p:nvPr/>
       </p:nvGrpSpPr>
-      <p:grpSpPr/>
+      <p:grpSpPr>
+        <a:xfrm>
+          <a:off x="0" y="0"/>
+          <a:ext cx="0" cy="0"/>
+          <a:chOff x="0" y="0"/>
+          <a:chExt cx="0" cy="0"/>
+        </a:xfrm>
+      </p:grpSpPr>
       <p:sp>
         <p:nvSpPr>
           <p:cNvPr id="2" name="Rectangle 1"/>
@@ -14537,6 +14701,7 @@
           <a:lstStyle/>
           <a:p>
             <a:pPr algn="ctr"/>
+            <a:endParaRPr/>
           </a:p>
         </p:txBody>
       </p:sp>
@@ -14650,6 +14815,7 @@
           <a:lstStyle/>
           <a:p>
             <a:pPr algn="ctr"/>
+            <a:endParaRPr/>
           </a:p>
         </p:txBody>
       </p:sp>
@@ -14690,26 +14856,37 @@
       </p:sp>
       <p:sp>
         <p:nvSpPr>
-          <p:cNvPr id="7" name="Rectangle 6"/>
+          <p:cNvPr id="104" name="Rectangle 103">
+            <a:extLst>
+              <a:ext uri="{FF2B5EF4-FFF2-40B4-BE49-F238E27FC236}">
+                <a16:creationId xmlns:a16="http://schemas.microsoft.com/office/drawing/2014/main" id="{573C4390-1AC3-37F6-F62C-046C0012926B}"/>
+              </a:ext>
+            </a:extLst>
+          </p:cNvPr>
           <p:cNvSpPr/>
           <p:nvPr/>
         </p:nvSpPr>
         <p:spPr>
           <a:xfrm>
-            <a:off x="320040" y="1005840"/>
-            <a:ext cx="11567160" cy="5623560"/>
-          </a:xfrm>
-          <a:prstGeom prst="rect">
-            <a:avLst/>
-          </a:prstGeom>
-          <a:solidFill>
-            <a:srgbClr val="FFFFFF"/>
-          </a:solidFill>
-          <a:ln w="12700">
-            <a:solidFill>
-              <a:srgbClr val="E5EADF"/>
-            </a:solidFill>
-          </a:ln>
+            <a:off x="2291899" y="1140542"/>
+            <a:ext cx="7608201" cy="5279923"/>
+          </a:xfrm>
+          <a:prstGeom prst="rect">
+            <a:avLst/>
+          </a:prstGeom>
+          <a:blipFill dpi="0" rotWithShape="1">
+            <a:blip r:embed="rId2">
+              <a:extLst>
+                <a:ext uri="{28A0092B-C50C-407E-A947-70E740481C1C}">
+                  <a14:useLocalDpi xmlns:a14="http://schemas.microsoft.com/office/drawing/2010/main" val="0"/>
+                </a:ext>
+              </a:extLst>
+            </a:blip>
+            <a:srcRect/>
+            <a:stretch>
+              <a:fillRect/>
+            </a:stretch>
+          </a:blipFill>
         </p:spPr>
         <p:style>
           <a:lnRef idx="1">
@@ -14730,3627 +14907,7 @@
           <a:lstStyle/>
           <a:p>
             <a:pPr algn="ctr"/>
-          </a:p>
-        </p:txBody>
-      </p:sp>
-      <p:sp>
-        <p:nvSpPr>
-          <p:cNvPr id="8" name="Rectangle 7"/>
-          <p:cNvSpPr/>
-          <p:nvPr/>
-        </p:nvSpPr>
-        <p:spPr>
-          <a:xfrm>
-            <a:off x="320040" y="1005840"/>
-            <a:ext cx="1965960" cy="5623560"/>
-          </a:xfrm>
-          <a:prstGeom prst="rect">
-            <a:avLst/>
-          </a:prstGeom>
-          <a:solidFill>
-            <a:srgbClr val="0D631B"/>
-          </a:solidFill>
-          <a:ln>
-            <a:noFill/>
-          </a:ln>
-        </p:spPr>
-        <p:style>
-          <a:lnRef idx="1">
-            <a:schemeClr val="accent1"/>
-          </a:lnRef>
-          <a:fillRef idx="3">
-            <a:schemeClr val="accent1"/>
-          </a:fillRef>
-          <a:effectRef idx="2">
-            <a:schemeClr val="accent1"/>
-          </a:effectRef>
-          <a:fontRef idx="minor">
-            <a:schemeClr val="lt1"/>
-          </a:fontRef>
-        </p:style>
-        <p:txBody>
-          <a:bodyPr rtlCol="0" anchor="ctr"/>
-          <a:lstStyle/>
-          <a:p>
-            <a:pPr algn="ctr"/>
-          </a:p>
-        </p:txBody>
-      </p:sp>
-      <p:sp>
-        <p:nvSpPr>
-          <p:cNvPr id="9" name="TextBox 8"/>
-          <p:cNvSpPr txBox="1"/>
-          <p:nvPr/>
-        </p:nvSpPr>
-        <p:spPr>
-          <a:xfrm>
-            <a:off x="438912" y="1097280"/>
-            <a:ext cx="1828800" cy="347472"/>
-          </a:xfrm>
-          <a:prstGeom prst="rect">
-            <a:avLst/>
-          </a:prstGeom>
-          <a:noFill/>
-        </p:spPr>
-        <p:txBody>
-          <a:bodyPr wrap="square">
-            <a:spAutoFit/>
-          </a:bodyPr>
-          <a:lstStyle/>
-          <a:p>
-            <a:pPr algn="l"/>
-            <a:r>
-              <a:rPr sz="1300" b="1" i="0">
-                <a:solidFill>
-                  <a:srgbClr val="FFFFFF"/>
-                </a:solidFill>
-                <a:latin typeface="Calibri"/>
-              </a:rPr>
-              <a:t>Agri-Admin</a:t>
-            </a:r>
-          </a:p>
-        </p:txBody>
-      </p:sp>
-      <p:sp>
-        <p:nvSpPr>
-          <p:cNvPr id="10" name="TextBox 9"/>
-          <p:cNvSpPr txBox="1"/>
-          <p:nvPr/>
-        </p:nvSpPr>
-        <p:spPr>
-          <a:xfrm>
-            <a:off x="438912" y="1463040"/>
-            <a:ext cx="1828800" cy="256032"/>
-          </a:xfrm>
-          <a:prstGeom prst="rect">
-            <a:avLst/>
-          </a:prstGeom>
-          <a:noFill/>
-        </p:spPr>
-        <p:txBody>
-          <a:bodyPr wrap="square">
-            <a:spAutoFit/>
-          </a:bodyPr>
-          <a:lstStyle/>
-          <a:p>
-            <a:pPr algn="l"/>
-            <a:r>
-              <a:rPr sz="900" b="0" i="0">
-                <a:solidFill>
-                  <a:srgbClr val="A3F69C"/>
-                </a:solidFill>
-                <a:latin typeface="Calibri"/>
-              </a:rPr>
-              <a:t>Crop Dashboard</a:t>
-            </a:r>
-          </a:p>
-        </p:txBody>
-      </p:sp>
-      <p:sp>
-        <p:nvSpPr>
-          <p:cNvPr id="11" name="Rectangle 10"/>
-          <p:cNvSpPr/>
-          <p:nvPr/>
-        </p:nvSpPr>
-        <p:spPr>
-          <a:xfrm>
-            <a:off x="338328" y="1901952"/>
-            <a:ext cx="1929384" cy="457200"/>
-          </a:xfrm>
-          <a:prstGeom prst="rect">
-            <a:avLst/>
-          </a:prstGeom>
-          <a:solidFill>
-            <a:srgbClr val="2E7D32"/>
-          </a:solidFill>
-          <a:ln>
-            <a:noFill/>
-          </a:ln>
-        </p:spPr>
-        <p:style>
-          <a:lnRef idx="1">
-            <a:schemeClr val="accent1"/>
-          </a:lnRef>
-          <a:fillRef idx="3">
-            <a:schemeClr val="accent1"/>
-          </a:fillRef>
-          <a:effectRef idx="2">
-            <a:schemeClr val="accent1"/>
-          </a:effectRef>
-          <a:fontRef idx="minor">
-            <a:schemeClr val="lt1"/>
-          </a:fontRef>
-        </p:style>
-        <p:txBody>
-          <a:bodyPr rtlCol="0" anchor="ctr"/>
-          <a:lstStyle/>
-          <a:p>
-            <a:pPr algn="ctr"/>
-          </a:p>
-        </p:txBody>
-      </p:sp>
-      <p:sp>
-        <p:nvSpPr>
-          <p:cNvPr id="12" name="TextBox 11"/>
-          <p:cNvSpPr txBox="1"/>
-          <p:nvPr/>
-        </p:nvSpPr>
-        <p:spPr>
-          <a:xfrm>
-            <a:off x="438912" y="1947672"/>
-            <a:ext cx="1737360" cy="347472"/>
-          </a:xfrm>
-          <a:prstGeom prst="rect">
-            <a:avLst/>
-          </a:prstGeom>
-          <a:noFill/>
-        </p:spPr>
-        <p:txBody>
-          <a:bodyPr wrap="square">
-            <a:spAutoFit/>
-          </a:bodyPr>
-          <a:lstStyle/>
-          <a:p>
-            <a:pPr algn="l"/>
-            <a:r>
-              <a:rPr sz="1000" b="0" i="0">
-                <a:solidFill>
-                  <a:srgbClr val="FFFFFF"/>
-                </a:solidFill>
-                <a:latin typeface="Calibri"/>
-              </a:rPr>
-              <a:t>🏠  Dashboard</a:t>
-            </a:r>
-          </a:p>
-        </p:txBody>
-      </p:sp>
-      <p:sp>
-        <p:nvSpPr>
-          <p:cNvPr id="13" name="Rectangle 12"/>
-          <p:cNvSpPr/>
-          <p:nvPr/>
-        </p:nvSpPr>
-        <p:spPr>
-          <a:xfrm>
-            <a:off x="338328" y="2414016"/>
-            <a:ext cx="1929384" cy="457200"/>
-          </a:xfrm>
-          <a:prstGeom prst="rect">
-            <a:avLst/>
-          </a:prstGeom>
-          <a:solidFill>
-            <a:srgbClr val="1865D4"/>
-          </a:solidFill>
-          <a:ln>
-            <a:noFill/>
-          </a:ln>
-        </p:spPr>
-        <p:style>
-          <a:lnRef idx="1">
-            <a:schemeClr val="accent1"/>
-          </a:lnRef>
-          <a:fillRef idx="3">
-            <a:schemeClr val="accent1"/>
-          </a:fillRef>
-          <a:effectRef idx="2">
-            <a:schemeClr val="accent1"/>
-          </a:effectRef>
-          <a:fontRef idx="minor">
-            <a:schemeClr val="lt1"/>
-          </a:fontRef>
-        </p:style>
-        <p:txBody>
-          <a:bodyPr rtlCol="0" anchor="ctr"/>
-          <a:lstStyle/>
-          <a:p>
-            <a:pPr algn="ctr"/>
-          </a:p>
-        </p:txBody>
-      </p:sp>
-      <p:sp>
-        <p:nvSpPr>
-          <p:cNvPr id="14" name="TextBox 13"/>
-          <p:cNvSpPr txBox="1"/>
-          <p:nvPr/>
-        </p:nvSpPr>
-        <p:spPr>
-          <a:xfrm>
-            <a:off x="438912" y="2459736"/>
-            <a:ext cx="1737360" cy="347472"/>
-          </a:xfrm>
-          <a:prstGeom prst="rect">
-            <a:avLst/>
-          </a:prstGeom>
-          <a:noFill/>
-        </p:spPr>
-        <p:txBody>
-          <a:bodyPr wrap="square">
-            <a:spAutoFit/>
-          </a:bodyPr>
-          <a:lstStyle/>
-          <a:p>
-            <a:pPr algn="l"/>
-            <a:r>
-              <a:rPr sz="1000" b="0" i="0">
-                <a:solidFill>
-                  <a:srgbClr val="FFFFFF"/>
-                </a:solidFill>
-                <a:latin typeface="Calibri"/>
-              </a:rPr>
-              <a:t>🗺  Google Maps</a:t>
-            </a:r>
-          </a:p>
-        </p:txBody>
-      </p:sp>
-      <p:sp>
-        <p:nvSpPr>
-          <p:cNvPr id="15" name="Rectangle 14"/>
-          <p:cNvSpPr/>
-          <p:nvPr/>
-        </p:nvSpPr>
-        <p:spPr>
-          <a:xfrm>
-            <a:off x="338328" y="2926080"/>
-            <a:ext cx="1929384" cy="457200"/>
-          </a:xfrm>
-          <a:prstGeom prst="rect">
-            <a:avLst/>
-          </a:prstGeom>
-          <a:solidFill>
-            <a:srgbClr val="0D631B"/>
-          </a:solidFill>
-          <a:ln>
-            <a:noFill/>
-          </a:ln>
-        </p:spPr>
-        <p:style>
-          <a:lnRef idx="1">
-            <a:schemeClr val="accent1"/>
-          </a:lnRef>
-          <a:fillRef idx="3">
-            <a:schemeClr val="accent1"/>
-          </a:fillRef>
-          <a:effectRef idx="2">
-            <a:schemeClr val="accent1"/>
-          </a:effectRef>
-          <a:fontRef idx="minor">
-            <a:schemeClr val="lt1"/>
-          </a:fontRef>
-        </p:style>
-        <p:txBody>
-          <a:bodyPr rtlCol="0" anchor="ctr"/>
-          <a:lstStyle/>
-          <a:p>
-            <a:pPr algn="ctr"/>
-          </a:p>
-        </p:txBody>
-      </p:sp>
-      <p:sp>
-        <p:nvSpPr>
-          <p:cNvPr id="16" name="TextBox 15"/>
-          <p:cNvSpPr txBox="1"/>
-          <p:nvPr/>
-        </p:nvSpPr>
-        <p:spPr>
-          <a:xfrm>
-            <a:off x="438912" y="2971800"/>
-            <a:ext cx="1737360" cy="347472"/>
-          </a:xfrm>
-          <a:prstGeom prst="rect">
-            <a:avLst/>
-          </a:prstGeom>
-          <a:noFill/>
-        </p:spPr>
-        <p:txBody>
-          <a:bodyPr wrap="square">
-            <a:spAutoFit/>
-          </a:bodyPr>
-          <a:lstStyle/>
-          <a:p>
-            <a:pPr algn="l"/>
-            <a:r>
-              <a:rPr sz="1000" b="0" i="0">
-                <a:solidFill>
-                  <a:srgbClr val="FFFFFF"/>
-                </a:solidFill>
-                <a:latin typeface="Calibri"/>
-              </a:rPr>
-              <a:t>📍  Sensor Plots</a:t>
-            </a:r>
-          </a:p>
-        </p:txBody>
-      </p:sp>
-      <p:sp>
-        <p:nvSpPr>
-          <p:cNvPr id="17" name="Rectangle 16"/>
-          <p:cNvSpPr/>
-          <p:nvPr/>
-        </p:nvSpPr>
-        <p:spPr>
-          <a:xfrm>
-            <a:off x="338328" y="3438144"/>
-            <a:ext cx="1929384" cy="457200"/>
-          </a:xfrm>
-          <a:prstGeom prst="rect">
-            <a:avLst/>
-          </a:prstGeom>
-          <a:solidFill>
-            <a:srgbClr val="0D631B"/>
-          </a:solidFill>
-          <a:ln>
-            <a:noFill/>
-          </a:ln>
-        </p:spPr>
-        <p:style>
-          <a:lnRef idx="1">
-            <a:schemeClr val="accent1"/>
-          </a:lnRef>
-          <a:fillRef idx="3">
-            <a:schemeClr val="accent1"/>
-          </a:fillRef>
-          <a:effectRef idx="2">
-            <a:schemeClr val="accent1"/>
-          </a:effectRef>
-          <a:fontRef idx="minor">
-            <a:schemeClr val="lt1"/>
-          </a:fontRef>
-        </p:style>
-        <p:txBody>
-          <a:bodyPr rtlCol="0" anchor="ctr"/>
-          <a:lstStyle/>
-          <a:p>
-            <a:pPr algn="ctr"/>
-          </a:p>
-        </p:txBody>
-      </p:sp>
-      <p:sp>
-        <p:nvSpPr>
-          <p:cNvPr id="18" name="TextBox 17"/>
-          <p:cNvSpPr txBox="1"/>
-          <p:nvPr/>
-        </p:nvSpPr>
-        <p:spPr>
-          <a:xfrm>
-            <a:off x="438912" y="3483864"/>
-            <a:ext cx="1737360" cy="347472"/>
-          </a:xfrm>
-          <a:prstGeom prst="rect">
-            <a:avLst/>
-          </a:prstGeom>
-          <a:noFill/>
-        </p:spPr>
-        <p:txBody>
-          <a:bodyPr wrap="square">
-            <a:spAutoFit/>
-          </a:bodyPr>
-          <a:lstStyle/>
-          <a:p>
-            <a:pPr algn="l"/>
-            <a:r>
-              <a:rPr sz="1000" b="0" i="0">
-                <a:solidFill>
-                  <a:srgbClr val="FFFFFF"/>
-                </a:solidFill>
-                <a:latin typeface="Calibri"/>
-              </a:rPr>
-              <a:t>📊  Readings</a:t>
-            </a:r>
-          </a:p>
-        </p:txBody>
-      </p:sp>
-      <p:sp>
-        <p:nvSpPr>
-          <p:cNvPr id="19" name="Rectangle 18"/>
-          <p:cNvSpPr/>
-          <p:nvPr/>
-        </p:nvSpPr>
-        <p:spPr>
-          <a:xfrm>
-            <a:off x="338328" y="3950208"/>
-            <a:ext cx="1929384" cy="457200"/>
-          </a:xfrm>
-          <a:prstGeom prst="rect">
-            <a:avLst/>
-          </a:prstGeom>
-          <a:solidFill>
-            <a:srgbClr val="0D631B"/>
-          </a:solidFill>
-          <a:ln>
-            <a:noFill/>
-          </a:ln>
-        </p:spPr>
-        <p:style>
-          <a:lnRef idx="1">
-            <a:schemeClr val="accent1"/>
-          </a:lnRef>
-          <a:fillRef idx="3">
-            <a:schemeClr val="accent1"/>
-          </a:fillRef>
-          <a:effectRef idx="2">
-            <a:schemeClr val="accent1"/>
-          </a:effectRef>
-          <a:fontRef idx="minor">
-            <a:schemeClr val="lt1"/>
-          </a:fontRef>
-        </p:style>
-        <p:txBody>
-          <a:bodyPr rtlCol="0" anchor="ctr"/>
-          <a:lstStyle/>
-          <a:p>
-            <a:pPr algn="ctr"/>
-          </a:p>
-        </p:txBody>
-      </p:sp>
-      <p:sp>
-        <p:nvSpPr>
-          <p:cNvPr id="20" name="TextBox 19"/>
-          <p:cNvSpPr txBox="1"/>
-          <p:nvPr/>
-        </p:nvSpPr>
-        <p:spPr>
-          <a:xfrm>
-            <a:off x="438912" y="3995928"/>
-            <a:ext cx="1737360" cy="347472"/>
-          </a:xfrm>
-          <a:prstGeom prst="rect">
-            <a:avLst/>
-          </a:prstGeom>
-          <a:noFill/>
-        </p:spPr>
-        <p:txBody>
-          <a:bodyPr wrap="square">
-            <a:spAutoFit/>
-          </a:bodyPr>
-          <a:lstStyle/>
-          <a:p>
-            <a:pPr algn="l"/>
-            <a:r>
-              <a:rPr sz="1000" b="0" i="0">
-                <a:solidFill>
-                  <a:srgbClr val="FFFFFF"/>
-                </a:solidFill>
-                <a:latin typeface="Calibri"/>
-              </a:rPr>
-              <a:t>👥  Farmers</a:t>
-            </a:r>
-          </a:p>
-        </p:txBody>
-      </p:sp>
-      <p:sp>
-        <p:nvSpPr>
-          <p:cNvPr id="21" name="Rectangle 20"/>
-          <p:cNvSpPr/>
-          <p:nvPr/>
-        </p:nvSpPr>
-        <p:spPr>
-          <a:xfrm>
-            <a:off x="338328" y="4462272"/>
-            <a:ext cx="1929384" cy="457200"/>
-          </a:xfrm>
-          <a:prstGeom prst="rect">
-            <a:avLst/>
-          </a:prstGeom>
-          <a:solidFill>
-            <a:srgbClr val="0D631B"/>
-          </a:solidFill>
-          <a:ln>
-            <a:noFill/>
-          </a:ln>
-        </p:spPr>
-        <p:style>
-          <a:lnRef idx="1">
-            <a:schemeClr val="accent1"/>
-          </a:lnRef>
-          <a:fillRef idx="3">
-            <a:schemeClr val="accent1"/>
-          </a:fillRef>
-          <a:effectRef idx="2">
-            <a:schemeClr val="accent1"/>
-          </a:effectRef>
-          <a:fontRef idx="minor">
-            <a:schemeClr val="lt1"/>
-          </a:fontRef>
-        </p:style>
-        <p:txBody>
-          <a:bodyPr rtlCol="0" anchor="ctr"/>
-          <a:lstStyle/>
-          <a:p>
-            <a:pPr algn="ctr"/>
-          </a:p>
-        </p:txBody>
-      </p:sp>
-      <p:sp>
-        <p:nvSpPr>
-          <p:cNvPr id="22" name="TextBox 21"/>
-          <p:cNvSpPr txBox="1"/>
-          <p:nvPr/>
-        </p:nvSpPr>
-        <p:spPr>
-          <a:xfrm>
-            <a:off x="438912" y="4507992"/>
-            <a:ext cx="1737360" cy="347472"/>
-          </a:xfrm>
-          <a:prstGeom prst="rect">
-            <a:avLst/>
-          </a:prstGeom>
-          <a:noFill/>
-        </p:spPr>
-        <p:txBody>
-          <a:bodyPr wrap="square">
-            <a:spAutoFit/>
-          </a:bodyPr>
-          <a:lstStyle/>
-          <a:p>
-            <a:pPr algn="l"/>
-            <a:r>
-              <a:rPr sz="1000" b="0" i="0">
-                <a:solidFill>
-                  <a:srgbClr val="FFFFFF"/>
-                </a:solidFill>
-                <a:latin typeface="Calibri"/>
-              </a:rPr>
-              <a:t>⚙  Settings</a:t>
-            </a:r>
-          </a:p>
-        </p:txBody>
-      </p:sp>
-      <p:sp>
-        <p:nvSpPr>
-          <p:cNvPr id="23" name="Rectangle 22"/>
-          <p:cNvSpPr/>
-          <p:nvPr/>
-        </p:nvSpPr>
-        <p:spPr>
-          <a:xfrm>
-            <a:off x="2423160" y="1097280"/>
-            <a:ext cx="2148840" cy="804672"/>
-          </a:xfrm>
-          <a:prstGeom prst="rect">
-            <a:avLst/>
-          </a:prstGeom>
-          <a:solidFill>
-            <a:srgbClr val="0D631B"/>
-          </a:solidFill>
-          <a:ln>
-            <a:noFill/>
-          </a:ln>
-        </p:spPr>
-        <p:style>
-          <a:lnRef idx="1">
-            <a:schemeClr val="accent1"/>
-          </a:lnRef>
-          <a:fillRef idx="3">
-            <a:schemeClr val="accent1"/>
-          </a:fillRef>
-          <a:effectRef idx="2">
-            <a:schemeClr val="accent1"/>
-          </a:effectRef>
-          <a:fontRef idx="minor">
-            <a:schemeClr val="lt1"/>
-          </a:fontRef>
-        </p:style>
-        <p:txBody>
-          <a:bodyPr rtlCol="0" anchor="ctr"/>
-          <a:lstStyle/>
-          <a:p>
-            <a:pPr algn="ctr"/>
-          </a:p>
-        </p:txBody>
-      </p:sp>
-      <p:sp>
-        <p:nvSpPr>
-          <p:cNvPr id="24" name="TextBox 23"/>
-          <p:cNvSpPr txBox="1"/>
-          <p:nvPr/>
-        </p:nvSpPr>
-        <p:spPr>
-          <a:xfrm>
-            <a:off x="2423160" y="1161288"/>
-            <a:ext cx="2148840" cy="384048"/>
-          </a:xfrm>
-          <a:prstGeom prst="rect">
-            <a:avLst/>
-          </a:prstGeom>
-          <a:noFill/>
-        </p:spPr>
-        <p:txBody>
-          <a:bodyPr wrap="square">
-            <a:spAutoFit/>
-          </a:bodyPr>
-          <a:lstStyle/>
-          <a:p>
-            <a:pPr algn="ctr"/>
-            <a:r>
-              <a:rPr sz="2200" b="1" i="0">
-                <a:solidFill>
-                  <a:srgbClr val="FFFFFF"/>
-                </a:solidFill>
-                <a:latin typeface="Calibri"/>
-              </a:rPr>
-              <a:t>3</a:t>
-            </a:r>
-          </a:p>
-        </p:txBody>
-      </p:sp>
-      <p:sp>
-        <p:nvSpPr>
-          <p:cNvPr id="25" name="TextBox 24"/>
-          <p:cNvSpPr txBox="1"/>
-          <p:nvPr/>
-        </p:nvSpPr>
-        <p:spPr>
-          <a:xfrm>
-            <a:off x="2423160" y="1536192"/>
-            <a:ext cx="2148840" cy="274320"/>
-          </a:xfrm>
-          <a:prstGeom prst="rect">
-            <a:avLst/>
-          </a:prstGeom>
-          <a:noFill/>
-        </p:spPr>
-        <p:txBody>
-          <a:bodyPr wrap="square">
-            <a:spAutoFit/>
-          </a:bodyPr>
-          <a:lstStyle/>
-          <a:p>
-            <a:pPr algn="ctr"/>
-            <a:r>
-              <a:rPr sz="900" b="0" i="0">
-                <a:solidFill>
-                  <a:srgbClr val="FFFFFF"/>
-                </a:solidFill>
-                <a:latin typeface="Calibri"/>
-              </a:rPr>
-              <a:t>Active Farms</a:t>
-            </a:r>
-          </a:p>
-        </p:txBody>
-      </p:sp>
-      <p:sp>
-        <p:nvSpPr>
-          <p:cNvPr id="26" name="Rectangle 25"/>
-          <p:cNvSpPr/>
-          <p:nvPr/>
-        </p:nvSpPr>
-        <p:spPr>
-          <a:xfrm>
-            <a:off x="4800600" y="1097280"/>
-            <a:ext cx="2148840" cy="804672"/>
-          </a:xfrm>
-          <a:prstGeom prst="rect">
-            <a:avLst/>
-          </a:prstGeom>
-          <a:solidFill>
-            <a:srgbClr val="2E7D32"/>
-          </a:solidFill>
-          <a:ln>
-            <a:noFill/>
-          </a:ln>
-        </p:spPr>
-        <p:style>
-          <a:lnRef idx="1">
-            <a:schemeClr val="accent1"/>
-          </a:lnRef>
-          <a:fillRef idx="3">
-            <a:schemeClr val="accent1"/>
-          </a:fillRef>
-          <a:effectRef idx="2">
-            <a:schemeClr val="accent1"/>
-          </a:effectRef>
-          <a:fontRef idx="minor">
-            <a:schemeClr val="lt1"/>
-          </a:fontRef>
-        </p:style>
-        <p:txBody>
-          <a:bodyPr rtlCol="0" anchor="ctr"/>
-          <a:lstStyle/>
-          <a:p>
-            <a:pPr algn="ctr"/>
-          </a:p>
-        </p:txBody>
-      </p:sp>
-      <p:sp>
-        <p:nvSpPr>
-          <p:cNvPr id="27" name="TextBox 26"/>
-          <p:cNvSpPr txBox="1"/>
-          <p:nvPr/>
-        </p:nvSpPr>
-        <p:spPr>
-          <a:xfrm>
-            <a:off x="4800600" y="1161288"/>
-            <a:ext cx="2148840" cy="384048"/>
-          </a:xfrm>
-          <a:prstGeom prst="rect">
-            <a:avLst/>
-          </a:prstGeom>
-          <a:noFill/>
-        </p:spPr>
-        <p:txBody>
-          <a:bodyPr wrap="square">
-            <a:spAutoFit/>
-          </a:bodyPr>
-          <a:lstStyle/>
-          <a:p>
-            <a:pPr algn="ctr"/>
-            <a:r>
-              <a:rPr sz="2200" b="1" i="0">
-                <a:solidFill>
-                  <a:srgbClr val="FFFFFF"/>
-                </a:solidFill>
-                <a:latin typeface="Calibri"/>
-              </a:rPr>
-              <a:t>12</a:t>
-            </a:r>
-          </a:p>
-        </p:txBody>
-      </p:sp>
-      <p:sp>
-        <p:nvSpPr>
-          <p:cNvPr id="28" name="TextBox 27"/>
-          <p:cNvSpPr txBox="1"/>
-          <p:nvPr/>
-        </p:nvSpPr>
-        <p:spPr>
-          <a:xfrm>
-            <a:off x="4800600" y="1536192"/>
-            <a:ext cx="2148840" cy="274320"/>
-          </a:xfrm>
-          <a:prstGeom prst="rect">
-            <a:avLst/>
-          </a:prstGeom>
-          <a:noFill/>
-        </p:spPr>
-        <p:txBody>
-          <a:bodyPr wrap="square">
-            <a:spAutoFit/>
-          </a:bodyPr>
-          <a:lstStyle/>
-          <a:p>
-            <a:pPr algn="ctr"/>
-            <a:r>
-              <a:rPr sz="900" b="0" i="0">
-                <a:solidFill>
-                  <a:srgbClr val="FFFFFF"/>
-                </a:solidFill>
-                <a:latin typeface="Calibri"/>
-              </a:rPr>
-              <a:t>Sensor Plots</a:t>
-            </a:r>
-          </a:p>
-        </p:txBody>
-      </p:sp>
-      <p:sp>
-        <p:nvSpPr>
-          <p:cNvPr id="29" name="Rectangle 28"/>
-          <p:cNvSpPr/>
-          <p:nvPr/>
-        </p:nvSpPr>
-        <p:spPr>
-          <a:xfrm>
-            <a:off x="7178040" y="1097280"/>
-            <a:ext cx="2148840" cy="804672"/>
-          </a:xfrm>
-          <a:prstGeom prst="rect">
-            <a:avLst/>
-          </a:prstGeom>
-          <a:solidFill>
-            <a:srgbClr val="E65C00"/>
-          </a:solidFill>
-          <a:ln>
-            <a:noFill/>
-          </a:ln>
-        </p:spPr>
-        <p:style>
-          <a:lnRef idx="1">
-            <a:schemeClr val="accent1"/>
-          </a:lnRef>
-          <a:fillRef idx="3">
-            <a:schemeClr val="accent1"/>
-          </a:fillRef>
-          <a:effectRef idx="2">
-            <a:schemeClr val="accent1"/>
-          </a:effectRef>
-          <a:fontRef idx="minor">
-            <a:schemeClr val="lt1"/>
-          </a:fontRef>
-        </p:style>
-        <p:txBody>
-          <a:bodyPr rtlCol="0" anchor="ctr"/>
-          <a:lstStyle/>
-          <a:p>
-            <a:pPr algn="ctr"/>
-          </a:p>
-        </p:txBody>
-      </p:sp>
-      <p:sp>
-        <p:nvSpPr>
-          <p:cNvPr id="30" name="TextBox 29"/>
-          <p:cNvSpPr txBox="1"/>
-          <p:nvPr/>
-        </p:nvSpPr>
-        <p:spPr>
-          <a:xfrm>
-            <a:off x="7178040" y="1161288"/>
-            <a:ext cx="2148840" cy="384048"/>
-          </a:xfrm>
-          <a:prstGeom prst="rect">
-            <a:avLst/>
-          </a:prstGeom>
-          <a:noFill/>
-        </p:spPr>
-        <p:txBody>
-          <a:bodyPr wrap="square">
-            <a:spAutoFit/>
-          </a:bodyPr>
-          <a:lstStyle/>
-          <a:p>
-            <a:pPr algn="ctr"/>
-            <a:r>
-              <a:rPr sz="2200" b="1" i="0">
-                <a:solidFill>
-                  <a:srgbClr val="FFFFFF"/>
-                </a:solidFill>
-                <a:latin typeface="Calibri"/>
-              </a:rPr>
-              <a:t>48</a:t>
-            </a:r>
-          </a:p>
-        </p:txBody>
-      </p:sp>
-      <p:sp>
-        <p:nvSpPr>
-          <p:cNvPr id="31" name="TextBox 30"/>
-          <p:cNvSpPr txBox="1"/>
-          <p:nvPr/>
-        </p:nvSpPr>
-        <p:spPr>
-          <a:xfrm>
-            <a:off x="7178040" y="1536192"/>
-            <a:ext cx="2148840" cy="274320"/>
-          </a:xfrm>
-          <a:prstGeom prst="rect">
-            <a:avLst/>
-          </a:prstGeom>
-          <a:noFill/>
-        </p:spPr>
-        <p:txBody>
-          <a:bodyPr wrap="square">
-            <a:spAutoFit/>
-          </a:bodyPr>
-          <a:lstStyle/>
-          <a:p>
-            <a:pPr algn="ctr"/>
-            <a:r>
-              <a:rPr sz="900" b="0" i="0">
-                <a:solidFill>
-                  <a:srgbClr val="FFFFFF"/>
-                </a:solidFill>
-                <a:latin typeface="Calibri"/>
-              </a:rPr>
-              <a:t>IoT Sensors</a:t>
-            </a:r>
-          </a:p>
-        </p:txBody>
-      </p:sp>
-      <p:sp>
-        <p:nvSpPr>
-          <p:cNvPr id="32" name="Rectangle 31"/>
-          <p:cNvSpPr/>
-          <p:nvPr/>
-        </p:nvSpPr>
-        <p:spPr>
-          <a:xfrm>
-            <a:off x="9555480" y="1097280"/>
-            <a:ext cx="2148840" cy="804672"/>
-          </a:xfrm>
-          <a:prstGeom prst="rect">
-            <a:avLst/>
-          </a:prstGeom>
-          <a:solidFill>
-            <a:srgbClr val="1865D4"/>
-          </a:solidFill>
-          <a:ln>
-            <a:noFill/>
-          </a:ln>
-        </p:spPr>
-        <p:style>
-          <a:lnRef idx="1">
-            <a:schemeClr val="accent1"/>
-          </a:lnRef>
-          <a:fillRef idx="3">
-            <a:schemeClr val="accent1"/>
-          </a:fillRef>
-          <a:effectRef idx="2">
-            <a:schemeClr val="accent1"/>
-          </a:effectRef>
-          <a:fontRef idx="minor">
-            <a:schemeClr val="lt1"/>
-          </a:fontRef>
-        </p:style>
-        <p:txBody>
-          <a:bodyPr rtlCol="0" anchor="ctr"/>
-          <a:lstStyle/>
-          <a:p>
-            <a:pPr algn="ctr"/>
-          </a:p>
-        </p:txBody>
-      </p:sp>
-      <p:sp>
-        <p:nvSpPr>
-          <p:cNvPr id="33" name="TextBox 32"/>
-          <p:cNvSpPr txBox="1"/>
-          <p:nvPr/>
-        </p:nvSpPr>
-        <p:spPr>
-          <a:xfrm>
-            <a:off x="9555480" y="1161288"/>
-            <a:ext cx="2148840" cy="384048"/>
-          </a:xfrm>
-          <a:prstGeom prst="rect">
-            <a:avLst/>
-          </a:prstGeom>
-          <a:noFill/>
-        </p:spPr>
-        <p:txBody>
-          <a:bodyPr wrap="square">
-            <a:spAutoFit/>
-          </a:bodyPr>
-          <a:lstStyle/>
-          <a:p>
-            <a:pPr algn="ctr"/>
-            <a:r>
-              <a:rPr sz="2200" b="1" i="0">
-                <a:solidFill>
-                  <a:srgbClr val="FFFFFF"/>
-                </a:solidFill>
-                <a:latin typeface="Calibri"/>
-              </a:rPr>
-              <a:t>98.9%</a:t>
-            </a:r>
-          </a:p>
-        </p:txBody>
-      </p:sp>
-      <p:sp>
-        <p:nvSpPr>
-          <p:cNvPr id="34" name="TextBox 33"/>
-          <p:cNvSpPr txBox="1"/>
-          <p:nvPr/>
-        </p:nvSpPr>
-        <p:spPr>
-          <a:xfrm>
-            <a:off x="9555480" y="1536192"/>
-            <a:ext cx="2148840" cy="274320"/>
-          </a:xfrm>
-          <a:prstGeom prst="rect">
-            <a:avLst/>
-          </a:prstGeom>
-          <a:noFill/>
-        </p:spPr>
-        <p:txBody>
-          <a:bodyPr wrap="square">
-            <a:spAutoFit/>
-          </a:bodyPr>
-          <a:lstStyle/>
-          <a:p>
-            <a:pPr algn="ctr"/>
-            <a:r>
-              <a:rPr sz="900" b="0" i="0">
-                <a:solidFill>
-                  <a:srgbClr val="FFFFFF"/>
-                </a:solidFill>
-                <a:latin typeface="Calibri"/>
-              </a:rPr>
-              <a:t>RF Accuracy</a:t>
-            </a:r>
-          </a:p>
-        </p:txBody>
-      </p:sp>
-      <p:sp>
-        <p:nvSpPr>
-          <p:cNvPr id="35" name="Rectangle 34"/>
-          <p:cNvSpPr/>
-          <p:nvPr/>
-        </p:nvSpPr>
-        <p:spPr>
-          <a:xfrm>
-            <a:off x="2377440" y="2029968"/>
-            <a:ext cx="4846320" cy="2057400"/>
-          </a:xfrm>
-          <a:prstGeom prst="rect">
-            <a:avLst/>
-          </a:prstGeom>
-          <a:solidFill>
-            <a:srgbClr val="D9E8FF"/>
-          </a:solidFill>
-          <a:ln w="12700">
-            <a:solidFill>
-              <a:srgbClr val="1865D4"/>
-            </a:solidFill>
-          </a:ln>
-        </p:spPr>
-        <p:style>
-          <a:lnRef idx="1">
-            <a:schemeClr val="accent1"/>
-          </a:lnRef>
-          <a:fillRef idx="3">
-            <a:schemeClr val="accent1"/>
-          </a:fillRef>
-          <a:effectRef idx="2">
-            <a:schemeClr val="accent1"/>
-          </a:effectRef>
-          <a:fontRef idx="minor">
-            <a:schemeClr val="lt1"/>
-          </a:fontRef>
-        </p:style>
-        <p:txBody>
-          <a:bodyPr rtlCol="0" anchor="ctr"/>
-          <a:lstStyle/>
-          <a:p>
-            <a:pPr algn="ctr"/>
-          </a:p>
-        </p:txBody>
-      </p:sp>
-      <p:sp>
-        <p:nvSpPr>
-          <p:cNvPr id="36" name="TextBox 35"/>
-          <p:cNvSpPr txBox="1"/>
-          <p:nvPr/>
-        </p:nvSpPr>
-        <p:spPr>
-          <a:xfrm>
-            <a:off x="2423160" y="2084831"/>
-            <a:ext cx="4754880" cy="274320"/>
-          </a:xfrm>
-          <a:prstGeom prst="rect">
-            <a:avLst/>
-          </a:prstGeom>
-          <a:noFill/>
-        </p:spPr>
-        <p:txBody>
-          <a:bodyPr wrap="square">
-            <a:spAutoFit/>
-          </a:bodyPr>
-          <a:lstStyle/>
-          <a:p>
-            <a:pPr algn="l"/>
-            <a:r>
-              <a:rPr sz="1000" b="1" i="0">
-                <a:solidFill>
-                  <a:srgbClr val="1865D4"/>
-                </a:solidFill>
-                <a:latin typeface="Calibri"/>
-              </a:rPr>
-              <a:t>🗺  Google Maps — Farm Boundary View</a:t>
-            </a:r>
-          </a:p>
-        </p:txBody>
-      </p:sp>
-      <p:sp>
-        <p:nvSpPr>
-          <p:cNvPr id="37" name="Rectangle 36"/>
-          <p:cNvSpPr/>
-          <p:nvPr/>
-        </p:nvSpPr>
-        <p:spPr>
-          <a:xfrm>
-            <a:off x="2377440" y="2359152"/>
-            <a:ext cx="4846320" cy="18288"/>
-          </a:xfrm>
-          <a:prstGeom prst="rect">
-            <a:avLst/>
-          </a:prstGeom>
-          <a:solidFill>
-            <a:srgbClr val="C0D8FF"/>
-          </a:solidFill>
-          <a:ln>
-            <a:noFill/>
-          </a:ln>
-        </p:spPr>
-        <p:style>
-          <a:lnRef idx="1">
-            <a:schemeClr val="accent1"/>
-          </a:lnRef>
-          <a:fillRef idx="3">
-            <a:schemeClr val="accent1"/>
-          </a:fillRef>
-          <a:effectRef idx="2">
-            <a:schemeClr val="accent1"/>
-          </a:effectRef>
-          <a:fontRef idx="minor">
-            <a:schemeClr val="lt1"/>
-          </a:fontRef>
-        </p:style>
-        <p:txBody>
-          <a:bodyPr rtlCol="0" anchor="ctr"/>
-          <a:lstStyle/>
-          <a:p>
-            <a:pPr algn="ctr"/>
-          </a:p>
-        </p:txBody>
-      </p:sp>
-      <p:sp>
-        <p:nvSpPr>
-          <p:cNvPr id="38" name="Rectangle 37"/>
-          <p:cNvSpPr/>
-          <p:nvPr/>
-        </p:nvSpPr>
-        <p:spPr>
-          <a:xfrm>
-            <a:off x="2377440" y="2788920"/>
-            <a:ext cx="4846320" cy="18288"/>
-          </a:xfrm>
-          <a:prstGeom prst="rect">
-            <a:avLst/>
-          </a:prstGeom>
-          <a:solidFill>
-            <a:srgbClr val="C0D8FF"/>
-          </a:solidFill>
-          <a:ln>
-            <a:noFill/>
-          </a:ln>
-        </p:spPr>
-        <p:style>
-          <a:lnRef idx="1">
-            <a:schemeClr val="accent1"/>
-          </a:lnRef>
-          <a:fillRef idx="3">
-            <a:schemeClr val="accent1"/>
-          </a:fillRef>
-          <a:effectRef idx="2">
-            <a:schemeClr val="accent1"/>
-          </a:effectRef>
-          <a:fontRef idx="minor">
-            <a:schemeClr val="lt1"/>
-          </a:fontRef>
-        </p:style>
-        <p:txBody>
-          <a:bodyPr rtlCol="0" anchor="ctr"/>
-          <a:lstStyle/>
-          <a:p>
-            <a:pPr algn="ctr"/>
-          </a:p>
-        </p:txBody>
-      </p:sp>
-      <p:sp>
-        <p:nvSpPr>
-          <p:cNvPr id="39" name="Rectangle 38"/>
-          <p:cNvSpPr/>
-          <p:nvPr/>
-        </p:nvSpPr>
-        <p:spPr>
-          <a:xfrm>
-            <a:off x="2377440" y="3218688"/>
-            <a:ext cx="4846320" cy="18288"/>
-          </a:xfrm>
-          <a:prstGeom prst="rect">
-            <a:avLst/>
-          </a:prstGeom>
-          <a:solidFill>
-            <a:srgbClr val="C0D8FF"/>
-          </a:solidFill>
-          <a:ln>
-            <a:noFill/>
-          </a:ln>
-        </p:spPr>
-        <p:style>
-          <a:lnRef idx="1">
-            <a:schemeClr val="accent1"/>
-          </a:lnRef>
-          <a:fillRef idx="3">
-            <a:schemeClr val="accent1"/>
-          </a:fillRef>
-          <a:effectRef idx="2">
-            <a:schemeClr val="accent1"/>
-          </a:effectRef>
-          <a:fontRef idx="minor">
-            <a:schemeClr val="lt1"/>
-          </a:fontRef>
-        </p:style>
-        <p:txBody>
-          <a:bodyPr rtlCol="0" anchor="ctr"/>
-          <a:lstStyle/>
-          <a:p>
-            <a:pPr algn="ctr"/>
-          </a:p>
-        </p:txBody>
-      </p:sp>
-      <p:sp>
-        <p:nvSpPr>
-          <p:cNvPr id="40" name="Rectangle 39"/>
-          <p:cNvSpPr/>
-          <p:nvPr/>
-        </p:nvSpPr>
-        <p:spPr>
-          <a:xfrm>
-            <a:off x="2377440" y="3648456"/>
-            <a:ext cx="4846320" cy="18288"/>
-          </a:xfrm>
-          <a:prstGeom prst="rect">
-            <a:avLst/>
-          </a:prstGeom>
-          <a:solidFill>
-            <a:srgbClr val="C0D8FF"/>
-          </a:solidFill>
-          <a:ln>
-            <a:noFill/>
-          </a:ln>
-        </p:spPr>
-        <p:style>
-          <a:lnRef idx="1">
-            <a:schemeClr val="accent1"/>
-          </a:lnRef>
-          <a:fillRef idx="3">
-            <a:schemeClr val="accent1"/>
-          </a:fillRef>
-          <a:effectRef idx="2">
-            <a:schemeClr val="accent1"/>
-          </a:effectRef>
-          <a:fontRef idx="minor">
-            <a:schemeClr val="lt1"/>
-          </a:fontRef>
-        </p:style>
-        <p:txBody>
-          <a:bodyPr rtlCol="0" anchor="ctr"/>
-          <a:lstStyle/>
-          <a:p>
-            <a:pPr algn="ctr"/>
-          </a:p>
-        </p:txBody>
-      </p:sp>
-      <p:sp>
-        <p:nvSpPr>
-          <p:cNvPr id="41" name="Rectangle 40"/>
-          <p:cNvSpPr/>
-          <p:nvPr/>
-        </p:nvSpPr>
-        <p:spPr>
-          <a:xfrm>
-            <a:off x="2377440" y="2359152"/>
-            <a:ext cx="18288" cy="1719072"/>
-          </a:xfrm>
-          <a:prstGeom prst="rect">
-            <a:avLst/>
-          </a:prstGeom>
-          <a:solidFill>
-            <a:srgbClr val="C0D8FF"/>
-          </a:solidFill>
-          <a:ln>
-            <a:noFill/>
-          </a:ln>
-        </p:spPr>
-        <p:style>
-          <a:lnRef idx="1">
-            <a:schemeClr val="accent1"/>
-          </a:lnRef>
-          <a:fillRef idx="3">
-            <a:schemeClr val="accent1"/>
-          </a:fillRef>
-          <a:effectRef idx="2">
-            <a:schemeClr val="accent1"/>
-          </a:effectRef>
-          <a:fontRef idx="minor">
-            <a:schemeClr val="lt1"/>
-          </a:fontRef>
-        </p:style>
-        <p:txBody>
-          <a:bodyPr rtlCol="0" anchor="ctr"/>
-          <a:lstStyle/>
-          <a:p>
-            <a:pPr algn="ctr"/>
-          </a:p>
-        </p:txBody>
-      </p:sp>
-      <p:sp>
-        <p:nvSpPr>
-          <p:cNvPr id="42" name="Rectangle 41"/>
-          <p:cNvSpPr/>
-          <p:nvPr/>
-        </p:nvSpPr>
-        <p:spPr>
-          <a:xfrm>
-            <a:off x="3182112" y="2359152"/>
-            <a:ext cx="18288" cy="1719072"/>
-          </a:xfrm>
-          <a:prstGeom prst="rect">
-            <a:avLst/>
-          </a:prstGeom>
-          <a:solidFill>
-            <a:srgbClr val="C0D8FF"/>
-          </a:solidFill>
-          <a:ln>
-            <a:noFill/>
-          </a:ln>
-        </p:spPr>
-        <p:style>
-          <a:lnRef idx="1">
-            <a:schemeClr val="accent1"/>
-          </a:lnRef>
-          <a:fillRef idx="3">
-            <a:schemeClr val="accent1"/>
-          </a:fillRef>
-          <a:effectRef idx="2">
-            <a:schemeClr val="accent1"/>
-          </a:effectRef>
-          <a:fontRef idx="minor">
-            <a:schemeClr val="lt1"/>
-          </a:fontRef>
-        </p:style>
-        <p:txBody>
-          <a:bodyPr rtlCol="0" anchor="ctr"/>
-          <a:lstStyle/>
-          <a:p>
-            <a:pPr algn="ctr"/>
-          </a:p>
-        </p:txBody>
-      </p:sp>
-      <p:sp>
-        <p:nvSpPr>
-          <p:cNvPr id="43" name="Rectangle 42"/>
-          <p:cNvSpPr/>
-          <p:nvPr/>
-        </p:nvSpPr>
-        <p:spPr>
-          <a:xfrm>
-            <a:off x="3986784" y="2359152"/>
-            <a:ext cx="18288" cy="1719072"/>
-          </a:xfrm>
-          <a:prstGeom prst="rect">
-            <a:avLst/>
-          </a:prstGeom>
-          <a:solidFill>
-            <a:srgbClr val="C0D8FF"/>
-          </a:solidFill>
-          <a:ln>
-            <a:noFill/>
-          </a:ln>
-        </p:spPr>
-        <p:style>
-          <a:lnRef idx="1">
-            <a:schemeClr val="accent1"/>
-          </a:lnRef>
-          <a:fillRef idx="3">
-            <a:schemeClr val="accent1"/>
-          </a:fillRef>
-          <a:effectRef idx="2">
-            <a:schemeClr val="accent1"/>
-          </a:effectRef>
-          <a:fontRef idx="minor">
-            <a:schemeClr val="lt1"/>
-          </a:fontRef>
-        </p:style>
-        <p:txBody>
-          <a:bodyPr rtlCol="0" anchor="ctr"/>
-          <a:lstStyle/>
-          <a:p>
-            <a:pPr algn="ctr"/>
-          </a:p>
-        </p:txBody>
-      </p:sp>
-      <p:sp>
-        <p:nvSpPr>
-          <p:cNvPr id="44" name="Rectangle 43"/>
-          <p:cNvSpPr/>
-          <p:nvPr/>
-        </p:nvSpPr>
-        <p:spPr>
-          <a:xfrm>
-            <a:off x="4791456" y="2359152"/>
-            <a:ext cx="18288" cy="1719072"/>
-          </a:xfrm>
-          <a:prstGeom prst="rect">
-            <a:avLst/>
-          </a:prstGeom>
-          <a:solidFill>
-            <a:srgbClr val="C0D8FF"/>
-          </a:solidFill>
-          <a:ln>
-            <a:noFill/>
-          </a:ln>
-        </p:spPr>
-        <p:style>
-          <a:lnRef idx="1">
-            <a:schemeClr val="accent1"/>
-          </a:lnRef>
-          <a:fillRef idx="3">
-            <a:schemeClr val="accent1"/>
-          </a:fillRef>
-          <a:effectRef idx="2">
-            <a:schemeClr val="accent1"/>
-          </a:effectRef>
-          <a:fontRef idx="minor">
-            <a:schemeClr val="lt1"/>
-          </a:fontRef>
-        </p:style>
-        <p:txBody>
-          <a:bodyPr rtlCol="0" anchor="ctr"/>
-          <a:lstStyle/>
-          <a:p>
-            <a:pPr algn="ctr"/>
-          </a:p>
-        </p:txBody>
-      </p:sp>
-      <p:sp>
-        <p:nvSpPr>
-          <p:cNvPr id="45" name="Rectangle 44"/>
-          <p:cNvSpPr/>
-          <p:nvPr/>
-        </p:nvSpPr>
-        <p:spPr>
-          <a:xfrm>
-            <a:off x="5596128" y="2359152"/>
-            <a:ext cx="18288" cy="1719072"/>
-          </a:xfrm>
-          <a:prstGeom prst="rect">
-            <a:avLst/>
-          </a:prstGeom>
-          <a:solidFill>
-            <a:srgbClr val="C0D8FF"/>
-          </a:solidFill>
-          <a:ln>
-            <a:noFill/>
-          </a:ln>
-        </p:spPr>
-        <p:style>
-          <a:lnRef idx="1">
-            <a:schemeClr val="accent1"/>
-          </a:lnRef>
-          <a:fillRef idx="3">
-            <a:schemeClr val="accent1"/>
-          </a:fillRef>
-          <a:effectRef idx="2">
-            <a:schemeClr val="accent1"/>
-          </a:effectRef>
-          <a:fontRef idx="minor">
-            <a:schemeClr val="lt1"/>
-          </a:fontRef>
-        </p:style>
-        <p:txBody>
-          <a:bodyPr rtlCol="0" anchor="ctr"/>
-          <a:lstStyle/>
-          <a:p>
-            <a:pPr algn="ctr"/>
-          </a:p>
-        </p:txBody>
-      </p:sp>
-      <p:sp>
-        <p:nvSpPr>
-          <p:cNvPr id="46" name="Rectangle 45"/>
-          <p:cNvSpPr/>
-          <p:nvPr/>
-        </p:nvSpPr>
-        <p:spPr>
-          <a:xfrm>
-            <a:off x="6400800" y="2359152"/>
-            <a:ext cx="18288" cy="1719072"/>
-          </a:xfrm>
-          <a:prstGeom prst="rect">
-            <a:avLst/>
-          </a:prstGeom>
-          <a:solidFill>
-            <a:srgbClr val="C0D8FF"/>
-          </a:solidFill>
-          <a:ln>
-            <a:noFill/>
-          </a:ln>
-        </p:spPr>
-        <p:style>
-          <a:lnRef idx="1">
-            <a:schemeClr val="accent1"/>
-          </a:lnRef>
-          <a:fillRef idx="3">
-            <a:schemeClr val="accent1"/>
-          </a:fillRef>
-          <a:effectRef idx="2">
-            <a:schemeClr val="accent1"/>
-          </a:effectRef>
-          <a:fontRef idx="minor">
-            <a:schemeClr val="lt1"/>
-          </a:fontRef>
-        </p:style>
-        <p:txBody>
-          <a:bodyPr rtlCol="0" anchor="ctr"/>
-          <a:lstStyle/>
-          <a:p>
-            <a:pPr algn="ctr"/>
-          </a:p>
-        </p:txBody>
-      </p:sp>
-      <p:sp>
-        <p:nvSpPr>
-          <p:cNvPr id="47" name="Rectangle 46"/>
-          <p:cNvSpPr/>
-          <p:nvPr/>
-        </p:nvSpPr>
-        <p:spPr>
-          <a:xfrm>
-            <a:off x="2926080" y="2514600"/>
-            <a:ext cx="1828800" cy="1005840"/>
-          </a:xfrm>
-          <a:prstGeom prst="rect">
-            <a:avLst/>
-          </a:prstGeom>
-          <a:solidFill>
-            <a:srgbClr val="4CAF50"/>
-          </a:solidFill>
-          <a:ln>
-            <a:noFill/>
-          </a:ln>
-        </p:spPr>
-        <p:style>
-          <a:lnRef idx="1">
-            <a:schemeClr val="accent1"/>
-          </a:lnRef>
-          <a:fillRef idx="3">
-            <a:schemeClr val="accent1"/>
-          </a:fillRef>
-          <a:effectRef idx="2">
-            <a:schemeClr val="accent1"/>
-          </a:effectRef>
-          <a:fontRef idx="minor">
-            <a:schemeClr val="lt1"/>
-          </a:fontRef>
-        </p:style>
-        <p:txBody>
-          <a:bodyPr rtlCol="0" anchor="ctr"/>
-          <a:lstStyle/>
-          <a:p>
-            <a:pPr algn="ctr"/>
-          </a:p>
-        </p:txBody>
-      </p:sp>
-      <p:sp>
-        <p:nvSpPr>
-          <p:cNvPr id="48" name="TextBox 47"/>
-          <p:cNvSpPr txBox="1"/>
-          <p:nvPr/>
-        </p:nvSpPr>
-        <p:spPr>
-          <a:xfrm>
-            <a:off x="2926080" y="2834640"/>
-            <a:ext cx="1828800" cy="365760"/>
-          </a:xfrm>
-          <a:prstGeom prst="rect">
-            <a:avLst/>
-          </a:prstGeom>
-          <a:noFill/>
-        </p:spPr>
-        <p:txBody>
-          <a:bodyPr wrap="square">
-            <a:spAutoFit/>
-          </a:bodyPr>
-          <a:lstStyle/>
-          <a:p>
-            <a:pPr algn="ctr"/>
-            <a:r>
-              <a:rPr sz="900" b="1" i="0">
-                <a:solidFill>
-                  <a:srgbClr val="FFFFFF"/>
-                </a:solidFill>
-                <a:latin typeface="Calibri"/>
-              </a:rPr>
-              <a:t>Farm Boundary
-2.0 ha</a:t>
-            </a:r>
-          </a:p>
-        </p:txBody>
-      </p:sp>
-      <p:sp>
-        <p:nvSpPr>
-          <p:cNvPr id="49" name="Rectangle 48"/>
-          <p:cNvSpPr/>
-          <p:nvPr/>
-        </p:nvSpPr>
-        <p:spPr>
-          <a:xfrm>
-            <a:off x="3063240" y="2578608"/>
-            <a:ext cx="201168" cy="201168"/>
-          </a:xfrm>
-          <a:prstGeom prst="rect">
-            <a:avLst/>
-          </a:prstGeom>
-          <a:solidFill>
-            <a:srgbClr val="E65C00"/>
-          </a:solidFill>
-          <a:ln>
-            <a:noFill/>
-          </a:ln>
-        </p:spPr>
-        <p:style>
-          <a:lnRef idx="1">
-            <a:schemeClr val="accent1"/>
-          </a:lnRef>
-          <a:fillRef idx="3">
-            <a:schemeClr val="accent1"/>
-          </a:fillRef>
-          <a:effectRef idx="2">
-            <a:schemeClr val="accent1"/>
-          </a:effectRef>
-          <a:fontRef idx="minor">
-            <a:schemeClr val="lt1"/>
-          </a:fontRef>
-        </p:style>
-        <p:txBody>
-          <a:bodyPr rtlCol="0" anchor="ctr"/>
-          <a:lstStyle/>
-          <a:p>
-            <a:pPr algn="ctr"/>
-          </a:p>
-        </p:txBody>
-      </p:sp>
-      <p:sp>
-        <p:nvSpPr>
-          <p:cNvPr id="50" name="TextBox 49"/>
-          <p:cNvSpPr txBox="1"/>
-          <p:nvPr/>
-        </p:nvSpPr>
-        <p:spPr>
-          <a:xfrm>
-            <a:off x="3063240" y="2578608"/>
-            <a:ext cx="201168" cy="201168"/>
-          </a:xfrm>
-          <a:prstGeom prst="rect">
-            <a:avLst/>
-          </a:prstGeom>
-          <a:noFill/>
-        </p:spPr>
-        <p:txBody>
-          <a:bodyPr wrap="square">
-            <a:spAutoFit/>
-          </a:bodyPr>
-          <a:lstStyle/>
-          <a:p>
-            <a:pPr algn="ctr"/>
-            <a:r>
-              <a:rPr sz="800" b="0" i="0">
-                <a:solidFill>
-                  <a:srgbClr val="181D17"/>
-                </a:solidFill>
-                <a:latin typeface="Calibri"/>
-              </a:rPr>
-              <a:t>📡</a:t>
-            </a:r>
-          </a:p>
-        </p:txBody>
-      </p:sp>
-      <p:sp>
-        <p:nvSpPr>
-          <p:cNvPr id="51" name="Rectangle 50"/>
-          <p:cNvSpPr/>
-          <p:nvPr/>
-        </p:nvSpPr>
-        <p:spPr>
-          <a:xfrm>
-            <a:off x="3657600" y="2743200"/>
-            <a:ext cx="201168" cy="201168"/>
-          </a:xfrm>
-          <a:prstGeom prst="rect">
-            <a:avLst/>
-          </a:prstGeom>
-          <a:solidFill>
-            <a:srgbClr val="E65C00"/>
-          </a:solidFill>
-          <a:ln>
-            <a:noFill/>
-          </a:ln>
-        </p:spPr>
-        <p:style>
-          <a:lnRef idx="1">
-            <a:schemeClr val="accent1"/>
-          </a:lnRef>
-          <a:fillRef idx="3">
-            <a:schemeClr val="accent1"/>
-          </a:fillRef>
-          <a:effectRef idx="2">
-            <a:schemeClr val="accent1"/>
-          </a:effectRef>
-          <a:fontRef idx="minor">
-            <a:schemeClr val="lt1"/>
-          </a:fontRef>
-        </p:style>
-        <p:txBody>
-          <a:bodyPr rtlCol="0" anchor="ctr"/>
-          <a:lstStyle/>
-          <a:p>
-            <a:pPr algn="ctr"/>
-          </a:p>
-        </p:txBody>
-      </p:sp>
-      <p:sp>
-        <p:nvSpPr>
-          <p:cNvPr id="52" name="TextBox 51"/>
-          <p:cNvSpPr txBox="1"/>
-          <p:nvPr/>
-        </p:nvSpPr>
-        <p:spPr>
-          <a:xfrm>
-            <a:off x="3657600" y="2743200"/>
-            <a:ext cx="201168" cy="201168"/>
-          </a:xfrm>
-          <a:prstGeom prst="rect">
-            <a:avLst/>
-          </a:prstGeom>
-          <a:noFill/>
-        </p:spPr>
-        <p:txBody>
-          <a:bodyPr wrap="square">
-            <a:spAutoFit/>
-          </a:bodyPr>
-          <a:lstStyle/>
-          <a:p>
-            <a:pPr algn="ctr"/>
-            <a:r>
-              <a:rPr sz="800" b="0" i="0">
-                <a:solidFill>
-                  <a:srgbClr val="181D17"/>
-                </a:solidFill>
-                <a:latin typeface="Calibri"/>
-              </a:rPr>
-              <a:t>📡</a:t>
-            </a:r>
-          </a:p>
-        </p:txBody>
-      </p:sp>
-      <p:sp>
-        <p:nvSpPr>
-          <p:cNvPr id="53" name="Rectangle 52"/>
-          <p:cNvSpPr/>
-          <p:nvPr/>
-        </p:nvSpPr>
-        <p:spPr>
-          <a:xfrm>
-            <a:off x="3337560" y="3063240"/>
-            <a:ext cx="201168" cy="201168"/>
-          </a:xfrm>
-          <a:prstGeom prst="rect">
-            <a:avLst/>
-          </a:prstGeom>
-          <a:solidFill>
-            <a:srgbClr val="E65C00"/>
-          </a:solidFill>
-          <a:ln>
-            <a:noFill/>
-          </a:ln>
-        </p:spPr>
-        <p:style>
-          <a:lnRef idx="1">
-            <a:schemeClr val="accent1"/>
-          </a:lnRef>
-          <a:fillRef idx="3">
-            <a:schemeClr val="accent1"/>
-          </a:fillRef>
-          <a:effectRef idx="2">
-            <a:schemeClr val="accent1"/>
-          </a:effectRef>
-          <a:fontRef idx="minor">
-            <a:schemeClr val="lt1"/>
-          </a:fontRef>
-        </p:style>
-        <p:txBody>
-          <a:bodyPr rtlCol="0" anchor="ctr"/>
-          <a:lstStyle/>
-          <a:p>
-            <a:pPr algn="ctr"/>
-          </a:p>
-        </p:txBody>
-      </p:sp>
-      <p:sp>
-        <p:nvSpPr>
-          <p:cNvPr id="54" name="TextBox 53"/>
-          <p:cNvSpPr txBox="1"/>
-          <p:nvPr/>
-        </p:nvSpPr>
-        <p:spPr>
-          <a:xfrm>
-            <a:off x="3337560" y="3063240"/>
-            <a:ext cx="201168" cy="201168"/>
-          </a:xfrm>
-          <a:prstGeom prst="rect">
-            <a:avLst/>
-          </a:prstGeom>
-          <a:noFill/>
-        </p:spPr>
-        <p:txBody>
-          <a:bodyPr wrap="square">
-            <a:spAutoFit/>
-          </a:bodyPr>
-          <a:lstStyle/>
-          <a:p>
-            <a:pPr algn="ctr"/>
-            <a:r>
-              <a:rPr sz="800" b="0" i="0">
-                <a:solidFill>
-                  <a:srgbClr val="181D17"/>
-                </a:solidFill>
-                <a:latin typeface="Calibri"/>
-              </a:rPr>
-              <a:t>📡</a:t>
-            </a:r>
-          </a:p>
-        </p:txBody>
-      </p:sp>
-      <p:sp>
-        <p:nvSpPr>
-          <p:cNvPr id="55" name="Rectangle 54"/>
-          <p:cNvSpPr/>
-          <p:nvPr/>
-        </p:nvSpPr>
-        <p:spPr>
-          <a:xfrm>
-            <a:off x="7406640" y="2029968"/>
-            <a:ext cx="4343400" cy="2057400"/>
-          </a:xfrm>
-          <a:prstGeom prst="rect">
-            <a:avLst/>
-          </a:prstGeom>
-          <a:solidFill>
-            <a:srgbClr val="FFFFFF"/>
-          </a:solidFill>
-          <a:ln w="12700">
-            <a:solidFill>
-              <a:srgbClr val="E5EADF"/>
-            </a:solidFill>
-          </a:ln>
-        </p:spPr>
-        <p:style>
-          <a:lnRef idx="1">
-            <a:schemeClr val="accent1"/>
-          </a:lnRef>
-          <a:fillRef idx="3">
-            <a:schemeClr val="accent1"/>
-          </a:fillRef>
-          <a:effectRef idx="2">
-            <a:schemeClr val="accent1"/>
-          </a:effectRef>
-          <a:fontRef idx="minor">
-            <a:schemeClr val="lt1"/>
-          </a:fontRef>
-        </p:style>
-        <p:txBody>
-          <a:bodyPr rtlCol="0" anchor="ctr"/>
-          <a:lstStyle/>
-          <a:p>
-            <a:pPr algn="ctr"/>
-          </a:p>
-        </p:txBody>
-      </p:sp>
-      <p:sp>
-        <p:nvSpPr>
-          <p:cNvPr id="56" name="TextBox 55"/>
-          <p:cNvSpPr txBox="1"/>
-          <p:nvPr/>
-        </p:nvSpPr>
-        <p:spPr>
-          <a:xfrm>
-            <a:off x="7516368" y="2084831"/>
-            <a:ext cx="4114800" cy="274320"/>
-          </a:xfrm>
-          <a:prstGeom prst="rect">
-            <a:avLst/>
-          </a:prstGeom>
-          <a:noFill/>
-        </p:spPr>
-        <p:txBody>
-          <a:bodyPr wrap="square">
-            <a:spAutoFit/>
-          </a:bodyPr>
-          <a:lstStyle/>
-          <a:p>
-            <a:pPr algn="l"/>
-            <a:r>
-              <a:rPr sz="1000" b="1" i="0">
-                <a:solidFill>
-                  <a:srgbClr val="E65C00"/>
-                </a:solidFill>
-                <a:latin typeface="Calibri"/>
-              </a:rPr>
-              <a:t>📡  Live IoT Sensor Readings — Bukid ni Juan</a:t>
-            </a:r>
-          </a:p>
-        </p:txBody>
-      </p:sp>
-      <p:sp>
-        <p:nvSpPr>
-          <p:cNvPr id="57" name="TextBox 56"/>
-          <p:cNvSpPr txBox="1"/>
-          <p:nvPr/>
-        </p:nvSpPr>
-        <p:spPr>
-          <a:xfrm>
-            <a:off x="7516368" y="2423160"/>
-            <a:ext cx="1371600" cy="274320"/>
-          </a:xfrm>
-          <a:prstGeom prst="rect">
-            <a:avLst/>
-          </a:prstGeom>
-          <a:noFill/>
-        </p:spPr>
-        <p:txBody>
-          <a:bodyPr wrap="square">
-            <a:spAutoFit/>
-          </a:bodyPr>
-          <a:lstStyle/>
-          <a:p>
-            <a:pPr algn="l"/>
-            <a:r>
-              <a:rPr sz="950" b="0" i="0">
-                <a:solidFill>
-                  <a:srgbClr val="40493D"/>
-                </a:solidFill>
-                <a:latin typeface="Calibri"/>
-              </a:rPr>
-              <a:t>Nitrogen (N):</a:t>
-            </a:r>
-          </a:p>
-        </p:txBody>
-      </p:sp>
-      <p:sp>
-        <p:nvSpPr>
-          <p:cNvPr id="58" name="TextBox 57"/>
-          <p:cNvSpPr txBox="1"/>
-          <p:nvPr/>
-        </p:nvSpPr>
-        <p:spPr>
-          <a:xfrm>
-            <a:off x="8842248" y="2423160"/>
-            <a:ext cx="731520" cy="274320"/>
-          </a:xfrm>
-          <a:prstGeom prst="rect">
-            <a:avLst/>
-          </a:prstGeom>
-          <a:noFill/>
-        </p:spPr>
-        <p:txBody>
-          <a:bodyPr wrap="square">
-            <a:spAutoFit/>
-          </a:bodyPr>
-          <a:lstStyle/>
-          <a:p>
-            <a:pPr algn="l"/>
-            <a:r>
-              <a:rPr sz="950" b="1" i="0">
-                <a:solidFill>
-                  <a:srgbClr val="0D631B"/>
-                </a:solidFill>
-                <a:latin typeface="Calibri"/>
-              </a:rPr>
-              <a:t>120 ppm</a:t>
-            </a:r>
-          </a:p>
-        </p:txBody>
-      </p:sp>
-      <p:sp>
-        <p:nvSpPr>
-          <p:cNvPr id="59" name="TextBox 58"/>
-          <p:cNvSpPr txBox="1"/>
-          <p:nvPr/>
-        </p:nvSpPr>
-        <p:spPr>
-          <a:xfrm>
-            <a:off x="9619488" y="2423160"/>
-            <a:ext cx="1371600" cy="274320"/>
-          </a:xfrm>
-          <a:prstGeom prst="rect">
-            <a:avLst/>
-          </a:prstGeom>
-          <a:noFill/>
-        </p:spPr>
-        <p:txBody>
-          <a:bodyPr wrap="square">
-            <a:spAutoFit/>
-          </a:bodyPr>
-          <a:lstStyle/>
-          <a:p>
-            <a:pPr algn="l"/>
-            <a:r>
-              <a:rPr sz="950" b="0" i="0">
-                <a:solidFill>
-                  <a:srgbClr val="40493D"/>
-                </a:solidFill>
-                <a:latin typeface="Calibri"/>
-              </a:rPr>
-              <a:t>Phosphorus (P):</a:t>
-            </a:r>
-          </a:p>
-        </p:txBody>
-      </p:sp>
-      <p:sp>
-        <p:nvSpPr>
-          <p:cNvPr id="60" name="TextBox 59"/>
-          <p:cNvSpPr txBox="1"/>
-          <p:nvPr/>
-        </p:nvSpPr>
-        <p:spPr>
-          <a:xfrm>
-            <a:off x="10945368" y="2423160"/>
-            <a:ext cx="731520" cy="274320"/>
-          </a:xfrm>
-          <a:prstGeom prst="rect">
-            <a:avLst/>
-          </a:prstGeom>
-          <a:noFill/>
-        </p:spPr>
-        <p:txBody>
-          <a:bodyPr wrap="square">
-            <a:spAutoFit/>
-          </a:bodyPr>
-          <a:lstStyle/>
-          <a:p>
-            <a:pPr algn="l"/>
-            <a:r>
-              <a:rPr sz="950" b="1" i="0">
-                <a:solidFill>
-                  <a:srgbClr val="2E7D32"/>
-                </a:solidFill>
-                <a:latin typeface="Calibri"/>
-              </a:rPr>
-              <a:t>45 ppm</a:t>
-            </a:r>
-          </a:p>
-        </p:txBody>
-      </p:sp>
-      <p:sp>
-        <p:nvSpPr>
-          <p:cNvPr id="61" name="TextBox 60"/>
-          <p:cNvSpPr txBox="1"/>
-          <p:nvPr/>
-        </p:nvSpPr>
-        <p:spPr>
-          <a:xfrm>
-            <a:off x="7516368" y="2770632"/>
-            <a:ext cx="1371600" cy="274320"/>
-          </a:xfrm>
-          <a:prstGeom prst="rect">
-            <a:avLst/>
-          </a:prstGeom>
-          <a:noFill/>
-        </p:spPr>
-        <p:txBody>
-          <a:bodyPr wrap="square">
-            <a:spAutoFit/>
-          </a:bodyPr>
-          <a:lstStyle/>
-          <a:p>
-            <a:pPr algn="l"/>
-            <a:r>
-              <a:rPr sz="950" b="0" i="0">
-                <a:solidFill>
-                  <a:srgbClr val="40493D"/>
-                </a:solidFill>
-                <a:latin typeface="Calibri"/>
-              </a:rPr>
-              <a:t>Potassium (K):</a:t>
-            </a:r>
-          </a:p>
-        </p:txBody>
-      </p:sp>
-      <p:sp>
-        <p:nvSpPr>
-          <p:cNvPr id="62" name="TextBox 61"/>
-          <p:cNvSpPr txBox="1"/>
-          <p:nvPr/>
-        </p:nvSpPr>
-        <p:spPr>
-          <a:xfrm>
-            <a:off x="8842248" y="2770632"/>
-            <a:ext cx="731520" cy="274320"/>
-          </a:xfrm>
-          <a:prstGeom prst="rect">
-            <a:avLst/>
-          </a:prstGeom>
-          <a:noFill/>
-        </p:spPr>
-        <p:txBody>
-          <a:bodyPr wrap="square">
-            <a:spAutoFit/>
-          </a:bodyPr>
-          <a:lstStyle/>
-          <a:p>
-            <a:pPr algn="l"/>
-            <a:r>
-              <a:rPr sz="950" b="1" i="0">
-                <a:solidFill>
-                  <a:srgbClr val="2E7D32"/>
-                </a:solidFill>
-                <a:latin typeface="Calibri"/>
-              </a:rPr>
-              <a:t>38 ppm</a:t>
-            </a:r>
-          </a:p>
-        </p:txBody>
-      </p:sp>
-      <p:sp>
-        <p:nvSpPr>
-          <p:cNvPr id="63" name="TextBox 62"/>
-          <p:cNvSpPr txBox="1"/>
-          <p:nvPr/>
-        </p:nvSpPr>
-        <p:spPr>
-          <a:xfrm>
-            <a:off x="9619488" y="2770632"/>
-            <a:ext cx="1371600" cy="274320"/>
-          </a:xfrm>
-          <a:prstGeom prst="rect">
-            <a:avLst/>
-          </a:prstGeom>
-          <a:noFill/>
-        </p:spPr>
-        <p:txBody>
-          <a:bodyPr wrap="square">
-            <a:spAutoFit/>
-          </a:bodyPr>
-          <a:lstStyle/>
-          <a:p>
-            <a:pPr algn="l"/>
-            <a:r>
-              <a:rPr sz="950" b="0" i="0">
-                <a:solidFill>
-                  <a:srgbClr val="40493D"/>
-                </a:solidFill>
-                <a:latin typeface="Calibri"/>
-              </a:rPr>
-              <a:t>Soil pH:</a:t>
-            </a:r>
-          </a:p>
-        </p:txBody>
-      </p:sp>
-      <p:sp>
-        <p:nvSpPr>
-          <p:cNvPr id="64" name="TextBox 63"/>
-          <p:cNvSpPr txBox="1"/>
-          <p:nvPr/>
-        </p:nvSpPr>
-        <p:spPr>
-          <a:xfrm>
-            <a:off x="10945368" y="2770632"/>
-            <a:ext cx="731520" cy="274320"/>
-          </a:xfrm>
-          <a:prstGeom prst="rect">
-            <a:avLst/>
-          </a:prstGeom>
-          <a:noFill/>
-        </p:spPr>
-        <p:txBody>
-          <a:bodyPr wrap="square">
-            <a:spAutoFit/>
-          </a:bodyPr>
-          <a:lstStyle/>
-          <a:p>
-            <a:pPr algn="l"/>
-            <a:r>
-              <a:rPr sz="950" b="1" i="0">
-                <a:solidFill>
-                  <a:srgbClr val="0D631B"/>
-                </a:solidFill>
-                <a:latin typeface="Calibri"/>
-              </a:rPr>
-              <a:t>6.5</a:t>
-            </a:r>
-          </a:p>
-        </p:txBody>
-      </p:sp>
-      <p:sp>
-        <p:nvSpPr>
-          <p:cNvPr id="65" name="TextBox 64"/>
-          <p:cNvSpPr txBox="1"/>
-          <p:nvPr/>
-        </p:nvSpPr>
-        <p:spPr>
-          <a:xfrm>
-            <a:off x="7516368" y="3118104"/>
-            <a:ext cx="1371600" cy="274320"/>
-          </a:xfrm>
-          <a:prstGeom prst="rect">
-            <a:avLst/>
-          </a:prstGeom>
-          <a:noFill/>
-        </p:spPr>
-        <p:txBody>
-          <a:bodyPr wrap="square">
-            <a:spAutoFit/>
-          </a:bodyPr>
-          <a:lstStyle/>
-          <a:p>
-            <a:pPr algn="l"/>
-            <a:r>
-              <a:rPr sz="950" b="0" i="0">
-                <a:solidFill>
-                  <a:srgbClr val="40493D"/>
-                </a:solidFill>
-                <a:latin typeface="Calibri"/>
-              </a:rPr>
-              <a:t>Temperature:</a:t>
-            </a:r>
-          </a:p>
-        </p:txBody>
-      </p:sp>
-      <p:sp>
-        <p:nvSpPr>
-          <p:cNvPr id="66" name="TextBox 65"/>
-          <p:cNvSpPr txBox="1"/>
-          <p:nvPr/>
-        </p:nvSpPr>
-        <p:spPr>
-          <a:xfrm>
-            <a:off x="8842248" y="3118104"/>
-            <a:ext cx="731520" cy="274320"/>
-          </a:xfrm>
-          <a:prstGeom prst="rect">
-            <a:avLst/>
-          </a:prstGeom>
-          <a:noFill/>
-        </p:spPr>
-        <p:txBody>
-          <a:bodyPr wrap="square">
-            <a:spAutoFit/>
-          </a:bodyPr>
-          <a:lstStyle/>
-          <a:p>
-            <a:pPr algn="l"/>
-            <a:r>
-              <a:rPr sz="950" b="1" i="0">
-                <a:solidFill>
-                  <a:srgbClr val="E65C00"/>
-                </a:solidFill>
-                <a:latin typeface="Calibri"/>
-              </a:rPr>
-              <a:t>25°C</a:t>
-            </a:r>
-          </a:p>
-        </p:txBody>
-      </p:sp>
-      <p:sp>
-        <p:nvSpPr>
-          <p:cNvPr id="67" name="TextBox 66"/>
-          <p:cNvSpPr txBox="1"/>
-          <p:nvPr/>
-        </p:nvSpPr>
-        <p:spPr>
-          <a:xfrm>
-            <a:off x="9619488" y="3118104"/>
-            <a:ext cx="1371600" cy="274320"/>
-          </a:xfrm>
-          <a:prstGeom prst="rect">
-            <a:avLst/>
-          </a:prstGeom>
-          <a:noFill/>
-        </p:spPr>
-        <p:txBody>
-          <a:bodyPr wrap="square">
-            <a:spAutoFit/>
-          </a:bodyPr>
-          <a:lstStyle/>
-          <a:p>
-            <a:pPr algn="l"/>
-            <a:r>
-              <a:rPr sz="950" b="0" i="0">
-                <a:solidFill>
-                  <a:srgbClr val="40493D"/>
-                </a:solidFill>
-                <a:latin typeface="Calibri"/>
-              </a:rPr>
-              <a:t>Humidity:</a:t>
-            </a:r>
-          </a:p>
-        </p:txBody>
-      </p:sp>
-      <p:sp>
-        <p:nvSpPr>
-          <p:cNvPr id="68" name="TextBox 67"/>
-          <p:cNvSpPr txBox="1"/>
-          <p:nvPr/>
-        </p:nvSpPr>
-        <p:spPr>
-          <a:xfrm>
-            <a:off x="10945368" y="3118104"/>
-            <a:ext cx="731520" cy="274320"/>
-          </a:xfrm>
-          <a:prstGeom prst="rect">
-            <a:avLst/>
-          </a:prstGeom>
-          <a:noFill/>
-        </p:spPr>
-        <p:txBody>
-          <a:bodyPr wrap="square">
-            <a:spAutoFit/>
-          </a:bodyPr>
-          <a:lstStyle/>
-          <a:p>
-            <a:pPr algn="l"/>
-            <a:r>
-              <a:rPr sz="950" b="1" i="0">
-                <a:solidFill>
-                  <a:srgbClr val="1865D4"/>
-                </a:solidFill>
-                <a:latin typeface="Calibri"/>
-              </a:rPr>
-              <a:t>80%</a:t>
-            </a:r>
-          </a:p>
-        </p:txBody>
-      </p:sp>
-      <p:sp>
-        <p:nvSpPr>
-          <p:cNvPr id="69" name="TextBox 68"/>
-          <p:cNvSpPr txBox="1"/>
-          <p:nvPr/>
-        </p:nvSpPr>
-        <p:spPr>
-          <a:xfrm>
-            <a:off x="7516368" y="3813048"/>
-            <a:ext cx="1371600" cy="274320"/>
-          </a:xfrm>
-          <a:prstGeom prst="rect">
-            <a:avLst/>
-          </a:prstGeom>
-          <a:noFill/>
-        </p:spPr>
-        <p:txBody>
-          <a:bodyPr wrap="square">
-            <a:spAutoFit/>
-          </a:bodyPr>
-          <a:lstStyle/>
-          <a:p>
-            <a:pPr algn="l"/>
-            <a:r>
-              <a:rPr sz="950" b="0" i="0">
-                <a:solidFill>
-                  <a:srgbClr val="40493D"/>
-                </a:solidFill>
-                <a:latin typeface="Calibri"/>
-              </a:rPr>
-              <a:t>Rainfall:</a:t>
-            </a:r>
-          </a:p>
-        </p:txBody>
-      </p:sp>
-      <p:sp>
-        <p:nvSpPr>
-          <p:cNvPr id="70" name="TextBox 69"/>
-          <p:cNvSpPr txBox="1"/>
-          <p:nvPr/>
-        </p:nvSpPr>
-        <p:spPr>
-          <a:xfrm>
-            <a:off x="8842248" y="3813048"/>
-            <a:ext cx="731520" cy="274320"/>
-          </a:xfrm>
-          <a:prstGeom prst="rect">
-            <a:avLst/>
-          </a:prstGeom>
-          <a:noFill/>
-        </p:spPr>
-        <p:txBody>
-          <a:bodyPr wrap="square">
-            <a:spAutoFit/>
-          </a:bodyPr>
-          <a:lstStyle/>
-          <a:p>
-            <a:pPr algn="l"/>
-            <a:r>
-              <a:rPr sz="950" b="1" i="0">
-                <a:solidFill>
-                  <a:srgbClr val="1865D4"/>
-                </a:solidFill>
-                <a:latin typeface="Calibri"/>
-              </a:rPr>
-              <a:t>200 mm</a:t>
-            </a:r>
-          </a:p>
-        </p:txBody>
-      </p:sp>
-      <p:sp>
-        <p:nvSpPr>
-          <p:cNvPr id="71" name="Rectangle 70"/>
-          <p:cNvSpPr/>
-          <p:nvPr/>
-        </p:nvSpPr>
-        <p:spPr>
-          <a:xfrm>
-            <a:off x="2377440" y="4206240"/>
-            <a:ext cx="9372600" cy="320040"/>
-          </a:xfrm>
-          <a:prstGeom prst="rect">
-            <a:avLst/>
-          </a:prstGeom>
-          <a:solidFill>
-            <a:srgbClr val="E5EADF"/>
-          </a:solidFill>
-          <a:ln>
-            <a:noFill/>
-          </a:ln>
-        </p:spPr>
-        <p:style>
-          <a:lnRef idx="1">
-            <a:schemeClr val="accent1"/>
-          </a:lnRef>
-          <a:fillRef idx="3">
-            <a:schemeClr val="accent1"/>
-          </a:fillRef>
-          <a:effectRef idx="2">
-            <a:schemeClr val="accent1"/>
-          </a:effectRef>
-          <a:fontRef idx="minor">
-            <a:schemeClr val="lt1"/>
-          </a:fontRef>
-        </p:style>
-        <p:txBody>
-          <a:bodyPr rtlCol="0" anchor="ctr"/>
-          <a:lstStyle/>
-          <a:p>
-            <a:pPr algn="ctr"/>
-          </a:p>
-        </p:txBody>
-      </p:sp>
-      <p:sp>
-        <p:nvSpPr>
-          <p:cNvPr id="72" name="TextBox 71"/>
-          <p:cNvSpPr txBox="1"/>
-          <p:nvPr/>
-        </p:nvSpPr>
-        <p:spPr>
-          <a:xfrm>
-            <a:off x="2468880" y="4233672"/>
-            <a:ext cx="1828800" cy="256032"/>
-          </a:xfrm>
-          <a:prstGeom prst="rect">
-            <a:avLst/>
-          </a:prstGeom>
-          <a:noFill/>
-        </p:spPr>
-        <p:txBody>
-          <a:bodyPr wrap="square">
-            <a:spAutoFit/>
-          </a:bodyPr>
-          <a:lstStyle/>
-          <a:p>
-            <a:pPr algn="l"/>
-            <a:r>
-              <a:rPr sz="900" b="1" i="0">
-                <a:solidFill>
-                  <a:srgbClr val="0D631B"/>
-                </a:solidFill>
-                <a:latin typeface="Calibri"/>
-              </a:rPr>
-              <a:t>Farm Name</a:t>
-            </a:r>
-          </a:p>
-        </p:txBody>
-      </p:sp>
-      <p:sp>
-        <p:nvSpPr>
-          <p:cNvPr id="73" name="TextBox 72"/>
-          <p:cNvSpPr txBox="1"/>
-          <p:nvPr/>
-        </p:nvSpPr>
-        <p:spPr>
-          <a:xfrm>
-            <a:off x="4297680" y="4233672"/>
-            <a:ext cx="1554480" cy="256032"/>
-          </a:xfrm>
-          <a:prstGeom prst="rect">
-            <a:avLst/>
-          </a:prstGeom>
-          <a:noFill/>
-        </p:spPr>
-        <p:txBody>
-          <a:bodyPr wrap="square">
-            <a:spAutoFit/>
-          </a:bodyPr>
-          <a:lstStyle/>
-          <a:p>
-            <a:pPr algn="l"/>
-            <a:r>
-              <a:rPr sz="900" b="1" i="0">
-                <a:solidFill>
-                  <a:srgbClr val="0D631B"/>
-                </a:solidFill>
-                <a:latin typeface="Calibri"/>
-              </a:rPr>
-              <a:t>Owner</a:t>
-            </a:r>
-          </a:p>
-        </p:txBody>
-      </p:sp>
-      <p:sp>
-        <p:nvSpPr>
-          <p:cNvPr id="74" name="TextBox 73"/>
-          <p:cNvSpPr txBox="1"/>
-          <p:nvPr/>
-        </p:nvSpPr>
-        <p:spPr>
-          <a:xfrm>
-            <a:off x="5852160" y="4233672"/>
-            <a:ext cx="731520" cy="256032"/>
-          </a:xfrm>
-          <a:prstGeom prst="rect">
-            <a:avLst/>
-          </a:prstGeom>
-          <a:noFill/>
-        </p:spPr>
-        <p:txBody>
-          <a:bodyPr wrap="square">
-            <a:spAutoFit/>
-          </a:bodyPr>
-          <a:lstStyle/>
-          <a:p>
-            <a:pPr algn="l"/>
-            <a:r>
-              <a:rPr sz="900" b="1" i="0">
-                <a:solidFill>
-                  <a:srgbClr val="0D631B"/>
-                </a:solidFill>
-                <a:latin typeface="Calibri"/>
-              </a:rPr>
-              <a:t>Area</a:t>
-            </a:r>
-          </a:p>
-        </p:txBody>
-      </p:sp>
-      <p:sp>
-        <p:nvSpPr>
-          <p:cNvPr id="75" name="TextBox 74"/>
-          <p:cNvSpPr txBox="1"/>
-          <p:nvPr/>
-        </p:nvSpPr>
-        <p:spPr>
-          <a:xfrm>
-            <a:off x="6583680" y="4233672"/>
-            <a:ext cx="914400" cy="256032"/>
-          </a:xfrm>
-          <a:prstGeom prst="rect">
-            <a:avLst/>
-          </a:prstGeom>
-          <a:noFill/>
-        </p:spPr>
-        <p:txBody>
-          <a:bodyPr wrap="square">
-            <a:spAutoFit/>
-          </a:bodyPr>
-          <a:lstStyle/>
-          <a:p>
-            <a:pPr algn="l"/>
-            <a:r>
-              <a:rPr sz="900" b="1" i="0">
-                <a:solidFill>
-                  <a:srgbClr val="0D631B"/>
-                </a:solidFill>
-                <a:latin typeface="Calibri"/>
-              </a:rPr>
-              <a:t>IoT Sensors</a:t>
-            </a:r>
-          </a:p>
-        </p:txBody>
-      </p:sp>
-      <p:sp>
-        <p:nvSpPr>
-          <p:cNvPr id="76" name="TextBox 75"/>
-          <p:cNvSpPr txBox="1"/>
-          <p:nvPr/>
-        </p:nvSpPr>
-        <p:spPr>
-          <a:xfrm>
-            <a:off x="7498080" y="4233672"/>
-            <a:ext cx="2377440" cy="256032"/>
-          </a:xfrm>
-          <a:prstGeom prst="rect">
-            <a:avLst/>
-          </a:prstGeom>
-          <a:noFill/>
-        </p:spPr>
-        <p:txBody>
-          <a:bodyPr wrap="square">
-            <a:spAutoFit/>
-          </a:bodyPr>
-          <a:lstStyle/>
-          <a:p>
-            <a:pPr algn="l"/>
-            <a:r>
-              <a:rPr sz="900" b="1" i="0">
-                <a:solidFill>
-                  <a:srgbClr val="0D631B"/>
-                </a:solidFill>
-                <a:latin typeface="Calibri"/>
-              </a:rPr>
-              <a:t>Qwen Recommendation</a:t>
-            </a:r>
-          </a:p>
-        </p:txBody>
-      </p:sp>
-      <p:sp>
-        <p:nvSpPr>
-          <p:cNvPr id="77" name="TextBox 76"/>
-          <p:cNvSpPr txBox="1"/>
-          <p:nvPr/>
-        </p:nvSpPr>
-        <p:spPr>
-          <a:xfrm>
-            <a:off x="9875520" y="4233672"/>
-            <a:ext cx="1965960" cy="256032"/>
-          </a:xfrm>
-          <a:prstGeom prst="rect">
-            <a:avLst/>
-          </a:prstGeom>
-          <a:noFill/>
-        </p:spPr>
-        <p:txBody>
-          <a:bodyPr wrap="square">
-            <a:spAutoFit/>
-          </a:bodyPr>
-          <a:lstStyle/>
-          <a:p>
-            <a:pPr algn="l"/>
-            <a:r>
-              <a:rPr sz="900" b="1" i="0">
-                <a:solidFill>
-                  <a:srgbClr val="0D631B"/>
-                </a:solidFill>
-                <a:latin typeface="Calibri"/>
-              </a:rPr>
-              <a:t>Confidence</a:t>
-            </a:r>
-          </a:p>
-        </p:txBody>
-      </p:sp>
-      <p:sp>
-        <p:nvSpPr>
-          <p:cNvPr id="78" name="Rectangle 77"/>
-          <p:cNvSpPr/>
-          <p:nvPr/>
-        </p:nvSpPr>
-        <p:spPr>
-          <a:xfrm>
-            <a:off x="2377440" y="4544568"/>
-            <a:ext cx="9372600" cy="438912"/>
-          </a:xfrm>
-          <a:prstGeom prst="rect">
-            <a:avLst/>
-          </a:prstGeom>
-          <a:solidFill>
-            <a:srgbClr val="F7FBF0"/>
-          </a:solidFill>
-          <a:ln>
-            <a:noFill/>
-          </a:ln>
-        </p:spPr>
-        <p:style>
-          <a:lnRef idx="1">
-            <a:schemeClr val="accent1"/>
-          </a:lnRef>
-          <a:fillRef idx="3">
-            <a:schemeClr val="accent1"/>
-          </a:fillRef>
-          <a:effectRef idx="2">
-            <a:schemeClr val="accent1"/>
-          </a:effectRef>
-          <a:fontRef idx="minor">
-            <a:schemeClr val="lt1"/>
-          </a:fontRef>
-        </p:style>
-        <p:txBody>
-          <a:bodyPr rtlCol="0" anchor="ctr"/>
-          <a:lstStyle/>
-          <a:p>
-            <a:pPr algn="ctr"/>
-          </a:p>
-        </p:txBody>
-      </p:sp>
-      <p:sp>
-        <p:nvSpPr>
-          <p:cNvPr id="79" name="TextBox 78"/>
-          <p:cNvSpPr txBox="1"/>
-          <p:nvPr/>
-        </p:nvSpPr>
-        <p:spPr>
-          <a:xfrm>
-            <a:off x="2468880" y="4636008"/>
-            <a:ext cx="1828800" cy="274320"/>
-          </a:xfrm>
-          <a:prstGeom prst="rect">
-            <a:avLst/>
-          </a:prstGeom>
-          <a:noFill/>
-        </p:spPr>
-        <p:txBody>
-          <a:bodyPr wrap="square">
-            <a:spAutoFit/>
-          </a:bodyPr>
-          <a:lstStyle/>
-          <a:p>
-            <a:pPr algn="l"/>
-            <a:r>
-              <a:rPr sz="1000" b="0" i="0">
-                <a:solidFill>
-                  <a:srgbClr val="181D17"/>
-                </a:solidFill>
-                <a:latin typeface="Calibri"/>
-              </a:rPr>
-              <a:t>Bukid ni Juan</a:t>
-            </a:r>
-          </a:p>
-        </p:txBody>
-      </p:sp>
-      <p:sp>
-        <p:nvSpPr>
-          <p:cNvPr id="80" name="TextBox 79"/>
-          <p:cNvSpPr txBox="1"/>
-          <p:nvPr/>
-        </p:nvSpPr>
-        <p:spPr>
-          <a:xfrm>
-            <a:off x="4297680" y="4636008"/>
-            <a:ext cx="1554480" cy="274320"/>
-          </a:xfrm>
-          <a:prstGeom prst="rect">
-            <a:avLst/>
-          </a:prstGeom>
-          <a:noFill/>
-        </p:spPr>
-        <p:txBody>
-          <a:bodyPr wrap="square">
-            <a:spAutoFit/>
-          </a:bodyPr>
-          <a:lstStyle/>
-          <a:p>
-            <a:pPr algn="l"/>
-            <a:r>
-              <a:rPr sz="1000" b="0" i="0">
-                <a:solidFill>
-                  <a:srgbClr val="181D17"/>
-                </a:solidFill>
-                <a:latin typeface="Calibri"/>
-              </a:rPr>
-              <a:t>Juan dela Cruz</a:t>
-            </a:r>
-          </a:p>
-        </p:txBody>
-      </p:sp>
-      <p:sp>
-        <p:nvSpPr>
-          <p:cNvPr id="81" name="TextBox 80"/>
-          <p:cNvSpPr txBox="1"/>
-          <p:nvPr/>
-        </p:nvSpPr>
-        <p:spPr>
-          <a:xfrm>
-            <a:off x="5852160" y="4636008"/>
-            <a:ext cx="731520" cy="274320"/>
-          </a:xfrm>
-          <a:prstGeom prst="rect">
-            <a:avLst/>
-          </a:prstGeom>
-          <a:noFill/>
-        </p:spPr>
-        <p:txBody>
-          <a:bodyPr wrap="square">
-            <a:spAutoFit/>
-          </a:bodyPr>
-          <a:lstStyle/>
-          <a:p>
-            <a:pPr algn="l"/>
-            <a:r>
-              <a:rPr sz="1000" b="0" i="0">
-                <a:solidFill>
-                  <a:srgbClr val="181D17"/>
-                </a:solidFill>
-                <a:latin typeface="Calibri"/>
-              </a:rPr>
-              <a:t>2.0 ha</a:t>
-            </a:r>
-          </a:p>
-        </p:txBody>
-      </p:sp>
-      <p:sp>
-        <p:nvSpPr>
-          <p:cNvPr id="82" name="TextBox 81"/>
-          <p:cNvSpPr txBox="1"/>
-          <p:nvPr/>
-        </p:nvSpPr>
-        <p:spPr>
-          <a:xfrm>
-            <a:off x="6583680" y="4636008"/>
-            <a:ext cx="914400" cy="274320"/>
-          </a:xfrm>
-          <a:prstGeom prst="rect">
-            <a:avLst/>
-          </a:prstGeom>
-          <a:noFill/>
-        </p:spPr>
-        <p:txBody>
-          <a:bodyPr wrap="square">
-            <a:spAutoFit/>
-          </a:bodyPr>
-          <a:lstStyle/>
-          <a:p>
-            <a:pPr algn="l"/>
-            <a:r>
-              <a:rPr sz="1000" b="0" i="0">
-                <a:solidFill>
-                  <a:srgbClr val="181D17"/>
-                </a:solidFill>
-                <a:latin typeface="Calibri"/>
-              </a:rPr>
-              <a:t>10</a:t>
-            </a:r>
-          </a:p>
-        </p:txBody>
-      </p:sp>
-      <p:sp>
-        <p:nvSpPr>
-          <p:cNvPr id="83" name="TextBox 82"/>
-          <p:cNvSpPr txBox="1"/>
-          <p:nvPr/>
-        </p:nvSpPr>
-        <p:spPr>
-          <a:xfrm>
-            <a:off x="7498080" y="4636008"/>
-            <a:ext cx="2377440" cy="274320"/>
-          </a:xfrm>
-          <a:prstGeom prst="rect">
-            <a:avLst/>
-          </a:prstGeom>
-          <a:noFill/>
-        </p:spPr>
-        <p:txBody>
-          <a:bodyPr wrap="square">
-            <a:spAutoFit/>
-          </a:bodyPr>
-          <a:lstStyle/>
-          <a:p>
-            <a:pPr algn="l"/>
-            <a:r>
-              <a:rPr sz="1000" b="1" i="0">
-                <a:solidFill>
-                  <a:srgbClr val="0D631B"/>
-                </a:solidFill>
-                <a:latin typeface="Calibri"/>
-              </a:rPr>
-              <a:t>🌾  Rice (Palay)</a:t>
-            </a:r>
-          </a:p>
-        </p:txBody>
-      </p:sp>
-      <p:sp>
-        <p:nvSpPr>
-          <p:cNvPr id="84" name="TextBox 83"/>
-          <p:cNvSpPr txBox="1"/>
-          <p:nvPr/>
-        </p:nvSpPr>
-        <p:spPr>
-          <a:xfrm>
-            <a:off x="9875520" y="4636008"/>
-            <a:ext cx="1965960" cy="274320"/>
-          </a:xfrm>
-          <a:prstGeom prst="rect">
-            <a:avLst/>
-          </a:prstGeom>
-          <a:noFill/>
-        </p:spPr>
-        <p:txBody>
-          <a:bodyPr wrap="square">
-            <a:spAutoFit/>
-          </a:bodyPr>
-          <a:lstStyle/>
-          <a:p>
-            <a:pPr algn="l"/>
-            <a:r>
-              <a:rPr sz="1000" b="1" i="0">
-                <a:solidFill>
-                  <a:srgbClr val="2E7D32"/>
-                </a:solidFill>
-                <a:latin typeface="Calibri"/>
-              </a:rPr>
-              <a:t>94.3%</a:t>
-            </a:r>
-          </a:p>
-        </p:txBody>
-      </p:sp>
-      <p:sp>
-        <p:nvSpPr>
-          <p:cNvPr id="85" name="Rectangle 84"/>
-          <p:cNvSpPr/>
-          <p:nvPr/>
-        </p:nvSpPr>
-        <p:spPr>
-          <a:xfrm>
-            <a:off x="2377440" y="5001768"/>
-            <a:ext cx="9372600" cy="438912"/>
-          </a:xfrm>
-          <a:prstGeom prst="rect">
-            <a:avLst/>
-          </a:prstGeom>
-          <a:solidFill>
-            <a:srgbClr val="FFFFFF"/>
-          </a:solidFill>
-          <a:ln>
-            <a:noFill/>
-          </a:ln>
-        </p:spPr>
-        <p:style>
-          <a:lnRef idx="1">
-            <a:schemeClr val="accent1"/>
-          </a:lnRef>
-          <a:fillRef idx="3">
-            <a:schemeClr val="accent1"/>
-          </a:fillRef>
-          <a:effectRef idx="2">
-            <a:schemeClr val="accent1"/>
-          </a:effectRef>
-          <a:fontRef idx="minor">
-            <a:schemeClr val="lt1"/>
-          </a:fontRef>
-        </p:style>
-        <p:txBody>
-          <a:bodyPr rtlCol="0" anchor="ctr"/>
-          <a:lstStyle/>
-          <a:p>
-            <a:pPr algn="ctr"/>
-          </a:p>
-        </p:txBody>
-      </p:sp>
-      <p:sp>
-        <p:nvSpPr>
-          <p:cNvPr id="86" name="TextBox 85"/>
-          <p:cNvSpPr txBox="1"/>
-          <p:nvPr/>
-        </p:nvSpPr>
-        <p:spPr>
-          <a:xfrm>
-            <a:off x="2468880" y="5093208"/>
-            <a:ext cx="1828800" cy="274320"/>
-          </a:xfrm>
-          <a:prstGeom prst="rect">
-            <a:avLst/>
-          </a:prstGeom>
-          <a:noFill/>
-        </p:spPr>
-        <p:txBody>
-          <a:bodyPr wrap="square">
-            <a:spAutoFit/>
-          </a:bodyPr>
-          <a:lstStyle/>
-          <a:p>
-            <a:pPr algn="l"/>
-            <a:r>
-              <a:rPr sz="1000" b="0" i="0">
-                <a:solidFill>
-                  <a:srgbClr val="181D17"/>
-                </a:solidFill>
-                <a:latin typeface="Calibri"/>
-              </a:rPr>
-              <a:t>Lupa ng Bayan</a:t>
-            </a:r>
-          </a:p>
-        </p:txBody>
-      </p:sp>
-      <p:sp>
-        <p:nvSpPr>
-          <p:cNvPr id="87" name="TextBox 86"/>
-          <p:cNvSpPr txBox="1"/>
-          <p:nvPr/>
-        </p:nvSpPr>
-        <p:spPr>
-          <a:xfrm>
-            <a:off x="4297680" y="5093208"/>
-            <a:ext cx="1554480" cy="274320"/>
-          </a:xfrm>
-          <a:prstGeom prst="rect">
-            <a:avLst/>
-          </a:prstGeom>
-          <a:noFill/>
-        </p:spPr>
-        <p:txBody>
-          <a:bodyPr wrap="square">
-            <a:spAutoFit/>
-          </a:bodyPr>
-          <a:lstStyle/>
-          <a:p>
-            <a:pPr algn="l"/>
-            <a:r>
-              <a:rPr sz="1000" b="0" i="0">
-                <a:solidFill>
-                  <a:srgbClr val="181D17"/>
-                </a:solidFill>
-                <a:latin typeface="Calibri"/>
-              </a:rPr>
-              <a:t>Maria Santos</a:t>
-            </a:r>
-          </a:p>
-        </p:txBody>
-      </p:sp>
-      <p:sp>
-        <p:nvSpPr>
-          <p:cNvPr id="88" name="TextBox 87"/>
-          <p:cNvSpPr txBox="1"/>
-          <p:nvPr/>
-        </p:nvSpPr>
-        <p:spPr>
-          <a:xfrm>
-            <a:off x="5852160" y="5093208"/>
-            <a:ext cx="731520" cy="274320"/>
-          </a:xfrm>
-          <a:prstGeom prst="rect">
-            <a:avLst/>
-          </a:prstGeom>
-          <a:noFill/>
-        </p:spPr>
-        <p:txBody>
-          <a:bodyPr wrap="square">
-            <a:spAutoFit/>
-          </a:bodyPr>
-          <a:lstStyle/>
-          <a:p>
-            <a:pPr algn="l"/>
-            <a:r>
-              <a:rPr sz="1000" b="0" i="0">
-                <a:solidFill>
-                  <a:srgbClr val="181D17"/>
-                </a:solidFill>
-                <a:latin typeface="Calibri"/>
-              </a:rPr>
-              <a:t>1.5 ha</a:t>
-            </a:r>
-          </a:p>
-        </p:txBody>
-      </p:sp>
-      <p:sp>
-        <p:nvSpPr>
-          <p:cNvPr id="89" name="TextBox 88"/>
-          <p:cNvSpPr txBox="1"/>
-          <p:nvPr/>
-        </p:nvSpPr>
-        <p:spPr>
-          <a:xfrm>
-            <a:off x="6583680" y="5093208"/>
-            <a:ext cx="914400" cy="274320"/>
-          </a:xfrm>
-          <a:prstGeom prst="rect">
-            <a:avLst/>
-          </a:prstGeom>
-          <a:noFill/>
-        </p:spPr>
-        <p:txBody>
-          <a:bodyPr wrap="square">
-            <a:spAutoFit/>
-          </a:bodyPr>
-          <a:lstStyle/>
-          <a:p>
-            <a:pPr algn="l"/>
-            <a:r>
-              <a:rPr sz="1000" b="0" i="0">
-                <a:solidFill>
-                  <a:srgbClr val="181D17"/>
-                </a:solidFill>
-                <a:latin typeface="Calibri"/>
-              </a:rPr>
-              <a:t>8</a:t>
-            </a:r>
-          </a:p>
-        </p:txBody>
-      </p:sp>
-      <p:sp>
-        <p:nvSpPr>
-          <p:cNvPr id="90" name="TextBox 89"/>
-          <p:cNvSpPr txBox="1"/>
-          <p:nvPr/>
-        </p:nvSpPr>
-        <p:spPr>
-          <a:xfrm>
-            <a:off x="7498080" y="5093208"/>
-            <a:ext cx="2377440" cy="274320"/>
-          </a:xfrm>
-          <a:prstGeom prst="rect">
-            <a:avLst/>
-          </a:prstGeom>
-          <a:noFill/>
-        </p:spPr>
-        <p:txBody>
-          <a:bodyPr wrap="square">
-            <a:spAutoFit/>
-          </a:bodyPr>
-          <a:lstStyle/>
-          <a:p>
-            <a:pPr algn="l"/>
-            <a:r>
-              <a:rPr sz="1000" b="1" i="0">
-                <a:solidFill>
-                  <a:srgbClr val="0D631B"/>
-                </a:solidFill>
-                <a:latin typeface="Calibri"/>
-              </a:rPr>
-              <a:t>🌽  Corn (Mais)</a:t>
-            </a:r>
-          </a:p>
-        </p:txBody>
-      </p:sp>
-      <p:sp>
-        <p:nvSpPr>
-          <p:cNvPr id="91" name="TextBox 90"/>
-          <p:cNvSpPr txBox="1"/>
-          <p:nvPr/>
-        </p:nvSpPr>
-        <p:spPr>
-          <a:xfrm>
-            <a:off x="9875520" y="5093208"/>
-            <a:ext cx="1965960" cy="274320"/>
-          </a:xfrm>
-          <a:prstGeom prst="rect">
-            <a:avLst/>
-          </a:prstGeom>
-          <a:noFill/>
-        </p:spPr>
-        <p:txBody>
-          <a:bodyPr wrap="square">
-            <a:spAutoFit/>
-          </a:bodyPr>
-          <a:lstStyle/>
-          <a:p>
-            <a:pPr algn="l"/>
-            <a:r>
-              <a:rPr sz="1000" b="1" i="0">
-                <a:solidFill>
-                  <a:srgbClr val="2E7D32"/>
-                </a:solidFill>
-                <a:latin typeface="Calibri"/>
-              </a:rPr>
-              <a:t>87.6%</a:t>
-            </a:r>
-          </a:p>
-        </p:txBody>
-      </p:sp>
-      <p:sp>
-        <p:nvSpPr>
-          <p:cNvPr id="92" name="Rectangle 91"/>
-          <p:cNvSpPr/>
-          <p:nvPr/>
-        </p:nvSpPr>
-        <p:spPr>
-          <a:xfrm>
-            <a:off x="2377440" y="5458968"/>
-            <a:ext cx="9372600" cy="438912"/>
-          </a:xfrm>
-          <a:prstGeom prst="rect">
-            <a:avLst/>
-          </a:prstGeom>
-          <a:solidFill>
-            <a:srgbClr val="F7FBF0"/>
-          </a:solidFill>
-          <a:ln>
-            <a:noFill/>
-          </a:ln>
-        </p:spPr>
-        <p:style>
-          <a:lnRef idx="1">
-            <a:schemeClr val="accent1"/>
-          </a:lnRef>
-          <a:fillRef idx="3">
-            <a:schemeClr val="accent1"/>
-          </a:fillRef>
-          <a:effectRef idx="2">
-            <a:schemeClr val="accent1"/>
-          </a:effectRef>
-          <a:fontRef idx="minor">
-            <a:schemeClr val="lt1"/>
-          </a:fontRef>
-        </p:style>
-        <p:txBody>
-          <a:bodyPr rtlCol="0" anchor="ctr"/>
-          <a:lstStyle/>
-          <a:p>
-            <a:pPr algn="ctr"/>
-          </a:p>
-        </p:txBody>
-      </p:sp>
-      <p:sp>
-        <p:nvSpPr>
-          <p:cNvPr id="93" name="TextBox 92"/>
-          <p:cNvSpPr txBox="1"/>
-          <p:nvPr/>
-        </p:nvSpPr>
-        <p:spPr>
-          <a:xfrm>
-            <a:off x="2468880" y="5550408"/>
-            <a:ext cx="1828800" cy="274320"/>
-          </a:xfrm>
-          <a:prstGeom prst="rect">
-            <a:avLst/>
-          </a:prstGeom>
-          <a:noFill/>
-        </p:spPr>
-        <p:txBody>
-          <a:bodyPr wrap="square">
-            <a:spAutoFit/>
-          </a:bodyPr>
-          <a:lstStyle/>
-          <a:p>
-            <a:pPr algn="l"/>
-            <a:r>
-              <a:rPr sz="1000" b="0" i="0">
-                <a:solidFill>
-                  <a:srgbClr val="181D17"/>
-                </a:solidFill>
-                <a:latin typeface="Calibri"/>
-              </a:rPr>
-              <a:t>Hardin ng Bukas</a:t>
-            </a:r>
-          </a:p>
-        </p:txBody>
-      </p:sp>
-      <p:sp>
-        <p:nvSpPr>
-          <p:cNvPr id="94" name="TextBox 93"/>
-          <p:cNvSpPr txBox="1"/>
-          <p:nvPr/>
-        </p:nvSpPr>
-        <p:spPr>
-          <a:xfrm>
-            <a:off x="4297680" y="5550408"/>
-            <a:ext cx="1554480" cy="274320"/>
-          </a:xfrm>
-          <a:prstGeom prst="rect">
-            <a:avLst/>
-          </a:prstGeom>
-          <a:noFill/>
-        </p:spPr>
-        <p:txBody>
-          <a:bodyPr wrap="square">
-            <a:spAutoFit/>
-          </a:bodyPr>
-          <a:lstStyle/>
-          <a:p>
-            <a:pPr algn="l"/>
-            <a:r>
-              <a:rPr sz="1000" b="0" i="0">
-                <a:solidFill>
-                  <a:srgbClr val="181D17"/>
-                </a:solidFill>
-                <a:latin typeface="Calibri"/>
-              </a:rPr>
-              <a:t>Pedro Reyes</a:t>
-            </a:r>
-          </a:p>
-        </p:txBody>
-      </p:sp>
-      <p:sp>
-        <p:nvSpPr>
-          <p:cNvPr id="95" name="TextBox 94"/>
-          <p:cNvSpPr txBox="1"/>
-          <p:nvPr/>
-        </p:nvSpPr>
-        <p:spPr>
-          <a:xfrm>
-            <a:off x="5852160" y="5550408"/>
-            <a:ext cx="731520" cy="274320"/>
-          </a:xfrm>
-          <a:prstGeom prst="rect">
-            <a:avLst/>
-          </a:prstGeom>
-          <a:noFill/>
-        </p:spPr>
-        <p:txBody>
-          <a:bodyPr wrap="square">
-            <a:spAutoFit/>
-          </a:bodyPr>
-          <a:lstStyle/>
-          <a:p>
-            <a:pPr algn="l"/>
-            <a:r>
-              <a:rPr sz="1000" b="0" i="0">
-                <a:solidFill>
-                  <a:srgbClr val="181D17"/>
-                </a:solidFill>
-                <a:latin typeface="Calibri"/>
-              </a:rPr>
-              <a:t>3.0 ha</a:t>
-            </a:r>
-          </a:p>
-        </p:txBody>
-      </p:sp>
-      <p:sp>
-        <p:nvSpPr>
-          <p:cNvPr id="96" name="TextBox 95"/>
-          <p:cNvSpPr txBox="1"/>
-          <p:nvPr/>
-        </p:nvSpPr>
-        <p:spPr>
-          <a:xfrm>
-            <a:off x="6583680" y="5550408"/>
-            <a:ext cx="914400" cy="274320"/>
-          </a:xfrm>
-          <a:prstGeom prst="rect">
-            <a:avLst/>
-          </a:prstGeom>
-          <a:noFill/>
-        </p:spPr>
-        <p:txBody>
-          <a:bodyPr wrap="square">
-            <a:spAutoFit/>
-          </a:bodyPr>
-          <a:lstStyle/>
-          <a:p>
-            <a:pPr algn="l"/>
-            <a:r>
-              <a:rPr sz="1000" b="0" i="0">
-                <a:solidFill>
-                  <a:srgbClr val="181D17"/>
-                </a:solidFill>
-                <a:latin typeface="Calibri"/>
-              </a:rPr>
-              <a:t>15</a:t>
-            </a:r>
-          </a:p>
-        </p:txBody>
-      </p:sp>
-      <p:sp>
-        <p:nvSpPr>
-          <p:cNvPr id="97" name="TextBox 96"/>
-          <p:cNvSpPr txBox="1"/>
-          <p:nvPr/>
-        </p:nvSpPr>
-        <p:spPr>
-          <a:xfrm>
-            <a:off x="7498080" y="5550408"/>
-            <a:ext cx="2377440" cy="274320"/>
-          </a:xfrm>
-          <a:prstGeom prst="rect">
-            <a:avLst/>
-          </a:prstGeom>
-          <a:noFill/>
-        </p:spPr>
-        <p:txBody>
-          <a:bodyPr wrap="square">
-            <a:spAutoFit/>
-          </a:bodyPr>
-          <a:lstStyle/>
-          <a:p>
-            <a:pPr algn="l"/>
-            <a:r>
-              <a:rPr sz="1000" b="1" i="0">
-                <a:solidFill>
-                  <a:srgbClr val="0D631B"/>
-                </a:solidFill>
-                <a:latin typeface="Calibri"/>
-              </a:rPr>
-              <a:t>🍌  Banana (Saging)</a:t>
-            </a:r>
-          </a:p>
-        </p:txBody>
-      </p:sp>
-      <p:sp>
-        <p:nvSpPr>
-          <p:cNvPr id="98" name="TextBox 97"/>
-          <p:cNvSpPr txBox="1"/>
-          <p:nvPr/>
-        </p:nvSpPr>
-        <p:spPr>
-          <a:xfrm>
-            <a:off x="9875520" y="5550408"/>
-            <a:ext cx="1965960" cy="274320"/>
-          </a:xfrm>
-          <a:prstGeom prst="rect">
-            <a:avLst/>
-          </a:prstGeom>
-          <a:noFill/>
-        </p:spPr>
-        <p:txBody>
-          <a:bodyPr wrap="square">
-            <a:spAutoFit/>
-          </a:bodyPr>
-          <a:lstStyle/>
-          <a:p>
-            <a:pPr algn="l"/>
-            <a:r>
-              <a:rPr sz="1000" b="1" i="0">
-                <a:solidFill>
-                  <a:srgbClr val="2E7D32"/>
-                </a:solidFill>
-                <a:latin typeface="Calibri"/>
-              </a:rPr>
-              <a:t>91.2%</a:t>
-            </a:r>
-          </a:p>
-        </p:txBody>
-      </p:sp>
-      <p:sp>
-        <p:nvSpPr>
-          <p:cNvPr id="99" name="Rectangle 98"/>
-          <p:cNvSpPr/>
-          <p:nvPr/>
-        </p:nvSpPr>
-        <p:spPr>
-          <a:xfrm>
-            <a:off x="2377440" y="5897880"/>
-            <a:ext cx="9372600" cy="530352"/>
-          </a:xfrm>
-          <a:prstGeom prst="rect">
-            <a:avLst/>
-          </a:prstGeom>
-          <a:solidFill>
-            <a:srgbClr val="0D631B"/>
-          </a:solidFill>
-          <a:ln>
-            <a:noFill/>
-          </a:ln>
-        </p:spPr>
-        <p:style>
-          <a:lnRef idx="1">
-            <a:schemeClr val="accent1"/>
-          </a:lnRef>
-          <a:fillRef idx="3">
-            <a:schemeClr val="accent1"/>
-          </a:fillRef>
-          <a:effectRef idx="2">
-            <a:schemeClr val="accent1"/>
-          </a:effectRef>
-          <a:fontRef idx="minor">
-            <a:schemeClr val="lt1"/>
-          </a:fontRef>
-        </p:style>
-        <p:txBody>
-          <a:bodyPr rtlCol="0" anchor="ctr"/>
-          <a:lstStyle/>
-          <a:p>
-            <a:pPr algn="ctr"/>
-          </a:p>
-        </p:txBody>
-      </p:sp>
-      <p:sp>
-        <p:nvSpPr>
-          <p:cNvPr id="100" name="TextBox 99"/>
-          <p:cNvSpPr txBox="1"/>
-          <p:nvPr/>
-        </p:nvSpPr>
-        <p:spPr>
-          <a:xfrm>
-            <a:off x="2487168" y="5943600"/>
-            <a:ext cx="4114800" cy="347472"/>
-          </a:xfrm>
-          <a:prstGeom prst="rect">
-            <a:avLst/>
-          </a:prstGeom>
-          <a:noFill/>
-        </p:spPr>
-        <p:txBody>
-          <a:bodyPr wrap="square">
-            <a:spAutoFit/>
-          </a:bodyPr>
-          <a:lstStyle/>
-          <a:p>
-            <a:pPr algn="l"/>
-            <a:r>
-              <a:rPr sz="1100" b="1" i="0">
-                <a:solidFill>
-                  <a:srgbClr val="FFFFFF"/>
-                </a:solidFill>
-                <a:latin typeface="Calibri"/>
-              </a:rPr>
-              <a:t>🤖 Qwen AI (Ollama) Recommendation — Bukid ni Juan</a:t>
-            </a:r>
-          </a:p>
-        </p:txBody>
-      </p:sp>
-      <p:sp>
-        <p:nvSpPr>
-          <p:cNvPr id="101" name="TextBox 100"/>
-          <p:cNvSpPr txBox="1"/>
-          <p:nvPr/>
-        </p:nvSpPr>
-        <p:spPr>
-          <a:xfrm>
-            <a:off x="6675120" y="5943600"/>
-            <a:ext cx="914400" cy="256032"/>
-          </a:xfrm>
-          <a:prstGeom prst="rect">
-            <a:avLst/>
-          </a:prstGeom>
-          <a:noFill/>
-        </p:spPr>
-        <p:txBody>
-          <a:bodyPr wrap="square">
-            <a:spAutoFit/>
-          </a:bodyPr>
-          <a:lstStyle/>
-          <a:p>
-            <a:pPr algn="l"/>
-            <a:r>
-              <a:rPr sz="1200" b="1" i="0">
-                <a:solidFill>
-                  <a:srgbClr val="FED255"/>
-                </a:solidFill>
-                <a:latin typeface="Calibri"/>
-              </a:rPr>
-              <a:t>94.3%</a:t>
-            </a:r>
-          </a:p>
-        </p:txBody>
-      </p:sp>
-      <p:sp>
-        <p:nvSpPr>
-          <p:cNvPr id="102" name="TextBox 101"/>
-          <p:cNvSpPr txBox="1"/>
-          <p:nvPr/>
-        </p:nvSpPr>
-        <p:spPr>
-          <a:xfrm>
-            <a:off x="7680960" y="5943600"/>
-            <a:ext cx="640080" cy="256032"/>
-          </a:xfrm>
-          <a:prstGeom prst="rect">
-            <a:avLst/>
-          </a:prstGeom>
-          <a:noFill/>
-        </p:spPr>
-        <p:txBody>
-          <a:bodyPr wrap="square">
-            <a:spAutoFit/>
-          </a:bodyPr>
-          <a:lstStyle/>
-          <a:p>
-            <a:pPr algn="l"/>
-            <a:r>
-              <a:rPr sz="900" b="0" i="0">
-                <a:solidFill>
-                  <a:srgbClr val="A3F69C"/>
-                </a:solidFill>
-                <a:latin typeface="Calibri"/>
-              </a:rPr>
-              <a:t>confidence</a:t>
-            </a:r>
-          </a:p>
-        </p:txBody>
-      </p:sp>
-      <p:sp>
-        <p:nvSpPr>
-          <p:cNvPr id="103" name="TextBox 102"/>
-          <p:cNvSpPr txBox="1"/>
-          <p:nvPr/>
-        </p:nvSpPr>
-        <p:spPr>
-          <a:xfrm>
-            <a:off x="2487168" y="6236208"/>
-            <a:ext cx="8961120" cy="182880"/>
-          </a:xfrm>
-          <a:prstGeom prst="rect">
-            <a:avLst/>
-          </a:prstGeom>
-          <a:noFill/>
-        </p:spPr>
-        <p:txBody>
-          <a:bodyPr wrap="square">
-            <a:spAutoFit/>
-          </a:bodyPr>
-          <a:lstStyle/>
-          <a:p>
-            <a:pPr algn="l"/>
-            <a:r>
-              <a:rPr sz="900" b="0" i="0">
-                <a:solidFill>
-                  <a:srgbClr val="FFFFFF"/>
-                </a:solidFill>
-                <a:latin typeface="Calibri"/>
-              </a:rPr>
-              <a:t>EN: Soil N=120 ppm &amp; pH=6.5 are ideal for rice  |  FIL: Ang nitrogen at pH ng lupa ay angkop para sa palay.</a:t>
-            </a:r>
+            <a:endParaRPr lang="en-PH"/>
           </a:p>
         </p:txBody>
       </p:sp>
@@ -18363,7 +14920,7 @@
 </file>
 
 <file path=ppt/slides/slide6.xml><?xml version="1.0" encoding="utf-8"?>
-<p:sld xmlns:a="http://schemas.openxmlformats.org/drawingml/2006/main" xmlns:p="http://schemas.openxmlformats.org/presentationml/2006/main" xmlns:r="http://schemas.openxmlformats.org/officeDocument/2006/relationships">
+<p:sld xmlns:a="http://schemas.openxmlformats.org/drawingml/2006/main" xmlns:r="http://schemas.openxmlformats.org/officeDocument/2006/relationships" xmlns:p="http://schemas.openxmlformats.org/presentationml/2006/main">
   <p:cSld>
     <p:bg>
       <p:bgPr>
@@ -18379,7 +14936,14 @@
         <p:cNvGrpSpPr/>
         <p:nvPr/>
       </p:nvGrpSpPr>
-      <p:grpSpPr/>
+      <p:grpSpPr>
+        <a:xfrm>
+          <a:off x="0" y="0"/>
+          <a:ext cx="0" cy="0"/>
+          <a:chOff x="0" y="0"/>
+          <a:chExt cx="0" cy="0"/>
+        </a:xfrm>
+      </p:grpSpPr>
       <p:sp>
         <p:nvSpPr>
           <p:cNvPr id="2" name="Rectangle 1"/>
@@ -18420,6 +14984,7 @@
           <a:lstStyle/>
           <a:p>
             <a:pPr algn="ctr"/>
+            <a:endParaRPr/>
           </a:p>
         </p:txBody>
       </p:sp>
@@ -18432,7 +14997,7 @@
         <p:spPr>
           <a:xfrm>
             <a:off x="365760" y="91440"/>
-            <a:ext cx="10515600" cy="502920"/>
+            <a:ext cx="10515600" cy="461665"/>
           </a:xfrm>
           <a:prstGeom prst="rect">
             <a:avLst/>
@@ -18447,13 +15012,13 @@
           <a:p>
             <a:pPr algn="l"/>
             <a:r>
-              <a:rPr sz="2400" b="1" i="0">
+              <a:rPr sz="2400" b="1" i="0" dirty="0">
                 <a:solidFill>
                   <a:srgbClr val="FFFFFF"/>
                 </a:solidFill>
                 <a:latin typeface="Calibri"/>
               </a:rPr>
-              <a:t>Google Stitch Prototype – Farmer View</a:t>
+              <a:t>Google Stitch Prototype – </a:t>
             </a:r>
           </a:p>
         </p:txBody>
@@ -18533,6 +15098,7 @@
           <a:lstStyle/>
           <a:p>
             <a:pPr algn="ctr"/>
+            <a:endParaRPr/>
           </a:p>
         </p:txBody>
       </p:sp>
@@ -18579,15 +15145,25 @@
         </p:nvSpPr>
         <p:spPr>
           <a:xfrm>
-            <a:off x="320040" y="1005840"/>
-            <a:ext cx="5120640" cy="5623560"/>
-          </a:xfrm>
-          <a:prstGeom prst="rect">
-            <a:avLst/>
-          </a:prstGeom>
-          <a:solidFill>
-            <a:srgbClr val="FFFFFF"/>
-          </a:solidFill>
+            <a:off x="983226" y="1219201"/>
+            <a:ext cx="9271819" cy="5299586"/>
+          </a:xfrm>
+          <a:prstGeom prst="rect">
+            <a:avLst/>
+          </a:prstGeom>
+          <a:blipFill dpi="0" rotWithShape="1">
+            <a:blip r:embed="rId2">
+              <a:extLst>
+                <a:ext uri="{28A0092B-C50C-407E-A947-70E740481C1C}">
+                  <a14:useLocalDpi xmlns:a14="http://schemas.microsoft.com/office/drawing/2010/main" val="0"/>
+                </a:ext>
+              </a:extLst>
+            </a:blip>
+            <a:srcRect/>
+            <a:stretch>
+              <a:fillRect/>
+            </a:stretch>
+          </a:blipFill>
           <a:ln w="12700">
             <a:solidFill>
               <a:srgbClr val="E5EADF"/>
@@ -18613,1755 +15189,7 @@
           <a:lstStyle/>
           <a:p>
             <a:pPr algn="ctr"/>
-          </a:p>
-        </p:txBody>
-      </p:sp>
-      <p:sp>
-        <p:nvSpPr>
-          <p:cNvPr id="8" name="TextBox 7"/>
-          <p:cNvSpPr txBox="1"/>
-          <p:nvPr/>
-        </p:nvSpPr>
-        <p:spPr>
-          <a:xfrm>
-            <a:off x="457200" y="1097280"/>
-            <a:ext cx="4846320" cy="347472"/>
-          </a:xfrm>
-          <a:prstGeom prst="rect">
-            <a:avLst/>
-          </a:prstGeom>
-          <a:noFill/>
-        </p:spPr>
-        <p:txBody>
-          <a:bodyPr wrap="square">
-            <a:spAutoFit/>
-          </a:bodyPr>
-          <a:lstStyle/>
-          <a:p>
-            <a:pPr algn="l"/>
-            <a:r>
-              <a:rPr sz="1300" b="1" i="0">
-                <a:solidFill>
-                  <a:srgbClr val="0D631B"/>
-                </a:solidFill>
-                <a:latin typeface="Calibri"/>
-              </a:rPr>
-              <a:t>Farmer Mobile View</a:t>
-            </a:r>
-          </a:p>
-        </p:txBody>
-      </p:sp>
-      <p:sp>
-        <p:nvSpPr>
-          <p:cNvPr id="9" name="Rectangle 8"/>
-          <p:cNvSpPr/>
-          <p:nvPr/>
-        </p:nvSpPr>
-        <p:spPr>
-          <a:xfrm>
-            <a:off x="960120" y="1463040"/>
-            <a:ext cx="2743200" cy="5074920"/>
-          </a:xfrm>
-          <a:prstGeom prst="rect">
-            <a:avLst/>
-          </a:prstGeom>
-          <a:solidFill>
-            <a:srgbClr val="181D17"/>
-          </a:solidFill>
-          <a:ln>
-            <a:noFill/>
-          </a:ln>
-        </p:spPr>
-        <p:style>
-          <a:lnRef idx="1">
-            <a:schemeClr val="accent1"/>
-          </a:lnRef>
-          <a:fillRef idx="3">
-            <a:schemeClr val="accent1"/>
-          </a:fillRef>
-          <a:effectRef idx="2">
-            <a:schemeClr val="accent1"/>
-          </a:effectRef>
-          <a:fontRef idx="minor">
-            <a:schemeClr val="lt1"/>
-          </a:fontRef>
-        </p:style>
-        <p:txBody>
-          <a:bodyPr rtlCol="0" anchor="ctr"/>
-          <a:lstStyle/>
-          <a:p>
-            <a:pPr algn="ctr"/>
-          </a:p>
-        </p:txBody>
-      </p:sp>
-      <p:sp>
-        <p:nvSpPr>
-          <p:cNvPr id="10" name="Rectangle 9"/>
-          <p:cNvSpPr/>
-          <p:nvPr/>
-        </p:nvSpPr>
-        <p:spPr>
-          <a:xfrm>
-            <a:off x="1051560" y="1627632"/>
-            <a:ext cx="2560320" cy="4754880"/>
-          </a:xfrm>
-          <a:prstGeom prst="rect">
-            <a:avLst/>
-          </a:prstGeom>
-          <a:solidFill>
-            <a:srgbClr val="FFFFFF"/>
-          </a:solidFill>
-          <a:ln>
-            <a:noFill/>
-          </a:ln>
-        </p:spPr>
-        <p:style>
-          <a:lnRef idx="1">
-            <a:schemeClr val="accent1"/>
-          </a:lnRef>
-          <a:fillRef idx="3">
-            <a:schemeClr val="accent1"/>
-          </a:fillRef>
-          <a:effectRef idx="2">
-            <a:schemeClr val="accent1"/>
-          </a:effectRef>
-          <a:fontRef idx="minor">
-            <a:schemeClr val="lt1"/>
-          </a:fontRef>
-        </p:style>
-        <p:txBody>
-          <a:bodyPr rtlCol="0" anchor="ctr"/>
-          <a:lstStyle/>
-          <a:p>
-            <a:pPr algn="ctr"/>
-          </a:p>
-        </p:txBody>
-      </p:sp>
-      <p:sp>
-        <p:nvSpPr>
-          <p:cNvPr id="11" name="Rectangle 10"/>
-          <p:cNvSpPr/>
-          <p:nvPr/>
-        </p:nvSpPr>
-        <p:spPr>
-          <a:xfrm>
-            <a:off x="1051560" y="1627632"/>
-            <a:ext cx="2560320" cy="475488"/>
-          </a:xfrm>
-          <a:prstGeom prst="rect">
-            <a:avLst/>
-          </a:prstGeom>
-          <a:solidFill>
-            <a:srgbClr val="0D631B"/>
-          </a:solidFill>
-          <a:ln>
-            <a:noFill/>
-          </a:ln>
-        </p:spPr>
-        <p:style>
-          <a:lnRef idx="1">
-            <a:schemeClr val="accent1"/>
-          </a:lnRef>
-          <a:fillRef idx="3">
-            <a:schemeClr val="accent1"/>
-          </a:fillRef>
-          <a:effectRef idx="2">
-            <a:schemeClr val="accent1"/>
-          </a:effectRef>
-          <a:fontRef idx="minor">
-            <a:schemeClr val="lt1"/>
-          </a:fontRef>
-        </p:style>
-        <p:txBody>
-          <a:bodyPr rtlCol="0" anchor="ctr"/>
-          <a:lstStyle/>
-          <a:p>
-            <a:pPr algn="ctr"/>
-          </a:p>
-        </p:txBody>
-      </p:sp>
-      <p:sp>
-        <p:nvSpPr>
-          <p:cNvPr id="12" name="TextBox 11"/>
-          <p:cNvSpPr txBox="1"/>
-          <p:nvPr/>
-        </p:nvSpPr>
-        <p:spPr>
-          <a:xfrm>
-            <a:off x="1097280" y="1673352"/>
-            <a:ext cx="2468880" cy="347472"/>
-          </a:xfrm>
-          <a:prstGeom prst="rect">
-            <a:avLst/>
-          </a:prstGeom>
-          <a:noFill/>
-        </p:spPr>
-        <p:txBody>
-          <a:bodyPr wrap="square">
-            <a:spAutoFit/>
-          </a:bodyPr>
-          <a:lstStyle/>
-          <a:p>
-            <a:pPr algn="ctr"/>
-            <a:r>
-              <a:rPr sz="1000" b="1" i="0">
-                <a:solidFill>
-                  <a:srgbClr val="FFFFFF"/>
-                </a:solidFill>
-                <a:latin typeface="Calibri"/>
-              </a:rPr>
-              <a:t>Aking Bukid  🌾</a:t>
-            </a:r>
-          </a:p>
-        </p:txBody>
-      </p:sp>
-      <p:sp>
-        <p:nvSpPr>
-          <p:cNvPr id="13" name="TextBox 12"/>
-          <p:cNvSpPr txBox="1"/>
-          <p:nvPr/>
-        </p:nvSpPr>
-        <p:spPr>
-          <a:xfrm>
-            <a:off x="1097280" y="2176272"/>
-            <a:ext cx="2468880" cy="274320"/>
-          </a:xfrm>
-          <a:prstGeom prst="rect">
-            <a:avLst/>
-          </a:prstGeom>
-          <a:noFill/>
-        </p:spPr>
-        <p:txBody>
-          <a:bodyPr wrap="square">
-            <a:spAutoFit/>
-          </a:bodyPr>
-          <a:lstStyle/>
-          <a:p>
-            <a:pPr algn="l"/>
-            <a:r>
-              <a:rPr sz="1200" b="1" i="0">
-                <a:solidFill>
-                  <a:srgbClr val="0D631B"/>
-                </a:solidFill>
-                <a:latin typeface="Calibri"/>
-              </a:rPr>
-              <a:t>Bukid ni Juan</a:t>
-            </a:r>
-          </a:p>
-        </p:txBody>
-      </p:sp>
-      <p:sp>
-        <p:nvSpPr>
-          <p:cNvPr id="14" name="TextBox 13"/>
-          <p:cNvSpPr txBox="1"/>
-          <p:nvPr/>
-        </p:nvSpPr>
-        <p:spPr>
-          <a:xfrm>
-            <a:off x="1097280" y="2450592"/>
-            <a:ext cx="2468880" cy="256032"/>
-          </a:xfrm>
-          <a:prstGeom prst="rect">
-            <a:avLst/>
-          </a:prstGeom>
-          <a:noFill/>
-        </p:spPr>
-        <p:txBody>
-          <a:bodyPr wrap="square">
-            <a:spAutoFit/>
-          </a:bodyPr>
-          <a:lstStyle/>
-          <a:p>
-            <a:pPr algn="l"/>
-            <a:r>
-              <a:rPr sz="950" b="0" i="1">
-                <a:solidFill>
-                  <a:srgbClr val="40493D"/>
-                </a:solidFill>
-                <a:latin typeface="Calibri"/>
-              </a:rPr>
-              <a:t>Maligayang pagbabalik!</a:t>
-            </a:r>
-          </a:p>
-        </p:txBody>
-      </p:sp>
-      <p:sp>
-        <p:nvSpPr>
-          <p:cNvPr id="15" name="Rectangle 14"/>
-          <p:cNvSpPr/>
-          <p:nvPr/>
-        </p:nvSpPr>
-        <p:spPr>
-          <a:xfrm>
-            <a:off x="1051560" y="2743200"/>
-            <a:ext cx="2560320" cy="274320"/>
-          </a:xfrm>
-          <a:prstGeom prst="rect">
-            <a:avLst/>
-          </a:prstGeom>
-          <a:solidFill>
-            <a:srgbClr val="E65C00"/>
-          </a:solidFill>
-          <a:ln>
-            <a:noFill/>
-          </a:ln>
-        </p:spPr>
-        <p:style>
-          <a:lnRef idx="1">
-            <a:schemeClr val="accent1"/>
-          </a:lnRef>
-          <a:fillRef idx="3">
-            <a:schemeClr val="accent1"/>
-          </a:fillRef>
-          <a:effectRef idx="2">
-            <a:schemeClr val="accent1"/>
-          </a:effectRef>
-          <a:fontRef idx="minor">
-            <a:schemeClr val="lt1"/>
-          </a:fontRef>
-        </p:style>
-        <p:txBody>
-          <a:bodyPr rtlCol="0" anchor="ctr"/>
-          <a:lstStyle/>
-          <a:p>
-            <a:pPr algn="ctr"/>
-          </a:p>
-        </p:txBody>
-      </p:sp>
-      <p:sp>
-        <p:nvSpPr>
-          <p:cNvPr id="16" name="TextBox 15"/>
-          <p:cNvSpPr txBox="1"/>
-          <p:nvPr/>
-        </p:nvSpPr>
-        <p:spPr>
-          <a:xfrm>
-            <a:off x="1097280" y="2770632"/>
-            <a:ext cx="2468880" cy="219456"/>
-          </a:xfrm>
-          <a:prstGeom prst="rect">
-            <a:avLst/>
-          </a:prstGeom>
-          <a:noFill/>
-        </p:spPr>
-        <p:txBody>
-          <a:bodyPr wrap="square">
-            <a:spAutoFit/>
-          </a:bodyPr>
-          <a:lstStyle/>
-          <a:p>
-            <a:pPr algn="ctr"/>
-            <a:r>
-              <a:rPr sz="900" b="1" i="0">
-                <a:solidFill>
-                  <a:srgbClr val="FFFFFF"/>
-                </a:solidFill>
-                <a:latin typeface="Calibri"/>
-              </a:rPr>
-              <a:t>📡  Live IoT Sensor Readings</a:t>
-            </a:r>
-          </a:p>
-        </p:txBody>
-      </p:sp>
-      <p:sp>
-        <p:nvSpPr>
-          <p:cNvPr id="17" name="Rectangle 16"/>
-          <p:cNvSpPr/>
-          <p:nvPr/>
-        </p:nvSpPr>
-        <p:spPr>
-          <a:xfrm>
-            <a:off x="1097280" y="3063240"/>
-            <a:ext cx="1143000" cy="594360"/>
-          </a:xfrm>
-          <a:prstGeom prst="rect">
-            <a:avLst/>
-          </a:prstGeom>
-          <a:solidFill>
-            <a:srgbClr val="E5EADF"/>
-          </a:solidFill>
-          <a:ln>
-            <a:noFill/>
-          </a:ln>
-        </p:spPr>
-        <p:style>
-          <a:lnRef idx="1">
-            <a:schemeClr val="accent1"/>
-          </a:lnRef>
-          <a:fillRef idx="3">
-            <a:schemeClr val="accent1"/>
-          </a:fillRef>
-          <a:effectRef idx="2">
-            <a:schemeClr val="accent1"/>
-          </a:effectRef>
-          <a:fontRef idx="minor">
-            <a:schemeClr val="lt1"/>
-          </a:fontRef>
-        </p:style>
-        <p:txBody>
-          <a:bodyPr rtlCol="0" anchor="ctr"/>
-          <a:lstStyle/>
-          <a:p>
-            <a:pPr algn="ctr"/>
-          </a:p>
-        </p:txBody>
-      </p:sp>
-      <p:sp>
-        <p:nvSpPr>
-          <p:cNvPr id="18" name="TextBox 17"/>
-          <p:cNvSpPr txBox="1"/>
-          <p:nvPr/>
-        </p:nvSpPr>
-        <p:spPr>
-          <a:xfrm>
-            <a:off x="1097280" y="3099816"/>
-            <a:ext cx="1143000" cy="246888"/>
-          </a:xfrm>
-          <a:prstGeom prst="rect">
-            <a:avLst/>
-          </a:prstGeom>
-          <a:noFill/>
-        </p:spPr>
-        <p:txBody>
-          <a:bodyPr wrap="square">
-            <a:spAutoFit/>
-          </a:bodyPr>
-          <a:lstStyle/>
-          <a:p>
-            <a:pPr algn="ctr"/>
-            <a:r>
-              <a:rPr sz="900" b="0" i="0">
-                <a:solidFill>
-                  <a:srgbClr val="40493D"/>
-                </a:solidFill>
-                <a:latin typeface="Calibri"/>
-              </a:rPr>
-              <a:t>N</a:t>
-            </a:r>
-          </a:p>
-        </p:txBody>
-      </p:sp>
-      <p:sp>
-        <p:nvSpPr>
-          <p:cNvPr id="19" name="TextBox 18"/>
-          <p:cNvSpPr txBox="1"/>
-          <p:nvPr/>
-        </p:nvSpPr>
-        <p:spPr>
-          <a:xfrm>
-            <a:off x="1097280" y="3337560"/>
-            <a:ext cx="1143000" cy="274320"/>
-          </a:xfrm>
-          <a:prstGeom prst="rect">
-            <a:avLst/>
-          </a:prstGeom>
-          <a:noFill/>
-        </p:spPr>
-        <p:txBody>
-          <a:bodyPr wrap="square">
-            <a:spAutoFit/>
-          </a:bodyPr>
-          <a:lstStyle/>
-          <a:p>
-            <a:pPr algn="ctr"/>
-            <a:r>
-              <a:rPr sz="1200" b="1" i="0">
-                <a:solidFill>
-                  <a:srgbClr val="0D631B"/>
-                </a:solidFill>
-                <a:latin typeface="Calibri"/>
-              </a:rPr>
-              <a:t>120 ppm</a:t>
-            </a:r>
-          </a:p>
-        </p:txBody>
-      </p:sp>
-      <p:sp>
-        <p:nvSpPr>
-          <p:cNvPr id="20" name="Rectangle 19"/>
-          <p:cNvSpPr/>
-          <p:nvPr/>
-        </p:nvSpPr>
-        <p:spPr>
-          <a:xfrm>
-            <a:off x="2331720" y="3063240"/>
-            <a:ext cx="1143000" cy="594360"/>
-          </a:xfrm>
-          <a:prstGeom prst="rect">
-            <a:avLst/>
-          </a:prstGeom>
-          <a:solidFill>
-            <a:srgbClr val="E5EADF"/>
-          </a:solidFill>
-          <a:ln>
-            <a:noFill/>
-          </a:ln>
-        </p:spPr>
-        <p:style>
-          <a:lnRef idx="1">
-            <a:schemeClr val="accent1"/>
-          </a:lnRef>
-          <a:fillRef idx="3">
-            <a:schemeClr val="accent1"/>
-          </a:fillRef>
-          <a:effectRef idx="2">
-            <a:schemeClr val="accent1"/>
-          </a:effectRef>
-          <a:fontRef idx="minor">
-            <a:schemeClr val="lt1"/>
-          </a:fontRef>
-        </p:style>
-        <p:txBody>
-          <a:bodyPr rtlCol="0" anchor="ctr"/>
-          <a:lstStyle/>
-          <a:p>
-            <a:pPr algn="ctr"/>
-          </a:p>
-        </p:txBody>
-      </p:sp>
-      <p:sp>
-        <p:nvSpPr>
-          <p:cNvPr id="21" name="TextBox 20"/>
-          <p:cNvSpPr txBox="1"/>
-          <p:nvPr/>
-        </p:nvSpPr>
-        <p:spPr>
-          <a:xfrm>
-            <a:off x="2331720" y="3099816"/>
-            <a:ext cx="1143000" cy="246888"/>
-          </a:xfrm>
-          <a:prstGeom prst="rect">
-            <a:avLst/>
-          </a:prstGeom>
-          <a:noFill/>
-        </p:spPr>
-        <p:txBody>
-          <a:bodyPr wrap="square">
-            <a:spAutoFit/>
-          </a:bodyPr>
-          <a:lstStyle/>
-          <a:p>
-            <a:pPr algn="ctr"/>
-            <a:r>
-              <a:rPr sz="900" b="0" i="0">
-                <a:solidFill>
-                  <a:srgbClr val="40493D"/>
-                </a:solidFill>
-                <a:latin typeface="Calibri"/>
-              </a:rPr>
-              <a:t>P</a:t>
-            </a:r>
-          </a:p>
-        </p:txBody>
-      </p:sp>
-      <p:sp>
-        <p:nvSpPr>
-          <p:cNvPr id="22" name="TextBox 21"/>
-          <p:cNvSpPr txBox="1"/>
-          <p:nvPr/>
-        </p:nvSpPr>
-        <p:spPr>
-          <a:xfrm>
-            <a:off x="2331720" y="3337560"/>
-            <a:ext cx="1143000" cy="274320"/>
-          </a:xfrm>
-          <a:prstGeom prst="rect">
-            <a:avLst/>
-          </a:prstGeom>
-          <a:noFill/>
-        </p:spPr>
-        <p:txBody>
-          <a:bodyPr wrap="square">
-            <a:spAutoFit/>
-          </a:bodyPr>
-          <a:lstStyle/>
-          <a:p>
-            <a:pPr algn="ctr"/>
-            <a:r>
-              <a:rPr sz="1200" b="1" i="0">
-                <a:solidFill>
-                  <a:srgbClr val="0D631B"/>
-                </a:solidFill>
-                <a:latin typeface="Calibri"/>
-              </a:rPr>
-              <a:t>45 ppm</a:t>
-            </a:r>
-          </a:p>
-        </p:txBody>
-      </p:sp>
-      <p:sp>
-        <p:nvSpPr>
-          <p:cNvPr id="23" name="Rectangle 22"/>
-          <p:cNvSpPr/>
-          <p:nvPr/>
-        </p:nvSpPr>
-        <p:spPr>
-          <a:xfrm>
-            <a:off x="1097280" y="3776472"/>
-            <a:ext cx="1143000" cy="594360"/>
-          </a:xfrm>
-          <a:prstGeom prst="rect">
-            <a:avLst/>
-          </a:prstGeom>
-          <a:solidFill>
-            <a:srgbClr val="E5EADF"/>
-          </a:solidFill>
-          <a:ln>
-            <a:noFill/>
-          </a:ln>
-        </p:spPr>
-        <p:style>
-          <a:lnRef idx="1">
-            <a:schemeClr val="accent1"/>
-          </a:lnRef>
-          <a:fillRef idx="3">
-            <a:schemeClr val="accent1"/>
-          </a:fillRef>
-          <a:effectRef idx="2">
-            <a:schemeClr val="accent1"/>
-          </a:effectRef>
-          <a:fontRef idx="minor">
-            <a:schemeClr val="lt1"/>
-          </a:fontRef>
-        </p:style>
-        <p:txBody>
-          <a:bodyPr rtlCol="0" anchor="ctr"/>
-          <a:lstStyle/>
-          <a:p>
-            <a:pPr algn="ctr"/>
-          </a:p>
-        </p:txBody>
-      </p:sp>
-      <p:sp>
-        <p:nvSpPr>
-          <p:cNvPr id="24" name="TextBox 23"/>
-          <p:cNvSpPr txBox="1"/>
-          <p:nvPr/>
-        </p:nvSpPr>
-        <p:spPr>
-          <a:xfrm>
-            <a:off x="1097280" y="3813048"/>
-            <a:ext cx="1143000" cy="246888"/>
-          </a:xfrm>
-          <a:prstGeom prst="rect">
-            <a:avLst/>
-          </a:prstGeom>
-          <a:noFill/>
-        </p:spPr>
-        <p:txBody>
-          <a:bodyPr wrap="square">
-            <a:spAutoFit/>
-          </a:bodyPr>
-          <a:lstStyle/>
-          <a:p>
-            <a:pPr algn="ctr"/>
-            <a:r>
-              <a:rPr sz="900" b="0" i="0">
-                <a:solidFill>
-                  <a:srgbClr val="40493D"/>
-                </a:solidFill>
-                <a:latin typeface="Calibri"/>
-              </a:rPr>
-              <a:t>K</a:t>
-            </a:r>
-          </a:p>
-        </p:txBody>
-      </p:sp>
-      <p:sp>
-        <p:nvSpPr>
-          <p:cNvPr id="25" name="TextBox 24"/>
-          <p:cNvSpPr txBox="1"/>
-          <p:nvPr/>
-        </p:nvSpPr>
-        <p:spPr>
-          <a:xfrm>
-            <a:off x="1097280" y="4050792"/>
-            <a:ext cx="1143000" cy="274320"/>
-          </a:xfrm>
-          <a:prstGeom prst="rect">
-            <a:avLst/>
-          </a:prstGeom>
-          <a:noFill/>
-        </p:spPr>
-        <p:txBody>
-          <a:bodyPr wrap="square">
-            <a:spAutoFit/>
-          </a:bodyPr>
-          <a:lstStyle/>
-          <a:p>
-            <a:pPr algn="ctr"/>
-            <a:r>
-              <a:rPr sz="1200" b="1" i="0">
-                <a:solidFill>
-                  <a:srgbClr val="0D631B"/>
-                </a:solidFill>
-                <a:latin typeface="Calibri"/>
-              </a:rPr>
-              <a:t>38 ppm</a:t>
-            </a:r>
-          </a:p>
-        </p:txBody>
-      </p:sp>
-      <p:sp>
-        <p:nvSpPr>
-          <p:cNvPr id="26" name="Rectangle 25"/>
-          <p:cNvSpPr/>
-          <p:nvPr/>
-        </p:nvSpPr>
-        <p:spPr>
-          <a:xfrm>
-            <a:off x="2331720" y="3776472"/>
-            <a:ext cx="1143000" cy="594360"/>
-          </a:xfrm>
-          <a:prstGeom prst="rect">
-            <a:avLst/>
-          </a:prstGeom>
-          <a:solidFill>
-            <a:srgbClr val="E5EADF"/>
-          </a:solidFill>
-          <a:ln>
-            <a:noFill/>
-          </a:ln>
-        </p:spPr>
-        <p:style>
-          <a:lnRef idx="1">
-            <a:schemeClr val="accent1"/>
-          </a:lnRef>
-          <a:fillRef idx="3">
-            <a:schemeClr val="accent1"/>
-          </a:fillRef>
-          <a:effectRef idx="2">
-            <a:schemeClr val="accent1"/>
-          </a:effectRef>
-          <a:fontRef idx="minor">
-            <a:schemeClr val="lt1"/>
-          </a:fontRef>
-        </p:style>
-        <p:txBody>
-          <a:bodyPr rtlCol="0" anchor="ctr"/>
-          <a:lstStyle/>
-          <a:p>
-            <a:pPr algn="ctr"/>
-          </a:p>
-        </p:txBody>
-      </p:sp>
-      <p:sp>
-        <p:nvSpPr>
-          <p:cNvPr id="27" name="TextBox 26"/>
-          <p:cNvSpPr txBox="1"/>
-          <p:nvPr/>
-        </p:nvSpPr>
-        <p:spPr>
-          <a:xfrm>
-            <a:off x="2331720" y="3813048"/>
-            <a:ext cx="1143000" cy="246888"/>
-          </a:xfrm>
-          <a:prstGeom prst="rect">
-            <a:avLst/>
-          </a:prstGeom>
-          <a:noFill/>
-        </p:spPr>
-        <p:txBody>
-          <a:bodyPr wrap="square">
-            <a:spAutoFit/>
-          </a:bodyPr>
-          <a:lstStyle/>
-          <a:p>
-            <a:pPr algn="ctr"/>
-            <a:r>
-              <a:rPr sz="900" b="0" i="0">
-                <a:solidFill>
-                  <a:srgbClr val="40493D"/>
-                </a:solidFill>
-                <a:latin typeface="Calibri"/>
-              </a:rPr>
-              <a:t>pH</a:t>
-            </a:r>
-          </a:p>
-        </p:txBody>
-      </p:sp>
-      <p:sp>
-        <p:nvSpPr>
-          <p:cNvPr id="28" name="TextBox 27"/>
-          <p:cNvSpPr txBox="1"/>
-          <p:nvPr/>
-        </p:nvSpPr>
-        <p:spPr>
-          <a:xfrm>
-            <a:off x="2331720" y="4050792"/>
-            <a:ext cx="1143000" cy="274320"/>
-          </a:xfrm>
-          <a:prstGeom prst="rect">
-            <a:avLst/>
-          </a:prstGeom>
-          <a:noFill/>
-        </p:spPr>
-        <p:txBody>
-          <a:bodyPr wrap="square">
-            <a:spAutoFit/>
-          </a:bodyPr>
-          <a:lstStyle/>
-          <a:p>
-            <a:pPr algn="ctr"/>
-            <a:r>
-              <a:rPr sz="1200" b="1" i="0">
-                <a:solidFill>
-                  <a:srgbClr val="0D631B"/>
-                </a:solidFill>
-                <a:latin typeface="Calibri"/>
-              </a:rPr>
-              <a:t>6.5</a:t>
-            </a:r>
-          </a:p>
-        </p:txBody>
-      </p:sp>
-      <p:sp>
-        <p:nvSpPr>
-          <p:cNvPr id="29" name="Rectangle 28"/>
-          <p:cNvSpPr/>
-          <p:nvPr/>
-        </p:nvSpPr>
-        <p:spPr>
-          <a:xfrm>
-            <a:off x="1051560" y="4526280"/>
-            <a:ext cx="2560320" cy="411480"/>
-          </a:xfrm>
-          <a:prstGeom prst="rect">
-            <a:avLst/>
-          </a:prstGeom>
-          <a:solidFill>
-            <a:srgbClr val="0D631B"/>
-          </a:solidFill>
-          <a:ln>
-            <a:noFill/>
-          </a:ln>
-        </p:spPr>
-        <p:style>
-          <a:lnRef idx="1">
-            <a:schemeClr val="accent1"/>
-          </a:lnRef>
-          <a:fillRef idx="3">
-            <a:schemeClr val="accent1"/>
-          </a:fillRef>
-          <a:effectRef idx="2">
-            <a:schemeClr val="accent1"/>
-          </a:effectRef>
-          <a:fontRef idx="minor">
-            <a:schemeClr val="lt1"/>
-          </a:fontRef>
-        </p:style>
-        <p:txBody>
-          <a:bodyPr rtlCol="0" anchor="ctr"/>
-          <a:lstStyle/>
-          <a:p>
-            <a:pPr algn="ctr"/>
-          </a:p>
-        </p:txBody>
-      </p:sp>
-      <p:sp>
-        <p:nvSpPr>
-          <p:cNvPr id="30" name="TextBox 29"/>
-          <p:cNvSpPr txBox="1"/>
-          <p:nvPr/>
-        </p:nvSpPr>
-        <p:spPr>
-          <a:xfrm>
-            <a:off x="1097280" y="4572000"/>
-            <a:ext cx="2468880" cy="320040"/>
-          </a:xfrm>
-          <a:prstGeom prst="rect">
-            <a:avLst/>
-          </a:prstGeom>
-          <a:noFill/>
-        </p:spPr>
-        <p:txBody>
-          <a:bodyPr wrap="square">
-            <a:spAutoFit/>
-          </a:bodyPr>
-          <a:lstStyle/>
-          <a:p>
-            <a:pPr algn="ctr"/>
-            <a:r>
-              <a:rPr sz="1000" b="1" i="0">
-                <a:solidFill>
-                  <a:srgbClr val="FFFFFF"/>
-                </a:solidFill>
-                <a:latin typeface="Calibri"/>
-              </a:rPr>
-              <a:t>🤖 Qwen AI: 🌾 PALAY — 94%</a:t>
-            </a:r>
-          </a:p>
-        </p:txBody>
-      </p:sp>
-      <p:sp>
-        <p:nvSpPr>
-          <p:cNvPr id="31" name="Rectangle 30"/>
-          <p:cNvSpPr/>
-          <p:nvPr/>
-        </p:nvSpPr>
-        <p:spPr>
-          <a:xfrm>
-            <a:off x="1051560" y="4956048"/>
-            <a:ext cx="2560320" cy="256032"/>
-          </a:xfrm>
-          <a:prstGeom prst="rect">
-            <a:avLst/>
-          </a:prstGeom>
-          <a:solidFill>
-            <a:srgbClr val="1A77F2"/>
-          </a:solidFill>
-          <a:ln>
-            <a:noFill/>
-          </a:ln>
-        </p:spPr>
-        <p:style>
-          <a:lnRef idx="1">
-            <a:schemeClr val="accent1"/>
-          </a:lnRef>
-          <a:fillRef idx="3">
-            <a:schemeClr val="accent1"/>
-          </a:fillRef>
-          <a:effectRef idx="2">
-            <a:schemeClr val="accent1"/>
-          </a:effectRef>
-          <a:fontRef idx="minor">
-            <a:schemeClr val="lt1"/>
-          </a:fontRef>
-        </p:style>
-        <p:txBody>
-          <a:bodyPr rtlCol="0" anchor="ctr"/>
-          <a:lstStyle/>
-          <a:p>
-            <a:pPr algn="ctr"/>
-          </a:p>
-        </p:txBody>
-      </p:sp>
-      <p:sp>
-        <p:nvSpPr>
-          <p:cNvPr id="32" name="TextBox 31"/>
-          <p:cNvSpPr txBox="1"/>
-          <p:nvPr/>
-        </p:nvSpPr>
-        <p:spPr>
-          <a:xfrm>
-            <a:off x="1097280" y="4983480"/>
-            <a:ext cx="2468880" cy="182880"/>
-          </a:xfrm>
-          <a:prstGeom prst="rect">
-            <a:avLst/>
-          </a:prstGeom>
-          <a:noFill/>
-        </p:spPr>
-        <p:txBody>
-          <a:bodyPr wrap="square">
-            <a:spAutoFit/>
-          </a:bodyPr>
-          <a:lstStyle/>
-          <a:p>
-            <a:pPr algn="ctr"/>
-            <a:r>
-              <a:rPr sz="750" b="1" i="0">
-                <a:solidFill>
-                  <a:srgbClr val="FFFFFF"/>
-                </a:solidFill>
-                <a:latin typeface="Calibri"/>
-              </a:rPr>
-              <a:t>Meta NLLB Filipino Translation</a:t>
-            </a:r>
-          </a:p>
-        </p:txBody>
-      </p:sp>
-      <p:sp>
-        <p:nvSpPr>
-          <p:cNvPr id="33" name="TextBox 32"/>
-          <p:cNvSpPr txBox="1"/>
-          <p:nvPr/>
-        </p:nvSpPr>
-        <p:spPr>
-          <a:xfrm>
-            <a:off x="1097280" y="5239512"/>
-            <a:ext cx="2468880" cy="914400"/>
-          </a:xfrm>
-          <a:prstGeom prst="rect">
-            <a:avLst/>
-          </a:prstGeom>
-          <a:noFill/>
-        </p:spPr>
-        <p:txBody>
-          <a:bodyPr wrap="square">
-            <a:spAutoFit/>
-          </a:bodyPr>
-          <a:lstStyle/>
-          <a:p>
-            <a:pPr algn="l"/>
-            <a:r>
-              <a:rPr sz="850" b="0" i="0">
-                <a:solidFill>
-                  <a:srgbClr val="181D17"/>
-                </a:solidFill>
-                <a:latin typeface="Calibri"/>
-              </a:rPr>
-              <a:t>FIL: Ang lupa ay may mataas na nitrogen at angkop na pH para sa pagtatanim ng palay.
-EN: High nitrogen and pH 6.5 are ideal for rice.</a:t>
-            </a:r>
-          </a:p>
-        </p:txBody>
-      </p:sp>
-      <p:sp>
-        <p:nvSpPr>
-          <p:cNvPr id="34" name="Rectangle 33"/>
-          <p:cNvSpPr/>
-          <p:nvPr/>
-        </p:nvSpPr>
-        <p:spPr>
-          <a:xfrm>
-            <a:off x="5669280" y="1005840"/>
-            <a:ext cx="6263640" cy="5623560"/>
-          </a:xfrm>
-          <a:prstGeom prst="rect">
-            <a:avLst/>
-          </a:prstGeom>
-          <a:solidFill>
-            <a:srgbClr val="FFFFFF"/>
-          </a:solidFill>
-          <a:ln w="12700">
-            <a:solidFill>
-              <a:srgbClr val="E5EADF"/>
-            </a:solidFill>
-          </a:ln>
-        </p:spPr>
-        <p:style>
-          <a:lnRef idx="1">
-            <a:schemeClr val="accent1"/>
-          </a:lnRef>
-          <a:fillRef idx="3">
-            <a:schemeClr val="accent1"/>
-          </a:fillRef>
-          <a:effectRef idx="2">
-            <a:schemeClr val="accent1"/>
-          </a:effectRef>
-          <a:fontRef idx="minor">
-            <a:schemeClr val="lt1"/>
-          </a:fontRef>
-        </p:style>
-        <p:txBody>
-          <a:bodyPr rtlCol="0" anchor="ctr"/>
-          <a:lstStyle/>
-          <a:p>
-            <a:pPr algn="ctr"/>
-          </a:p>
-        </p:txBody>
-      </p:sp>
-      <p:sp>
-        <p:nvSpPr>
-          <p:cNvPr id="35" name="TextBox 34"/>
-          <p:cNvSpPr txBox="1"/>
-          <p:nvPr/>
-        </p:nvSpPr>
-        <p:spPr>
-          <a:xfrm>
-            <a:off x="5806440" y="1097280"/>
-            <a:ext cx="5989320" cy="347472"/>
-          </a:xfrm>
-          <a:prstGeom prst="rect">
-            <a:avLst/>
-          </a:prstGeom>
-          <a:noFill/>
-        </p:spPr>
-        <p:txBody>
-          <a:bodyPr wrap="square">
-            <a:spAutoFit/>
-          </a:bodyPr>
-          <a:lstStyle/>
-          <a:p>
-            <a:pPr algn="l"/>
-            <a:r>
-              <a:rPr sz="1400" b="1" i="0">
-                <a:solidFill>
-                  <a:srgbClr val="0D631B"/>
-                </a:solidFill>
-                <a:latin typeface="Calibri"/>
-              </a:rPr>
-              <a:t>Farmer View — How It Works</a:t>
-            </a:r>
-          </a:p>
-        </p:txBody>
-      </p:sp>
-      <p:sp>
-        <p:nvSpPr>
-          <p:cNvPr id="36" name="Rectangle 35"/>
-          <p:cNvSpPr/>
-          <p:nvPr/>
-        </p:nvSpPr>
-        <p:spPr>
-          <a:xfrm>
-            <a:off x="5806440" y="1609344"/>
-            <a:ext cx="64008" cy="548640"/>
-          </a:xfrm>
-          <a:prstGeom prst="rect">
-            <a:avLst/>
-          </a:prstGeom>
-          <a:solidFill>
-            <a:srgbClr val="0D631B"/>
-          </a:solidFill>
-          <a:ln>
-            <a:noFill/>
-          </a:ln>
-        </p:spPr>
-        <p:style>
-          <a:lnRef idx="1">
-            <a:schemeClr val="accent1"/>
-          </a:lnRef>
-          <a:fillRef idx="3">
-            <a:schemeClr val="accent1"/>
-          </a:fillRef>
-          <a:effectRef idx="2">
-            <a:schemeClr val="accent1"/>
-          </a:effectRef>
-          <a:fontRef idx="minor">
-            <a:schemeClr val="lt1"/>
-          </a:fontRef>
-        </p:style>
-        <p:txBody>
-          <a:bodyPr rtlCol="0" anchor="ctr"/>
-          <a:lstStyle/>
-          <a:p>
-            <a:pPr algn="ctr"/>
-          </a:p>
-        </p:txBody>
-      </p:sp>
-      <p:sp>
-        <p:nvSpPr>
-          <p:cNvPr id="37" name="TextBox 36"/>
-          <p:cNvSpPr txBox="1"/>
-          <p:nvPr/>
-        </p:nvSpPr>
-        <p:spPr>
-          <a:xfrm>
-            <a:off x="5961888" y="1572768"/>
-            <a:ext cx="5852160" cy="292608"/>
-          </a:xfrm>
-          <a:prstGeom prst="rect">
-            <a:avLst/>
-          </a:prstGeom>
-          <a:noFill/>
-        </p:spPr>
-        <p:txBody>
-          <a:bodyPr wrap="square">
-            <a:spAutoFit/>
-          </a:bodyPr>
-          <a:lstStyle/>
-          <a:p>
-            <a:pPr algn="l"/>
-            <a:r>
-              <a:rPr sz="1200" b="1" i="0">
-                <a:solidFill>
-                  <a:srgbClr val="0D631B"/>
-                </a:solidFill>
-                <a:latin typeface="Calibri"/>
-              </a:rPr>
-              <a:t>Login with Farm Name Only</a:t>
-            </a:r>
-          </a:p>
-        </p:txBody>
-      </p:sp>
-      <p:sp>
-        <p:nvSpPr>
-          <p:cNvPr id="38" name="TextBox 37"/>
-          <p:cNvSpPr txBox="1"/>
-          <p:nvPr/>
-        </p:nvSpPr>
-        <p:spPr>
-          <a:xfrm>
-            <a:off x="5961888" y="1874520"/>
-            <a:ext cx="5852160" cy="457200"/>
-          </a:xfrm>
-          <a:prstGeom prst="rect">
-            <a:avLst/>
-          </a:prstGeom>
-          <a:noFill/>
-        </p:spPr>
-        <p:txBody>
-          <a:bodyPr wrap="square">
-            <a:spAutoFit/>
-          </a:bodyPr>
-          <a:lstStyle/>
-          <a:p>
-            <a:pPr algn="l"/>
-            <a:r>
-              <a:rPr sz="1000" b="0" i="0">
-                <a:solidFill>
-                  <a:srgbClr val="40493D"/>
-                </a:solidFill>
-                <a:latin typeface="Calibri"/>
-              </a:rPr>
-              <a:t>No password required. Farmers identify themselves by their registered farm name — designed for low-tech, rural users.</a:t>
-            </a:r>
-          </a:p>
-        </p:txBody>
-      </p:sp>
-      <p:sp>
-        <p:nvSpPr>
-          <p:cNvPr id="39" name="Rectangle 38"/>
-          <p:cNvSpPr/>
-          <p:nvPr/>
-        </p:nvSpPr>
-        <p:spPr>
-          <a:xfrm>
-            <a:off x="5806440" y="2414016"/>
-            <a:ext cx="64008" cy="548640"/>
-          </a:xfrm>
-          <a:prstGeom prst="rect">
-            <a:avLst/>
-          </a:prstGeom>
-          <a:solidFill>
-            <a:srgbClr val="E65C00"/>
-          </a:solidFill>
-          <a:ln>
-            <a:noFill/>
-          </a:ln>
-        </p:spPr>
-        <p:style>
-          <a:lnRef idx="1">
-            <a:schemeClr val="accent1"/>
-          </a:lnRef>
-          <a:fillRef idx="3">
-            <a:schemeClr val="accent1"/>
-          </a:fillRef>
-          <a:effectRef idx="2">
-            <a:schemeClr val="accent1"/>
-          </a:effectRef>
-          <a:fontRef idx="minor">
-            <a:schemeClr val="lt1"/>
-          </a:fontRef>
-        </p:style>
-        <p:txBody>
-          <a:bodyPr rtlCol="0" anchor="ctr"/>
-          <a:lstStyle/>
-          <a:p>
-            <a:pPr algn="ctr"/>
-          </a:p>
-        </p:txBody>
-      </p:sp>
-      <p:sp>
-        <p:nvSpPr>
-          <p:cNvPr id="40" name="TextBox 39"/>
-          <p:cNvSpPr txBox="1"/>
-          <p:nvPr/>
-        </p:nvSpPr>
-        <p:spPr>
-          <a:xfrm>
-            <a:off x="5961888" y="2377440"/>
-            <a:ext cx="5852160" cy="292608"/>
-          </a:xfrm>
-          <a:prstGeom prst="rect">
-            <a:avLst/>
-          </a:prstGeom>
-          <a:noFill/>
-        </p:spPr>
-        <p:txBody>
-          <a:bodyPr wrap="square">
-            <a:spAutoFit/>
-          </a:bodyPr>
-          <a:lstStyle/>
-          <a:p>
-            <a:pPr algn="l"/>
-            <a:r>
-              <a:rPr sz="1200" b="1" i="0">
-                <a:solidFill>
-                  <a:srgbClr val="E65C00"/>
-                </a:solidFill>
-                <a:latin typeface="Calibri"/>
-              </a:rPr>
-              <a:t>Live IoT Sensor Dashboard</a:t>
-            </a:r>
-          </a:p>
-        </p:txBody>
-      </p:sp>
-      <p:sp>
-        <p:nvSpPr>
-          <p:cNvPr id="41" name="TextBox 40"/>
-          <p:cNvSpPr txBox="1"/>
-          <p:nvPr/>
-        </p:nvSpPr>
-        <p:spPr>
-          <a:xfrm>
-            <a:off x="5961888" y="2679192"/>
-            <a:ext cx="5852160" cy="457200"/>
-          </a:xfrm>
-          <a:prstGeom prst="rect">
-            <a:avLst/>
-          </a:prstGeom>
-          <a:noFill/>
-        </p:spPr>
-        <p:txBody>
-          <a:bodyPr wrap="square">
-            <a:spAutoFit/>
-          </a:bodyPr>
-          <a:lstStyle/>
-          <a:p>
-            <a:pPr algn="l"/>
-            <a:r>
-              <a:rPr sz="1000" b="0" i="0">
-                <a:solidFill>
-                  <a:srgbClr val="40493D"/>
-                </a:solidFill>
-                <a:latin typeface="Calibri"/>
-              </a:rPr>
-              <a:t>Displays real-time N, P, K, pH, temperature, humidity, and rainfall from all IoT sensors installed on their plots.</a:t>
-            </a:r>
-          </a:p>
-        </p:txBody>
-      </p:sp>
-      <p:sp>
-        <p:nvSpPr>
-          <p:cNvPr id="42" name="Rectangle 41"/>
-          <p:cNvSpPr/>
-          <p:nvPr/>
-        </p:nvSpPr>
-        <p:spPr>
-          <a:xfrm>
-            <a:off x="5806440" y="3218688"/>
-            <a:ext cx="64008" cy="548640"/>
-          </a:xfrm>
-          <a:prstGeom prst="rect">
-            <a:avLst/>
-          </a:prstGeom>
-          <a:solidFill>
-            <a:srgbClr val="2E7D32"/>
-          </a:solidFill>
-          <a:ln>
-            <a:noFill/>
-          </a:ln>
-        </p:spPr>
-        <p:style>
-          <a:lnRef idx="1">
-            <a:schemeClr val="accent1"/>
-          </a:lnRef>
-          <a:fillRef idx="3">
-            <a:schemeClr val="accent1"/>
-          </a:fillRef>
-          <a:effectRef idx="2">
-            <a:schemeClr val="accent1"/>
-          </a:effectRef>
-          <a:fontRef idx="minor">
-            <a:schemeClr val="lt1"/>
-          </a:fontRef>
-        </p:style>
-        <p:txBody>
-          <a:bodyPr rtlCol="0" anchor="ctr"/>
-          <a:lstStyle/>
-          <a:p>
-            <a:pPr algn="ctr"/>
-          </a:p>
-        </p:txBody>
-      </p:sp>
-      <p:sp>
-        <p:nvSpPr>
-          <p:cNvPr id="43" name="TextBox 42"/>
-          <p:cNvSpPr txBox="1"/>
-          <p:nvPr/>
-        </p:nvSpPr>
-        <p:spPr>
-          <a:xfrm>
-            <a:off x="5961888" y="3182112"/>
-            <a:ext cx="5852160" cy="292608"/>
-          </a:xfrm>
-          <a:prstGeom prst="rect">
-            <a:avLst/>
-          </a:prstGeom>
-          <a:noFill/>
-        </p:spPr>
-        <p:txBody>
-          <a:bodyPr wrap="square">
-            <a:spAutoFit/>
-          </a:bodyPr>
-          <a:lstStyle/>
-          <a:p>
-            <a:pPr algn="l"/>
-            <a:r>
-              <a:rPr sz="1200" b="1" i="0">
-                <a:solidFill>
-                  <a:srgbClr val="2E7D32"/>
-                </a:solidFill>
-                <a:latin typeface="Calibri"/>
-              </a:rPr>
-              <a:t>Qwen AI Crop Recommendation</a:t>
-            </a:r>
-          </a:p>
-        </p:txBody>
-      </p:sp>
-      <p:sp>
-        <p:nvSpPr>
-          <p:cNvPr id="44" name="TextBox 43"/>
-          <p:cNvSpPr txBox="1"/>
-          <p:nvPr/>
-        </p:nvSpPr>
-        <p:spPr>
-          <a:xfrm>
-            <a:off x="5961888" y="3483864"/>
-            <a:ext cx="5852160" cy="457200"/>
-          </a:xfrm>
-          <a:prstGeom prst="rect">
-            <a:avLst/>
-          </a:prstGeom>
-          <a:noFill/>
-        </p:spPr>
-        <p:txBody>
-          <a:bodyPr wrap="square">
-            <a:spAutoFit/>
-          </a:bodyPr>
-          <a:lstStyle/>
-          <a:p>
-            <a:pPr algn="l"/>
-            <a:r>
-              <a:rPr sz="1000" b="0" i="0">
-                <a:solidFill>
-                  <a:srgbClr val="40493D"/>
-                </a:solidFill>
-                <a:latin typeface="Calibri"/>
-              </a:rPr>
-              <a:t>The offline Qwen model (served by Ollama) analyses live sensor data and recommends the best crop with a confidence %.</a:t>
-            </a:r>
-          </a:p>
-        </p:txBody>
-      </p:sp>
-      <p:sp>
-        <p:nvSpPr>
-          <p:cNvPr id="45" name="Rectangle 44"/>
-          <p:cNvSpPr/>
-          <p:nvPr/>
-        </p:nvSpPr>
-        <p:spPr>
-          <a:xfrm>
-            <a:off x="5806440" y="4023360"/>
-            <a:ext cx="64008" cy="548640"/>
-          </a:xfrm>
-          <a:prstGeom prst="rect">
-            <a:avLst/>
-          </a:prstGeom>
-          <a:solidFill>
-            <a:srgbClr val="1A77F2"/>
-          </a:solidFill>
-          <a:ln>
-            <a:noFill/>
-          </a:ln>
-        </p:spPr>
-        <p:style>
-          <a:lnRef idx="1">
-            <a:schemeClr val="accent1"/>
-          </a:lnRef>
-          <a:fillRef idx="3">
-            <a:schemeClr val="accent1"/>
-          </a:fillRef>
-          <a:effectRef idx="2">
-            <a:schemeClr val="accent1"/>
-          </a:effectRef>
-          <a:fontRef idx="minor">
-            <a:schemeClr val="lt1"/>
-          </a:fontRef>
-        </p:style>
-        <p:txBody>
-          <a:bodyPr rtlCol="0" anchor="ctr"/>
-          <a:lstStyle/>
-          <a:p>
-            <a:pPr algn="ctr"/>
-          </a:p>
-        </p:txBody>
-      </p:sp>
-      <p:sp>
-        <p:nvSpPr>
-          <p:cNvPr id="46" name="TextBox 45"/>
-          <p:cNvSpPr txBox="1"/>
-          <p:nvPr/>
-        </p:nvSpPr>
-        <p:spPr>
-          <a:xfrm>
-            <a:off x="5961888" y="3986784"/>
-            <a:ext cx="5852160" cy="292608"/>
-          </a:xfrm>
-          <a:prstGeom prst="rect">
-            <a:avLst/>
-          </a:prstGeom>
-          <a:noFill/>
-        </p:spPr>
-        <p:txBody>
-          <a:bodyPr wrap="square">
-            <a:spAutoFit/>
-          </a:bodyPr>
-          <a:lstStyle/>
-          <a:p>
-            <a:pPr algn="l"/>
-            <a:r>
-              <a:rPr sz="1200" b="1" i="0">
-                <a:solidFill>
-                  <a:srgbClr val="1A77F2"/>
-                </a:solidFill>
-                <a:latin typeface="Calibri"/>
-              </a:rPr>
-              <a:t>Meta NLLB Filipino Translation</a:t>
-            </a:r>
-          </a:p>
-        </p:txBody>
-      </p:sp>
-      <p:sp>
-        <p:nvSpPr>
-          <p:cNvPr id="47" name="TextBox 46"/>
-          <p:cNvSpPr txBox="1"/>
-          <p:nvPr/>
-        </p:nvSpPr>
-        <p:spPr>
-          <a:xfrm>
-            <a:off x="5961888" y="4288536"/>
-            <a:ext cx="5852160" cy="457200"/>
-          </a:xfrm>
-          <a:prstGeom prst="rect">
-            <a:avLst/>
-          </a:prstGeom>
-          <a:noFill/>
-        </p:spPr>
-        <p:txBody>
-          <a:bodyPr wrap="square">
-            <a:spAutoFit/>
-          </a:bodyPr>
-          <a:lstStyle/>
-          <a:p>
-            <a:pPr algn="l"/>
-            <a:r>
-              <a:rPr sz="1000" b="0" i="0">
-                <a:solidFill>
-                  <a:srgbClr val="40493D"/>
-                </a:solidFill>
-                <a:latin typeface="Calibri"/>
-              </a:rPr>
-              <a:t>The Qwen explanation is automatically translated to Filipino using Meta's NLLB-200 model — offline, no API needed.</a:t>
-            </a:r>
-          </a:p>
-        </p:txBody>
-      </p:sp>
-      <p:sp>
-        <p:nvSpPr>
-          <p:cNvPr id="48" name="Rectangle 47"/>
-          <p:cNvSpPr/>
-          <p:nvPr/>
-        </p:nvSpPr>
-        <p:spPr>
-          <a:xfrm>
-            <a:off x="5806440" y="4828032"/>
-            <a:ext cx="64008" cy="548640"/>
-          </a:xfrm>
-          <a:prstGeom prst="rect">
-            <a:avLst/>
-          </a:prstGeom>
-          <a:solidFill>
-            <a:srgbClr val="1865D4"/>
-          </a:solidFill>
-          <a:ln>
-            <a:noFill/>
-          </a:ln>
-        </p:spPr>
-        <p:style>
-          <a:lnRef idx="1">
-            <a:schemeClr val="accent1"/>
-          </a:lnRef>
-          <a:fillRef idx="3">
-            <a:schemeClr val="accent1"/>
-          </a:fillRef>
-          <a:effectRef idx="2">
-            <a:schemeClr val="accent1"/>
-          </a:effectRef>
-          <a:fontRef idx="minor">
-            <a:schemeClr val="lt1"/>
-          </a:fontRef>
-        </p:style>
-        <p:txBody>
-          <a:bodyPr rtlCol="0" anchor="ctr"/>
-          <a:lstStyle/>
-          <a:p>
-            <a:pPr algn="ctr"/>
-          </a:p>
-        </p:txBody>
-      </p:sp>
-      <p:sp>
-        <p:nvSpPr>
-          <p:cNvPr id="49" name="TextBox 48"/>
-          <p:cNvSpPr txBox="1"/>
-          <p:nvPr/>
-        </p:nvSpPr>
-        <p:spPr>
-          <a:xfrm>
-            <a:off x="5961888" y="4791456"/>
-            <a:ext cx="5852160" cy="292608"/>
-          </a:xfrm>
-          <a:prstGeom prst="rect">
-            <a:avLst/>
-          </a:prstGeom>
-          <a:noFill/>
-        </p:spPr>
-        <p:txBody>
-          <a:bodyPr wrap="square">
-            <a:spAutoFit/>
-          </a:bodyPr>
-          <a:lstStyle/>
-          <a:p>
-            <a:pPr algn="l"/>
-            <a:r>
-              <a:rPr sz="1200" b="1" i="0">
-                <a:solidFill>
-                  <a:srgbClr val="1865D4"/>
-                </a:solidFill>
-                <a:latin typeface="Calibri"/>
-              </a:rPr>
-              <a:t>Google Maps Farm View</a:t>
-            </a:r>
-          </a:p>
-        </p:txBody>
-      </p:sp>
-      <p:sp>
-        <p:nvSpPr>
-          <p:cNvPr id="50" name="TextBox 49"/>
-          <p:cNvSpPr txBox="1"/>
-          <p:nvPr/>
-        </p:nvSpPr>
-        <p:spPr>
-          <a:xfrm>
-            <a:off x="5961888" y="5093208"/>
-            <a:ext cx="5852160" cy="457200"/>
-          </a:xfrm>
-          <a:prstGeom prst="rect">
-            <a:avLst/>
-          </a:prstGeom>
-          <a:noFill/>
-        </p:spPr>
-        <p:txBody>
-          <a:bodyPr wrap="square">
-            <a:spAutoFit/>
-          </a:bodyPr>
-          <a:lstStyle/>
-          <a:p>
-            <a:pPr algn="l"/>
-            <a:r>
-              <a:rPr sz="1000" b="0" i="0">
-                <a:solidFill>
-                  <a:srgbClr val="40493D"/>
-                </a:solidFill>
-                <a:latin typeface="Calibri"/>
-              </a:rPr>
-              <a:t>Farmer sees their farm boundary and sensor locations on an embedded Google Map with live reading overlays.</a:t>
-            </a:r>
-          </a:p>
-        </p:txBody>
-      </p:sp>
-      <p:sp>
-        <p:nvSpPr>
-          <p:cNvPr id="51" name="Rectangle 50"/>
-          <p:cNvSpPr/>
-          <p:nvPr/>
-        </p:nvSpPr>
-        <p:spPr>
-          <a:xfrm>
-            <a:off x="5806440" y="5632704"/>
-            <a:ext cx="64008" cy="548640"/>
-          </a:xfrm>
-          <a:prstGeom prst="rect">
-            <a:avLst/>
-          </a:prstGeom>
-          <a:solidFill>
-            <a:srgbClr val="0D631B"/>
-          </a:solidFill>
-          <a:ln>
-            <a:noFill/>
-          </a:ln>
-        </p:spPr>
-        <p:style>
-          <a:lnRef idx="1">
-            <a:schemeClr val="accent1"/>
-          </a:lnRef>
-          <a:fillRef idx="3">
-            <a:schemeClr val="accent1"/>
-          </a:fillRef>
-          <a:effectRef idx="2">
-            <a:schemeClr val="accent1"/>
-          </a:effectRef>
-          <a:fontRef idx="minor">
-            <a:schemeClr val="lt1"/>
-          </a:fontRef>
-        </p:style>
-        <p:txBody>
-          <a:bodyPr rtlCol="0" anchor="ctr"/>
-          <a:lstStyle/>
-          <a:p>
-            <a:pPr algn="ctr"/>
-          </a:p>
-        </p:txBody>
-      </p:sp>
-      <p:sp>
-        <p:nvSpPr>
-          <p:cNvPr id="52" name="TextBox 51"/>
-          <p:cNvSpPr txBox="1"/>
-          <p:nvPr/>
-        </p:nvSpPr>
-        <p:spPr>
-          <a:xfrm>
-            <a:off x="5961888" y="5596128"/>
-            <a:ext cx="5852160" cy="292608"/>
-          </a:xfrm>
-          <a:prstGeom prst="rect">
-            <a:avLst/>
-          </a:prstGeom>
-          <a:noFill/>
-        </p:spPr>
-        <p:txBody>
-          <a:bodyPr wrap="square">
-            <a:spAutoFit/>
-          </a:bodyPr>
-          <a:lstStyle/>
-          <a:p>
-            <a:pPr algn="l"/>
-            <a:r>
-              <a:rPr sz="1200" b="1" i="0">
-                <a:solidFill>
-                  <a:srgbClr val="0D631B"/>
-                </a:solidFill>
-                <a:latin typeface="Calibri"/>
-              </a:rPr>
-              <a:t>Whole-Farm Aggregated View</a:t>
-            </a:r>
-          </a:p>
-        </p:txBody>
-      </p:sp>
-      <p:sp>
-        <p:nvSpPr>
-          <p:cNvPr id="53" name="TextBox 52"/>
-          <p:cNvSpPr txBox="1"/>
-          <p:nvPr/>
-        </p:nvSpPr>
-        <p:spPr>
-          <a:xfrm>
-            <a:off x="5961888" y="5897880"/>
-            <a:ext cx="5852160" cy="457200"/>
-          </a:xfrm>
-          <a:prstGeom prst="rect">
-            <a:avLst/>
-          </a:prstGeom>
-          <a:noFill/>
-        </p:spPr>
-        <p:txBody>
-          <a:bodyPr wrap="square">
-            <a:spAutoFit/>
-          </a:bodyPr>
-          <a:lstStyle/>
-          <a:p>
-            <a:pPr algn="l"/>
-            <a:r>
-              <a:rPr sz="1000" b="0" i="0">
-                <a:solidFill>
-                  <a:srgbClr val="40493D"/>
-                </a:solidFill>
-                <a:latin typeface="Calibri"/>
-              </a:rPr>
-              <a:t>If multiple plots exist, the system averages all sensor readings and gives one unified farm-wide recommendation.</a:t>
-            </a:r>
+            <a:endParaRPr/>
           </a:p>
         </p:txBody>
       </p:sp>
@@ -20374,7 +15202,7 @@
 </file>
 
 <file path=ppt/slides/slide7.xml><?xml version="1.0" encoding="utf-8"?>
-<p:sld xmlns:a="http://schemas.openxmlformats.org/drawingml/2006/main" xmlns:p="http://schemas.openxmlformats.org/presentationml/2006/main" xmlns:r="http://schemas.openxmlformats.org/officeDocument/2006/relationships">
+<p:sld xmlns:a="http://schemas.openxmlformats.org/drawingml/2006/main" xmlns:r="http://schemas.openxmlformats.org/officeDocument/2006/relationships" xmlns:p="http://schemas.openxmlformats.org/presentationml/2006/main">
   <p:cSld>
     <p:bg>
       <p:bgPr>
@@ -20390,7 +15218,14 @@
         <p:cNvGrpSpPr/>
         <p:nvPr/>
       </p:nvGrpSpPr>
-      <p:grpSpPr/>
+      <p:grpSpPr>
+        <a:xfrm>
+          <a:off x="0" y="0"/>
+          <a:ext cx="0" cy="0"/>
+          <a:chOff x="0" y="0"/>
+          <a:chExt cx="0" cy="0"/>
+        </a:xfrm>
+      </p:grpSpPr>
       <p:sp>
         <p:nvSpPr>
           <p:cNvPr id="2" name="Rectangle 1"/>
@@ -20431,6 +15266,7 @@
           <a:lstStyle/>
           <a:p>
             <a:pPr algn="ctr"/>
+            <a:endParaRPr/>
           </a:p>
         </p:txBody>
       </p:sp>
@@ -20544,6 +15380,7 @@
           <a:lstStyle/>
           <a:p>
             <a:pPr algn="ctr"/>
+            <a:endParaRPr/>
           </a:p>
         </p:txBody>
       </p:sp>
@@ -20624,6 +15461,7 @@
           <a:lstStyle/>
           <a:p>
             <a:pPr algn="ctr"/>
+            <a:endParaRPr/>
           </a:p>
         </p:txBody>
       </p:sp>
@@ -20702,6 +15540,7 @@
           <a:lstStyle/>
           <a:p>
             <a:pPr algn="ctr"/>
+            <a:endParaRPr/>
           </a:p>
         </p:txBody>
       </p:sp>
@@ -20780,6 +15619,7 @@
           <a:lstStyle/>
           <a:p>
             <a:pPr algn="ctr"/>
+            <a:endParaRPr/>
           </a:p>
         </p:txBody>
       </p:sp>
@@ -20893,6 +15733,7 @@
           <a:lstStyle/>
           <a:p>
             <a:pPr algn="ctr"/>
+            <a:endParaRPr/>
           </a:p>
         </p:txBody>
       </p:sp>
@@ -20971,6 +15812,7 @@
           <a:lstStyle/>
           <a:p>
             <a:pPr algn="ctr"/>
+            <a:endParaRPr/>
           </a:p>
         </p:txBody>
       </p:sp>
@@ -21119,6 +15961,7 @@
           <a:lstStyle/>
           <a:p>
             <a:pPr algn="ctr"/>
+            <a:endParaRPr/>
           </a:p>
         </p:txBody>
       </p:sp>
@@ -21267,6 +16110,7 @@
           <a:lstStyle/>
           <a:p>
             <a:pPr algn="ctr"/>
+            <a:endParaRPr/>
           </a:p>
         </p:txBody>
       </p:sp>
@@ -21415,6 +16259,7 @@
           <a:lstStyle/>
           <a:p>
             <a:pPr algn="ctr"/>
+            <a:endParaRPr/>
           </a:p>
         </p:txBody>
       </p:sp>
@@ -21563,6 +16408,7 @@
           <a:lstStyle/>
           <a:p>
             <a:pPr algn="ctr"/>
+            <a:endParaRPr/>
           </a:p>
         </p:txBody>
       </p:sp>
@@ -21711,6 +16557,7 @@
           <a:lstStyle/>
           <a:p>
             <a:pPr algn="ctr"/>
+            <a:endParaRPr/>
           </a:p>
         </p:txBody>
       </p:sp>
@@ -21826,6 +16673,7 @@
           <a:lstStyle/>
           <a:p>
             <a:pPr algn="ctr"/>
+            <a:endParaRPr/>
           </a:p>
         </p:txBody>
       </p:sp>
@@ -21904,6 +16752,7 @@
           <a:lstStyle/>
           <a:p>
             <a:pPr algn="ctr"/>
+            <a:endParaRPr/>
           </a:p>
         </p:txBody>
       </p:sp>
@@ -22019,6 +16868,7 @@
           <a:lstStyle/>
           <a:p>
             <a:pPr algn="ctr"/>
+            <a:endParaRPr/>
           </a:p>
         </p:txBody>
       </p:sp>
@@ -22134,6 +16984,7 @@
           <a:lstStyle/>
           <a:p>
             <a:pPr algn="ctr"/>
+            <a:endParaRPr/>
           </a:p>
         </p:txBody>
       </p:sp>
@@ -22241,539 +17092,6 @@
                 <a:latin typeface="Calibri"/>
               </a:rPr>
               <a:t>The Google Maps integration (online) is used only for farm mapping and visualization. All AI decisions — Qwen crop recommendation, NLLB Filipino translation, and Random Forest model inference — run fully offline on the cooperative's own server. Farmers in areas with no internet still receive AI-powered guidance.</a:t>
-            </a:r>
-          </a:p>
-        </p:txBody>
-      </p:sp>
-      <p:sp>
-        <p:nvSpPr>
-          <p:cNvPr id="51" name="Rectangle 50"/>
-          <p:cNvSpPr/>
-          <p:nvPr/>
-        </p:nvSpPr>
-        <p:spPr>
-          <a:xfrm>
-            <a:off x="6537960" y="4343400"/>
-            <a:ext cx="5349240" cy="2286000"/>
-          </a:xfrm>
-          <a:prstGeom prst="rect">
-            <a:avLst/>
-          </a:prstGeom>
-          <a:solidFill>
-            <a:srgbClr val="0D631B"/>
-          </a:solidFill>
-          <a:ln>
-            <a:noFill/>
-          </a:ln>
-        </p:spPr>
-        <p:style>
-          <a:lnRef idx="1">
-            <a:schemeClr val="accent1"/>
-          </a:lnRef>
-          <a:fillRef idx="3">
-            <a:schemeClr val="accent1"/>
-          </a:fillRef>
-          <a:effectRef idx="2">
-            <a:schemeClr val="accent1"/>
-          </a:effectRef>
-          <a:fontRef idx="minor">
-            <a:schemeClr val="lt1"/>
-          </a:fontRef>
-        </p:style>
-        <p:txBody>
-          <a:bodyPr rtlCol="0" anchor="ctr"/>
-          <a:lstStyle/>
-          <a:p>
-            <a:pPr algn="ctr"/>
-          </a:p>
-        </p:txBody>
-      </p:sp>
-      <p:sp>
-        <p:nvSpPr>
-          <p:cNvPr id="52" name="TextBox 51"/>
-          <p:cNvSpPr txBox="1"/>
-          <p:nvPr/>
-        </p:nvSpPr>
-        <p:spPr>
-          <a:xfrm>
-            <a:off x="6675120" y="4416552"/>
-            <a:ext cx="5074920" cy="320040"/>
-          </a:xfrm>
-          <a:prstGeom prst="rect">
-            <a:avLst/>
-          </a:prstGeom>
-          <a:noFill/>
-        </p:spPr>
-        <p:txBody>
-          <a:bodyPr wrap="square">
-            <a:spAutoFit/>
-          </a:bodyPr>
-          <a:lstStyle/>
-          <a:p>
-            <a:pPr algn="l"/>
-            <a:r>
-              <a:rPr sz="1200" b="1" i="0">
-                <a:solidFill>
-                  <a:srgbClr val="FFFFFF"/>
-                </a:solidFill>
-                <a:latin typeface="Calibri"/>
-              </a:rPr>
-              <a:t>Hardware &amp; Sensor Setup Costs</a:t>
-            </a:r>
-          </a:p>
-        </p:txBody>
-      </p:sp>
-      <p:sp>
-        <p:nvSpPr>
-          <p:cNvPr id="53" name="TextBox 52"/>
-          <p:cNvSpPr txBox="1"/>
-          <p:nvPr/>
-        </p:nvSpPr>
-        <p:spPr>
-          <a:xfrm>
-            <a:off x="6675120" y="4828032"/>
-            <a:ext cx="1508760" cy="256032"/>
-          </a:xfrm>
-          <a:prstGeom prst="rect">
-            <a:avLst/>
-          </a:prstGeom>
-          <a:noFill/>
-        </p:spPr>
-        <p:txBody>
-          <a:bodyPr wrap="square">
-            <a:spAutoFit/>
-          </a:bodyPr>
-          <a:lstStyle/>
-          <a:p>
-            <a:pPr algn="l"/>
-            <a:r>
-              <a:rPr sz="950" b="1" i="0">
-                <a:solidFill>
-                  <a:srgbClr val="A3F69C"/>
-                </a:solidFill>
-                <a:latin typeface="Calibri"/>
-              </a:rPr>
-              <a:t>Server Laptop:</a:t>
-            </a:r>
-          </a:p>
-        </p:txBody>
-      </p:sp>
-      <p:sp>
-        <p:nvSpPr>
-          <p:cNvPr id="54" name="TextBox 53"/>
-          <p:cNvSpPr txBox="1"/>
-          <p:nvPr/>
-        </p:nvSpPr>
-        <p:spPr>
-          <a:xfrm>
-            <a:off x="8229600" y="4828032"/>
-            <a:ext cx="3566160" cy="256032"/>
-          </a:xfrm>
-          <a:prstGeom prst="rect">
-            <a:avLst/>
-          </a:prstGeom>
-          <a:noFill/>
-        </p:spPr>
-        <p:txBody>
-          <a:bodyPr wrap="square">
-            <a:spAutoFit/>
-          </a:bodyPr>
-          <a:lstStyle/>
-          <a:p>
-            <a:pPr algn="l"/>
-            <a:r>
-              <a:rPr sz="950" b="0" i="0">
-                <a:solidFill>
-                  <a:srgbClr val="FFFFFF"/>
-                </a:solidFill>
-                <a:latin typeface="Calibri"/>
-              </a:rPr>
-              <a:t>₱20,000   (≥ 8 GB RAM, ≥ 50 GB SSD)</a:t>
-            </a:r>
-          </a:p>
-        </p:txBody>
-      </p:sp>
-      <p:sp>
-        <p:nvSpPr>
-          <p:cNvPr id="55" name="TextBox 54"/>
-          <p:cNvSpPr txBox="1"/>
-          <p:nvPr/>
-        </p:nvSpPr>
-        <p:spPr>
-          <a:xfrm>
-            <a:off x="6675120" y="5129784"/>
-            <a:ext cx="1508760" cy="256032"/>
-          </a:xfrm>
-          <a:prstGeom prst="rect">
-            <a:avLst/>
-          </a:prstGeom>
-          <a:noFill/>
-        </p:spPr>
-        <p:txBody>
-          <a:bodyPr wrap="square">
-            <a:spAutoFit/>
-          </a:bodyPr>
-          <a:lstStyle/>
-          <a:p>
-            <a:pPr algn="l"/>
-            <a:r>
-              <a:rPr sz="950" b="1" i="0">
-                <a:solidFill>
-                  <a:srgbClr val="A3F69C"/>
-                </a:solidFill>
-                <a:latin typeface="Calibri"/>
-              </a:rPr>
-              <a:t>Per Sensor Node:</a:t>
-            </a:r>
-          </a:p>
-        </p:txBody>
-      </p:sp>
-      <p:sp>
-        <p:nvSpPr>
-          <p:cNvPr id="56" name="TextBox 55"/>
-          <p:cNvSpPr txBox="1"/>
-          <p:nvPr/>
-        </p:nvSpPr>
-        <p:spPr>
-          <a:xfrm>
-            <a:off x="8229600" y="5129784"/>
-            <a:ext cx="3566160" cy="256032"/>
-          </a:xfrm>
-          <a:prstGeom prst="rect">
-            <a:avLst/>
-          </a:prstGeom>
-          <a:noFill/>
-        </p:spPr>
-        <p:txBody>
-          <a:bodyPr wrap="square">
-            <a:spAutoFit/>
-          </a:bodyPr>
-          <a:lstStyle/>
-          <a:p>
-            <a:pPr algn="l"/>
-            <a:r>
-              <a:rPr sz="950" b="0" i="0">
-                <a:solidFill>
-                  <a:srgbClr val="FFFFFF"/>
-                </a:solidFill>
-                <a:latin typeface="Calibri"/>
-              </a:rPr>
-              <a:t>₱6,500    (NPK + pH + Temp + Humidity + Rain + ESP32 + Solar)</a:t>
-            </a:r>
-          </a:p>
-        </p:txBody>
-      </p:sp>
-      <p:sp>
-        <p:nvSpPr>
-          <p:cNvPr id="57" name="TextBox 56"/>
-          <p:cNvSpPr txBox="1"/>
-          <p:nvPr/>
-        </p:nvSpPr>
-        <p:spPr>
-          <a:xfrm>
-            <a:off x="6675120" y="5431536"/>
-            <a:ext cx="1508760" cy="256032"/>
-          </a:xfrm>
-          <a:prstGeom prst="rect">
-            <a:avLst/>
-          </a:prstGeom>
-          <a:noFill/>
-        </p:spPr>
-        <p:txBody>
-          <a:bodyPr wrap="square">
-            <a:spAutoFit/>
-          </a:bodyPr>
-          <a:lstStyle/>
-          <a:p>
-            <a:pPr algn="l"/>
-            <a:r>
-              <a:rPr sz="950" b="1" i="0">
-                <a:solidFill>
-                  <a:srgbClr val="A3F69C"/>
-                </a:solidFill>
-                <a:latin typeface="Calibri"/>
-              </a:rPr>
-              <a:t>Pilot (30 farms):</a:t>
-            </a:r>
-          </a:p>
-        </p:txBody>
-      </p:sp>
-      <p:sp>
-        <p:nvSpPr>
-          <p:cNvPr id="58" name="TextBox 57"/>
-          <p:cNvSpPr txBox="1"/>
-          <p:nvPr/>
-        </p:nvSpPr>
-        <p:spPr>
-          <a:xfrm>
-            <a:off x="8229600" y="5431536"/>
-            <a:ext cx="3566160" cy="256032"/>
-          </a:xfrm>
-          <a:prstGeom prst="rect">
-            <a:avLst/>
-          </a:prstGeom>
-          <a:noFill/>
-        </p:spPr>
-        <p:txBody>
-          <a:bodyPr wrap="square">
-            <a:spAutoFit/>
-          </a:bodyPr>
-          <a:lstStyle/>
-          <a:p>
-            <a:pPr algn="l"/>
-            <a:r>
-              <a:rPr sz="950" b="0" i="0">
-                <a:solidFill>
-                  <a:srgbClr val="FFFFFF"/>
-                </a:solidFill>
-                <a:latin typeface="Calibri"/>
-              </a:rPr>
-              <a:t>₱390,000  (60 nodes × ₱6,500, 2 per farm)</a:t>
-            </a:r>
-          </a:p>
-        </p:txBody>
-      </p:sp>
-      <p:sp>
-        <p:nvSpPr>
-          <p:cNvPr id="59" name="TextBox 58"/>
-          <p:cNvSpPr txBox="1"/>
-          <p:nvPr/>
-        </p:nvSpPr>
-        <p:spPr>
-          <a:xfrm>
-            <a:off x="6675120" y="5733288"/>
-            <a:ext cx="1508760" cy="256032"/>
-          </a:xfrm>
-          <a:prstGeom prst="rect">
-            <a:avLst/>
-          </a:prstGeom>
-          <a:noFill/>
-        </p:spPr>
-        <p:txBody>
-          <a:bodyPr wrap="square">
-            <a:spAutoFit/>
-          </a:bodyPr>
-          <a:lstStyle/>
-          <a:p>
-            <a:pPr algn="l"/>
-            <a:r>
-              <a:rPr sz="950" b="1" i="0">
-                <a:solidFill>
-                  <a:srgbClr val="A3F69C"/>
-                </a:solidFill>
-                <a:latin typeface="Calibri"/>
-              </a:rPr>
-              <a:t>Install &amp; Train:</a:t>
-            </a:r>
-          </a:p>
-        </p:txBody>
-      </p:sp>
-      <p:sp>
-        <p:nvSpPr>
-          <p:cNvPr id="60" name="TextBox 59"/>
-          <p:cNvSpPr txBox="1"/>
-          <p:nvPr/>
-        </p:nvSpPr>
-        <p:spPr>
-          <a:xfrm>
-            <a:off x="8229600" y="5733288"/>
-            <a:ext cx="3566160" cy="256032"/>
-          </a:xfrm>
-          <a:prstGeom prst="rect">
-            <a:avLst/>
-          </a:prstGeom>
-          <a:noFill/>
-        </p:spPr>
-        <p:txBody>
-          <a:bodyPr wrap="square">
-            <a:spAutoFit/>
-          </a:bodyPr>
-          <a:lstStyle/>
-          <a:p>
-            <a:pPr algn="l"/>
-            <a:r>
-              <a:rPr sz="950" b="0" i="0">
-                <a:solidFill>
-                  <a:srgbClr val="FFFFFF"/>
-                </a:solidFill>
-                <a:latin typeface="Calibri"/>
-              </a:rPr>
-              <a:t>₱18,000   (calibration + 2-day staff workshop)</a:t>
-            </a:r>
-          </a:p>
-        </p:txBody>
-      </p:sp>
-      <p:sp>
-        <p:nvSpPr>
-          <p:cNvPr id="61" name="TextBox 60"/>
-          <p:cNvSpPr txBox="1"/>
-          <p:nvPr/>
-        </p:nvSpPr>
-        <p:spPr>
-          <a:xfrm>
-            <a:off x="6675120" y="6035040"/>
-            <a:ext cx="1508760" cy="256032"/>
-          </a:xfrm>
-          <a:prstGeom prst="rect">
-            <a:avLst/>
-          </a:prstGeom>
-          <a:noFill/>
-        </p:spPr>
-        <p:txBody>
-          <a:bodyPr wrap="square">
-            <a:spAutoFit/>
-          </a:bodyPr>
-          <a:lstStyle/>
-          <a:p>
-            <a:pPr algn="l"/>
-            <a:r>
-              <a:rPr sz="950" b="1" i="0">
-                <a:solidFill>
-                  <a:srgbClr val="A3F69C"/>
-                </a:solidFill>
-                <a:latin typeface="Calibri"/>
-              </a:rPr>
-              <a:t>AI Models (USB):</a:t>
-            </a:r>
-          </a:p>
-        </p:txBody>
-      </p:sp>
-      <p:sp>
-        <p:nvSpPr>
-          <p:cNvPr id="62" name="TextBox 61"/>
-          <p:cNvSpPr txBox="1"/>
-          <p:nvPr/>
-        </p:nvSpPr>
-        <p:spPr>
-          <a:xfrm>
-            <a:off x="8229600" y="6035040"/>
-            <a:ext cx="3566160" cy="256032"/>
-          </a:xfrm>
-          <a:prstGeom prst="rect">
-            <a:avLst/>
-          </a:prstGeom>
-          <a:noFill/>
-        </p:spPr>
-        <p:txBody>
-          <a:bodyPr wrap="square">
-            <a:spAutoFit/>
-          </a:bodyPr>
-          <a:lstStyle/>
-          <a:p>
-            <a:pPr algn="l"/>
-            <a:r>
-              <a:rPr sz="950" b="0" i="0">
-                <a:solidFill>
-                  <a:srgbClr val="FFFFFF"/>
-                </a:solidFill>
-                <a:latin typeface="Calibri"/>
-              </a:rPr>
-              <a:t>₱0         (Qwen + NLLB installed once, free and open-source)</a:t>
-            </a:r>
-          </a:p>
-        </p:txBody>
-      </p:sp>
-      <p:sp>
-        <p:nvSpPr>
-          <p:cNvPr id="63" name="TextBox 62"/>
-          <p:cNvSpPr txBox="1"/>
-          <p:nvPr/>
-        </p:nvSpPr>
-        <p:spPr>
-          <a:xfrm>
-            <a:off x="6675120" y="6336792"/>
-            <a:ext cx="1508760" cy="256032"/>
-          </a:xfrm>
-          <a:prstGeom prst="rect">
-            <a:avLst/>
-          </a:prstGeom>
-          <a:noFill/>
-        </p:spPr>
-        <p:txBody>
-          <a:bodyPr wrap="square">
-            <a:spAutoFit/>
-          </a:bodyPr>
-          <a:lstStyle/>
-          <a:p>
-            <a:pPr algn="l"/>
-            <a:r>
-              <a:rPr sz="950" b="1" i="0">
-                <a:solidFill>
-                  <a:srgbClr val="A3F69C"/>
-                </a:solidFill>
-                <a:latin typeface="Calibri"/>
-              </a:rPr>
-              <a:t>Annual Running:</a:t>
-            </a:r>
-          </a:p>
-        </p:txBody>
-      </p:sp>
-      <p:sp>
-        <p:nvSpPr>
-          <p:cNvPr id="64" name="TextBox 63"/>
-          <p:cNvSpPr txBox="1"/>
-          <p:nvPr/>
-        </p:nvSpPr>
-        <p:spPr>
-          <a:xfrm>
-            <a:off x="8229600" y="6336792"/>
-            <a:ext cx="3566160" cy="256032"/>
-          </a:xfrm>
-          <a:prstGeom prst="rect">
-            <a:avLst/>
-          </a:prstGeom>
-          <a:noFill/>
-        </p:spPr>
-        <p:txBody>
-          <a:bodyPr wrap="square">
-            <a:spAutoFit/>
-          </a:bodyPr>
-          <a:lstStyle/>
-          <a:p>
-            <a:pPr algn="l"/>
-            <a:r>
-              <a:rPr sz="950" b="0" i="0">
-                <a:solidFill>
-                  <a:srgbClr val="FFFFFF"/>
-                </a:solidFill>
-                <a:latin typeface="Calibri"/>
-              </a:rPr>
-              <a:t>₱18,400/yr (sensor maintenance + electricity + updates)</a:t>
-            </a:r>
-          </a:p>
-        </p:txBody>
-      </p:sp>
-      <p:sp>
-        <p:nvSpPr>
-          <p:cNvPr id="65" name="TextBox 64"/>
-          <p:cNvSpPr txBox="1"/>
-          <p:nvPr/>
-        </p:nvSpPr>
-        <p:spPr>
-          <a:xfrm>
-            <a:off x="6675120" y="6638544"/>
-            <a:ext cx="1508760" cy="256032"/>
-          </a:xfrm>
-          <a:prstGeom prst="rect">
-            <a:avLst/>
-          </a:prstGeom>
-          <a:noFill/>
-        </p:spPr>
-        <p:txBody>
-          <a:bodyPr wrap="square">
-            <a:spAutoFit/>
-          </a:bodyPr>
-          <a:lstStyle/>
-          <a:p>
-            <a:pPr algn="l"/>
-            <a:r>
-              <a:rPr sz="950" b="1" i="0">
-                <a:solidFill>
-                  <a:srgbClr val="FED255"/>
-                </a:solidFill>
-                <a:latin typeface="Calibri"/>
-              </a:rPr>
-              <a:t>3-Year TCO:</a:t>
             </a:r>
           </a:p>
         </p:txBody>
@@ -22822,7 +17140,7 @@
 </file>
 
 <file path=ppt/slides/slide8.xml><?xml version="1.0" encoding="utf-8"?>
-<p:sld xmlns:a="http://schemas.openxmlformats.org/drawingml/2006/main" xmlns:p="http://schemas.openxmlformats.org/presentationml/2006/main" xmlns:r="http://schemas.openxmlformats.org/officeDocument/2006/relationships">
+<p:sld xmlns:a="http://schemas.openxmlformats.org/drawingml/2006/main" xmlns:r="http://schemas.openxmlformats.org/officeDocument/2006/relationships" xmlns:p="http://schemas.openxmlformats.org/presentationml/2006/main">
   <p:cSld>
     <p:bg>
       <p:bgPr>
@@ -22838,7 +17156,14 @@
         <p:cNvGrpSpPr/>
         <p:nvPr/>
       </p:nvGrpSpPr>
-      <p:grpSpPr/>
+      <p:grpSpPr>
+        <a:xfrm>
+          <a:off x="0" y="0"/>
+          <a:ext cx="0" cy="0"/>
+          <a:chOff x="0" y="0"/>
+          <a:chExt cx="0" cy="0"/>
+        </a:xfrm>
+      </p:grpSpPr>
       <p:sp>
         <p:nvSpPr>
           <p:cNvPr id="2" name="Rectangle 1"/>
@@ -22879,6 +17204,7 @@
           <a:lstStyle/>
           <a:p>
             <a:pPr algn="ctr"/>
+            <a:endParaRPr/>
           </a:p>
         </p:txBody>
       </p:sp>
@@ -22992,6 +17318,7 @@
           <a:lstStyle/>
           <a:p>
             <a:pPr algn="ctr"/>
+            <a:endParaRPr/>
           </a:p>
         </p:txBody>
       </p:sp>
@@ -23070,6 +17397,7 @@
           <a:lstStyle/>
           <a:p>
             <a:pPr algn="ctr"/>
+            <a:endParaRPr/>
           </a:p>
         </p:txBody>
       </p:sp>
@@ -23148,6 +17476,7 @@
           <a:lstStyle/>
           <a:p>
             <a:pPr algn="ctr"/>
+            <a:endParaRPr/>
           </a:p>
         </p:txBody>
       </p:sp>
@@ -23261,6 +17590,7 @@
           <a:lstStyle/>
           <a:p>
             <a:pPr algn="ctr"/>
+            <a:endParaRPr/>
           </a:p>
         </p:txBody>
       </p:sp>
@@ -23374,6 +17704,7 @@
           <a:lstStyle/>
           <a:p>
             <a:pPr algn="ctr"/>
+            <a:endParaRPr/>
           </a:p>
         </p:txBody>
       </p:sp>
@@ -23487,6 +17818,7 @@
           <a:lstStyle/>
           <a:p>
             <a:pPr algn="ctr"/>
+            <a:endParaRPr/>
           </a:p>
         </p:txBody>
       </p:sp>
@@ -23600,6 +17932,7 @@
           <a:lstStyle/>
           <a:p>
             <a:pPr algn="ctr"/>
+            <a:endParaRPr/>
           </a:p>
         </p:txBody>
       </p:sp>
@@ -23715,6 +18048,7 @@
           <a:lstStyle/>
           <a:p>
             <a:pPr algn="ctr"/>
+            <a:endParaRPr/>
           </a:p>
         </p:txBody>
       </p:sp>
@@ -23793,6 +18127,7 @@
           <a:lstStyle/>
           <a:p>
             <a:pPr algn="ctr"/>
+            <a:endParaRPr/>
           </a:p>
         </p:txBody>
       </p:sp>
@@ -23941,6 +18276,7 @@
           <a:lstStyle/>
           <a:p>
             <a:pPr algn="ctr"/>
+            <a:endParaRPr/>
           </a:p>
         </p:txBody>
       </p:sp>
@@ -24089,6 +18425,7 @@
           <a:lstStyle/>
           <a:p>
             <a:pPr algn="ctr"/>
+            <a:endParaRPr/>
           </a:p>
         </p:txBody>
       </p:sp>
@@ -24237,6 +18574,7 @@
           <a:lstStyle/>
           <a:p>
             <a:pPr algn="ctr"/>
+            <a:endParaRPr/>
           </a:p>
         </p:txBody>
       </p:sp>
@@ -24385,6 +18723,7 @@
           <a:lstStyle/>
           <a:p>
             <a:pPr algn="ctr"/>
+            <a:endParaRPr/>
           </a:p>
         </p:txBody>
       </p:sp>
@@ -24533,6 +18872,7 @@
           <a:lstStyle/>
           <a:p>
             <a:pPr algn="ctr"/>
+            <a:endParaRPr/>
           </a:p>
         </p:txBody>
       </p:sp>
@@ -24648,6 +18988,7 @@
           <a:lstStyle/>
           <a:p>
             <a:pPr algn="ctr"/>
+            <a:endParaRPr/>
           </a:p>
         </p:txBody>
       </p:sp>
@@ -24726,6 +19067,7 @@
           <a:lstStyle/>
           <a:p>
             <a:pPr algn="ctr"/>
+            <a:endParaRPr/>
           </a:p>
         </p:txBody>
       </p:sp>
@@ -24839,6 +19181,7 @@
           <a:lstStyle/>
           <a:p>
             <a:pPr algn="ctr"/>
+            <a:endParaRPr/>
           </a:p>
         </p:txBody>
       </p:sp>
@@ -24952,6 +19295,7 @@
           <a:lstStyle/>
           <a:p>
             <a:pPr algn="ctr"/>
+            <a:endParaRPr/>
           </a:p>
         </p:txBody>
       </p:sp>
@@ -25065,6 +19409,7 @@
           <a:lstStyle/>
           <a:p>
             <a:pPr algn="ctr"/>
+            <a:endParaRPr/>
           </a:p>
         </p:txBody>
       </p:sp>
@@ -25178,6 +19523,7 @@
           <a:lstStyle/>
           <a:p>
             <a:pPr algn="ctr"/>
+            <a:endParaRPr/>
           </a:p>
         </p:txBody>
       </p:sp>
@@ -25291,6 +19637,7 @@
           <a:lstStyle/>
           <a:p>
             <a:pPr algn="ctr"/>
+            <a:endParaRPr/>
           </a:p>
         </p:txBody>
       </p:sp>
@@ -25404,6 +19751,7 @@
           <a:lstStyle/>
           <a:p>
             <a:pPr algn="ctr"/>
+            <a:endParaRPr/>
           </a:p>
         </p:txBody>
       </p:sp>
@@ -25517,6 +19865,7 @@
           <a:lstStyle/>
           <a:p>
             <a:pPr algn="ctr"/>
+            <a:endParaRPr/>
           </a:p>
         </p:txBody>
       </p:sp>
@@ -25630,6 +19979,7 @@
           <a:lstStyle/>
           <a:p>
             <a:pPr algn="ctr"/>
+            <a:endParaRPr/>
           </a:p>
         </p:txBody>
       </p:sp>
@@ -25743,6 +20093,7 @@
           <a:lstStyle/>
           <a:p>
             <a:pPr algn="ctr"/>
+            <a:endParaRPr/>
           </a:p>
         </p:txBody>
       </p:sp>
@@ -25854,6 +20205,7 @@
           <a:lstStyle/>
           <a:p>
             <a:pPr algn="ctr"/>
+            <a:endParaRPr/>
           </a:p>
         </p:txBody>
       </p:sp>
@@ -25895,6 +20247,7 @@
           <a:lstStyle/>
           <a:p>
             <a:pPr algn="ctr"/>
+            <a:endParaRPr/>
           </a:p>
         </p:txBody>
       </p:sp>
@@ -25938,6 +20291,7 @@
           <a:lstStyle/>
           <a:p>
             <a:pPr algn="ctr"/>
+            <a:endParaRPr/>
           </a:p>
         </p:txBody>
       </p:sp>
@@ -26054,7 +20408,7 @@
         </p:nvSpPr>
         <p:spPr>
           <a:xfrm>
-            <a:off x="4023360" y="6016752"/>
+            <a:off x="3566160" y="6031484"/>
             <a:ext cx="822960" cy="182880"/>
           </a:xfrm>
           <a:prstGeom prst="rect">
@@ -26089,7 +20443,7 @@
         </p:nvSpPr>
         <p:spPr>
           <a:xfrm>
-            <a:off x="4023360" y="6199632"/>
+            <a:off x="3566160" y="6214364"/>
             <a:ext cx="822960" cy="228600"/>
           </a:xfrm>
           <a:prstGeom prst="rect">
@@ -26124,7 +20478,7 @@
         </p:nvSpPr>
         <p:spPr>
           <a:xfrm>
-            <a:off x="4892040" y="6016752"/>
+            <a:off x="4434840" y="6031484"/>
             <a:ext cx="822960" cy="182880"/>
           </a:xfrm>
           <a:prstGeom prst="rect">
@@ -26159,7 +20513,7 @@
         </p:nvSpPr>
         <p:spPr>
           <a:xfrm>
-            <a:off x="4892040" y="6199632"/>
+            <a:off x="4434840" y="6214364"/>
             <a:ext cx="822960" cy="228600"/>
           </a:xfrm>
           <a:prstGeom prst="rect">
@@ -26194,7 +20548,7 @@
         </p:nvSpPr>
         <p:spPr>
           <a:xfrm>
-            <a:off x="5577840" y="6016752"/>
+            <a:off x="5120640" y="6031484"/>
             <a:ext cx="822960" cy="182880"/>
           </a:xfrm>
           <a:prstGeom prst="rect">
@@ -26229,7 +20583,7 @@
         </p:nvSpPr>
         <p:spPr>
           <a:xfrm>
-            <a:off x="5577840" y="6199632"/>
+            <a:off x="5120640" y="6214364"/>
             <a:ext cx="822960" cy="228600"/>
           </a:xfrm>
           <a:prstGeom prst="rect">
@@ -26264,7 +20618,7 @@
         </p:nvSpPr>
         <p:spPr>
           <a:xfrm>
-            <a:off x="6217920" y="6016752"/>
+            <a:off x="5760720" y="6031484"/>
             <a:ext cx="822960" cy="182880"/>
           </a:xfrm>
           <a:prstGeom prst="rect">
@@ -26299,7 +20653,7 @@
         </p:nvSpPr>
         <p:spPr>
           <a:xfrm>
-            <a:off x="6217920" y="6199632"/>
+            <a:off x="5760720" y="6214364"/>
             <a:ext cx="822960" cy="228600"/>
           </a:xfrm>
           <a:prstGeom prst="rect">
@@ -26405,7 +20759,7 @@
 </file>
 
 <file path=ppt/slides/slide9.xml><?xml version="1.0" encoding="utf-8"?>
-<p:sld xmlns:a="http://schemas.openxmlformats.org/drawingml/2006/main" xmlns:p="http://schemas.openxmlformats.org/presentationml/2006/main" xmlns:r="http://schemas.openxmlformats.org/officeDocument/2006/relationships">
+<p:sld xmlns:a="http://schemas.openxmlformats.org/drawingml/2006/main" xmlns:r="http://schemas.openxmlformats.org/officeDocument/2006/relationships" xmlns:p="http://schemas.openxmlformats.org/presentationml/2006/main">
   <p:cSld>
     <p:bg>
       <p:bgPr>
@@ -26421,7 +20775,14 @@
         <p:cNvGrpSpPr/>
         <p:nvPr/>
       </p:nvGrpSpPr>
-      <p:grpSpPr/>
+      <p:grpSpPr>
+        <a:xfrm>
+          <a:off x="0" y="0"/>
+          <a:ext cx="0" cy="0"/>
+          <a:chOff x="0" y="0"/>
+          <a:chExt cx="0" cy="0"/>
+        </a:xfrm>
+      </p:grpSpPr>
       <p:sp>
         <p:nvSpPr>
           <p:cNvPr id="2" name="Rectangle 1"/>
@@ -26462,6 +20823,7 @@
           <a:lstStyle/>
           <a:p>
             <a:pPr algn="ctr"/>
+            <a:endParaRPr/>
           </a:p>
         </p:txBody>
       </p:sp>
@@ -26575,6 +20937,7 @@
           <a:lstStyle/>
           <a:p>
             <a:pPr algn="ctr"/>
+            <a:endParaRPr/>
           </a:p>
         </p:txBody>
       </p:sp>
@@ -26655,6 +21018,7 @@
           <a:lstStyle/>
           <a:p>
             <a:pPr algn="ctr"/>
+            <a:endParaRPr/>
           </a:p>
         </p:txBody>
       </p:sp>
@@ -26733,6 +21097,7 @@
           <a:lstStyle/>
           <a:p>
             <a:pPr algn="ctr"/>
+            <a:endParaRPr/>
           </a:p>
         </p:txBody>
       </p:sp>
@@ -26916,6 +21281,7 @@
           <a:lstStyle/>
           <a:p>
             <a:pPr algn="ctr"/>
+            <a:endParaRPr/>
           </a:p>
         </p:txBody>
       </p:sp>
@@ -26994,6 +21360,7 @@
           <a:lstStyle/>
           <a:p>
             <a:pPr algn="ctr"/>
+            <a:endParaRPr/>
           </a:p>
         </p:txBody>
       </p:sp>
@@ -27072,6 +21439,7 @@
           <a:lstStyle/>
           <a:p>
             <a:pPr algn="ctr"/>
+            <a:endParaRPr/>
           </a:p>
         </p:txBody>
       </p:sp>
@@ -27185,6 +21553,7 @@
           <a:lstStyle/>
           <a:p>
             <a:pPr algn="ctr"/>
+            <a:endParaRPr/>
           </a:p>
         </p:txBody>
       </p:sp>
@@ -27263,6 +21632,7 @@
           <a:lstStyle/>
           <a:p>
             <a:pPr algn="ctr"/>
+            <a:endParaRPr/>
           </a:p>
         </p:txBody>
       </p:sp>
@@ -27341,6 +21711,7 @@
           <a:lstStyle/>
           <a:p>
             <a:pPr algn="ctr"/>
+            <a:endParaRPr/>
           </a:p>
         </p:txBody>
       </p:sp>
@@ -27454,6 +21825,7 @@
           <a:lstStyle/>
           <a:p>
             <a:pPr algn="ctr"/>
+            <a:endParaRPr/>
           </a:p>
         </p:txBody>
       </p:sp>
@@ -27532,6 +21904,7 @@
           <a:lstStyle/>
           <a:p>
             <a:pPr algn="ctr"/>
+            <a:endParaRPr/>
           </a:p>
         </p:txBody>
       </p:sp>
@@ -27610,6 +21983,7 @@
           <a:lstStyle/>
           <a:p>
             <a:pPr algn="ctr"/>
+            <a:endParaRPr/>
           </a:p>
         </p:txBody>
       </p:sp>
@@ -27723,6 +22097,7 @@
           <a:lstStyle/>
           <a:p>
             <a:pPr algn="ctr"/>
+            <a:endParaRPr/>
           </a:p>
         </p:txBody>
       </p:sp>
@@ -27801,6 +22176,7 @@
           <a:lstStyle/>
           <a:p>
             <a:pPr algn="ctr"/>
+            <a:endParaRPr/>
           </a:p>
         </p:txBody>
       </p:sp>
@@ -27879,6 +22255,7 @@
           <a:lstStyle/>
           <a:p>
             <a:pPr algn="ctr"/>
+            <a:endParaRPr/>
           </a:p>
         </p:txBody>
       </p:sp>
@@ -27992,6 +22369,7 @@
           <a:lstStyle/>
           <a:p>
             <a:pPr algn="ctr"/>
+            <a:endParaRPr/>
           </a:p>
         </p:txBody>
       </p:sp>
@@ -28070,6 +22448,7 @@
           <a:lstStyle/>
           <a:p>
             <a:pPr algn="ctr"/>
+            <a:endParaRPr/>
           </a:p>
         </p:txBody>
       </p:sp>
@@ -28148,6 +22527,7 @@
           <a:lstStyle/>
           <a:p>
             <a:pPr algn="ctr"/>
+            <a:endParaRPr/>
           </a:p>
         </p:txBody>
       </p:sp>
@@ -28261,6 +22641,7 @@
           <a:lstStyle/>
           <a:p>
             <a:pPr algn="ctr"/>
+            <a:endParaRPr/>
           </a:p>
         </p:txBody>
       </p:sp>
@@ -28339,6 +22720,7 @@
           <a:lstStyle/>
           <a:p>
             <a:pPr algn="ctr"/>
+            <a:endParaRPr/>
           </a:p>
         </p:txBody>
       </p:sp>
@@ -28417,6 +22799,7 @@
           <a:lstStyle/>
           <a:p>
             <a:pPr algn="ctr"/>
+            <a:endParaRPr/>
           </a:p>
         </p:txBody>
       </p:sp>
@@ -28530,6 +22913,7 @@
           <a:lstStyle/>
           <a:p>
             <a:pPr algn="ctr"/>
+            <a:endParaRPr/>
           </a:p>
         </p:txBody>
       </p:sp>
@@ -28608,6 +22992,7 @@
           <a:lstStyle/>
           <a:p>
             <a:pPr algn="ctr"/>
+            <a:endParaRPr/>
           </a:p>
         </p:txBody>
       </p:sp>
@@ -28686,6 +23071,7 @@
           <a:lstStyle/>
           <a:p>
             <a:pPr algn="ctr"/>
+            <a:endParaRPr/>
           </a:p>
         </p:txBody>
       </p:sp>
@@ -28801,6 +23187,7 @@
           <a:lstStyle/>
           <a:p>
             <a:pPr algn="ctr"/>
+            <a:endParaRPr/>
           </a:p>
         </p:txBody>
       </p:sp>
@@ -28879,6 +23266,7 @@
           <a:lstStyle/>
           <a:p>
             <a:pPr algn="ctr"/>
+            <a:endParaRPr/>
           </a:p>
         </p:txBody>
       </p:sp>
@@ -28992,6 +23380,7 @@
           <a:lstStyle/>
           <a:p>
             <a:pPr algn="ctr"/>
+            <a:endParaRPr/>
           </a:p>
         </p:txBody>
       </p:sp>
@@ -29105,6 +23494,7 @@
           <a:lstStyle/>
           <a:p>
             <a:pPr algn="ctr"/>
+            <a:endParaRPr/>
           </a:p>
         </p:txBody>
       </p:sp>
@@ -29218,6 +23608,7 @@
           <a:lstStyle/>
           <a:p>
             <a:pPr algn="ctr"/>
+            <a:endParaRPr/>
           </a:p>
         </p:txBody>
       </p:sp>
@@ -29331,6 +23722,7 @@
           <a:lstStyle/>
           <a:p>
             <a:pPr algn="ctr"/>
+            <a:endParaRPr/>
           </a:p>
         </p:txBody>
       </p:sp>
